--- a/Slides/Chapter02.pptx
+++ b/Slides/Chapter02.pptx
@@ -152,6 +152,11 @@
       </a:defRPr>
     </a:lvl9pPr>
   </p:defaultTextStyle>
+  <p:extLst>
+    <p:ext uri="{EFAFB233-063F-42B5-8137-9DF3F51BA10A}">
+      <p15:sldGuideLst xmlns:p15="http://schemas.microsoft.com/office/powerpoint/2012/main"/>
+    </p:ext>
+  </p:extLst>
 </p:presentation>
 </file>
 
@@ -237,7 +242,7 @@
           <a:p>
             <a:fld id="{C594D6A2-E690-AE44-B31E-9BCFD0C67BA5}" type="datetimeFigureOut">
               <a:rPr lang="en-US" smtClean="0"/>
-              <a:t>11/20/25</a:t>
+              <a:t>8/27/26</a:t>
             </a:fld>
             <a:endParaRPr lang="en-US"/>
           </a:p>
@@ -1031,7 +1036,7 @@
           <a:p>
             <a:fld id="{624D9F20-0CDB-DC45-97C1-8E3888B449A2}" type="datetimeFigureOut">
               <a:rPr lang="en-US" smtClean="0"/>
-              <a:t>11/19/25</a:t>
+              <a:t>8/27/26</a:t>
             </a:fld>
             <a:endParaRPr lang="en-US"/>
           </a:p>
@@ -1239,7 +1244,7 @@
           <a:p>
             <a:fld id="{624D9F20-0CDB-DC45-97C1-8E3888B449A2}" type="datetimeFigureOut">
               <a:rPr lang="en-US" smtClean="0"/>
-              <a:t>11/19/25</a:t>
+              <a:t>8/27/26</a:t>
             </a:fld>
             <a:endParaRPr lang="en-US"/>
           </a:p>
@@ -1580,7 +1585,7 @@
             <a:fld id="{59E145AF-2465-1345-A673-F2664B07CED8}" type="datetime5">
               <a:rPr lang="en-US" smtClean="0"/>
               <a:pPr/>
-              <a:t>19-Nov-25</a:t>
+              <a:t>27-Aug-26</a:t>
             </a:fld>
             <a:endParaRPr lang="en-US" dirty="0"/>
           </a:p>
@@ -1866,7 +1871,7 @@
             <a:fld id="{59E145AF-2465-1345-A673-F2664B07CED8}" type="datetime5">
               <a:rPr lang="en-US" smtClean="0"/>
               <a:pPr/>
-              <a:t>19-Nov-25</a:t>
+              <a:t>27-Aug-26</a:t>
             </a:fld>
             <a:endParaRPr lang="en-US" dirty="0"/>
           </a:p>
@@ -2191,7 +2196,7 @@
             <a:fld id="{59E145AF-2465-1345-A673-F2664B07CED8}" type="datetime5">
               <a:rPr lang="en-US" smtClean="0"/>
               <a:pPr/>
-              <a:t>19-Nov-25</a:t>
+              <a:t>27-Aug-26</a:t>
             </a:fld>
             <a:endParaRPr lang="en-US" dirty="0"/>
           </a:p>
@@ -2589,7 +2594,7 @@
             <a:fld id="{59E145AF-2465-1345-A673-F2664B07CED8}" type="datetime5">
               <a:rPr lang="en-US" smtClean="0"/>
               <a:pPr/>
-              <a:t>19-Nov-25</a:t>
+              <a:t>27-Aug-26</a:t>
             </a:fld>
             <a:endParaRPr lang="en-US" dirty="0"/>
           </a:p>
@@ -2836,7 +2841,7 @@
             <a:fld id="{59E145AF-2465-1345-A673-F2664B07CED8}" type="datetime5">
               <a:rPr lang="en-US" smtClean="0"/>
               <a:pPr/>
-              <a:t>19-Nov-25</a:t>
+              <a:t>27-Aug-26</a:t>
             </a:fld>
             <a:endParaRPr lang="en-US" dirty="0"/>
           </a:p>
@@ -2977,7 +2982,7 @@
           <a:p>
             <a:fld id="{624D9F20-0CDB-DC45-97C1-8E3888B449A2}" type="datetimeFigureOut">
               <a:rPr lang="en-US" smtClean="0"/>
-              <a:t>11/19/25</a:t>
+              <a:t>8/27/26</a:t>
             </a:fld>
             <a:endParaRPr lang="en-US"/>
           </a:p>
@@ -3087,7 +3092,7 @@
           <a:p>
             <a:fld id="{624D9F20-0CDB-DC45-97C1-8E3888B449A2}" type="datetimeFigureOut">
               <a:rPr lang="en-US" smtClean="0"/>
-              <a:t>11/19/25</a:t>
+              <a:t>8/27/26</a:t>
             </a:fld>
             <a:endParaRPr lang="en-US"/>
           </a:p>
@@ -3536,7 +3541,7 @@
           <a:p>
             <a:fld id="{624D9F20-0CDB-DC45-97C1-8E3888B449A2}" type="datetimeFigureOut">
               <a:rPr lang="en-US" smtClean="0"/>
-              <a:t>11/19/25</a:t>
+              <a:t>8/27/26</a:t>
             </a:fld>
             <a:endParaRPr lang="en-US"/>
           </a:p>
@@ -7100,12 +7105,12 @@
           <a:p>
             <a:pPr lvl="1"/>
             <a:r>
-              <a:rPr lang="en-US" dirty="0" err="1"/>
-              <a:t>UInique</a:t>
-            </a:r>
-            <a:r>
-              <a:rPr lang="en-US" dirty="0"/>
-              <a:t> approach</a:t>
+              <a:rPr lang="en-US"/>
+              <a:t>Unique </a:t>
+            </a:r>
+            <a:r>
+              <a:rPr lang="en-US" dirty="0"/>
+              <a:t>approach</a:t>
             </a:r>
           </a:p>
           <a:p>

--- a/Slides/Chapter02.pptx
+++ b/Slides/Chapter02.pptx
@@ -2,7 +2,7 @@
 <file path=ppt/presentation.xml><?xml version="1.0" encoding="utf-8"?>
 <p:presentation xmlns:a="http://schemas.openxmlformats.org/drawingml/2006/main" xmlns:r="http://schemas.openxmlformats.org/officeDocument/2006/relationships" xmlns:p="http://schemas.openxmlformats.org/presentationml/2006/main" saveSubsetFonts="1" autoCompressPictures="0">
   <p:sldMasterIdLst>
-    <p:sldMasterId id="2147483660" r:id="rId1"/>
+    <p:sldMasterId id="2147483672" r:id="rId1"/>
   </p:sldMasterIdLst>
   <p:notesMasterIdLst>
     <p:notesMasterId r:id="rId48"/>
@@ -242,7 +242,7 @@
           <a:p>
             <a:fld id="{C594D6A2-E690-AE44-B31E-9BCFD0C67BA5}" type="datetimeFigureOut">
               <a:rPr lang="en-US" smtClean="0"/>
-              <a:t>8/27/26</a:t>
+              <a:t>10/8/26</a:t>
             </a:fld>
             <a:endParaRPr lang="en-US"/>
           </a:p>
@@ -820,7 +820,7 @@
         </p:nvSpPr>
         <p:spPr>
           <a:xfrm>
-            <a:off x="914400" y="1058938"/>
+            <a:off x="914400" y="1058940"/>
             <a:ext cx="10363200" cy="1470025"/>
           </a:xfrm>
           <a:solidFill>
@@ -872,9 +872,14 @@
         </p:nvSpPr>
         <p:spPr>
           <a:xfrm>
-            <a:off x="2281186" y="2983610"/>
+            <a:off x="2281187" y="2983612"/>
             <a:ext cx="7609479" cy="1009561"/>
           </a:xfrm>
+          <a:prstGeom prst="roundRect">
+            <a:avLst>
+              <a:gd name="adj" fmla="val 37895"/>
+            </a:avLst>
+          </a:prstGeom>
           <a:solidFill>
             <a:schemeClr val="bg1">
               <a:alpha val="95000"/>
@@ -933,10 +938,98 @@
           </a:p>
         </p:txBody>
       </p:sp>
+      <p:sp>
+        <p:nvSpPr>
+          <p:cNvPr id="2" name="Date Placeholder 1">
+            <a:extLst>
+              <a:ext uri="{FF2B5EF4-FFF2-40B4-BE49-F238E27FC236}">
+                <a16:creationId xmlns:a16="http://schemas.microsoft.com/office/drawing/2014/main" id="{9B409C91-6E3E-5409-2F44-4E770C50190C}"/>
+              </a:ext>
+            </a:extLst>
+          </p:cNvPr>
+          <p:cNvSpPr>
+            <a:spLocks noGrp="1"/>
+          </p:cNvSpPr>
+          <p:nvPr>
+            <p:ph type="dt" sz="half" idx="11"/>
+          </p:nvPr>
+        </p:nvSpPr>
+        <p:spPr/>
+        <p:txBody>
+          <a:bodyPr/>
+          <a:lstStyle/>
+          <a:p>
+            <a:fld id="{C4FB4F60-4356-EA46-B707-C27DE37C7811}" type="datetime1">
+              <a:rPr lang="en-US" smtClean="0"/>
+              <a:t>10/8/26</a:t>
+            </a:fld>
+            <a:endParaRPr lang="en-US" dirty="0"/>
+          </a:p>
+        </p:txBody>
+      </p:sp>
+      <p:sp>
+        <p:nvSpPr>
+          <p:cNvPr id="4" name="Footer Placeholder 3">
+            <a:extLst>
+              <a:ext uri="{FF2B5EF4-FFF2-40B4-BE49-F238E27FC236}">
+                <a16:creationId xmlns:a16="http://schemas.microsoft.com/office/drawing/2014/main" id="{594118C6-B924-AA1F-AEFC-17607998D78C}"/>
+              </a:ext>
+            </a:extLst>
+          </p:cNvPr>
+          <p:cNvSpPr>
+            <a:spLocks noGrp="1"/>
+          </p:cNvSpPr>
+          <p:nvPr>
+            <p:ph type="ftr" sz="quarter" idx="12"/>
+          </p:nvPr>
+        </p:nvSpPr>
+        <p:spPr/>
+        <p:txBody>
+          <a:bodyPr/>
+          <a:lstStyle/>
+          <a:p>
+            <a:r>
+              <a:rPr lang="en-US"/>
+              <a:t>© Steve Beaty and others as cited</a:t>
+            </a:r>
+            <a:endParaRPr lang="en-US" dirty="0"/>
+          </a:p>
+        </p:txBody>
+      </p:sp>
+      <p:sp>
+        <p:nvSpPr>
+          <p:cNvPr id="5" name="Slide Number Placeholder 4">
+            <a:extLst>
+              <a:ext uri="{FF2B5EF4-FFF2-40B4-BE49-F238E27FC236}">
+                <a16:creationId xmlns:a16="http://schemas.microsoft.com/office/drawing/2014/main" id="{29E93608-8881-8010-4D06-440F9FBB6BE8}"/>
+              </a:ext>
+            </a:extLst>
+          </p:cNvPr>
+          <p:cNvSpPr>
+            <a:spLocks noGrp="1"/>
+          </p:cNvSpPr>
+          <p:nvPr>
+            <p:ph type="sldNum" sz="quarter" idx="13"/>
+          </p:nvPr>
+        </p:nvSpPr>
+        <p:spPr/>
+        <p:txBody>
+          <a:bodyPr/>
+          <a:lstStyle/>
+          <a:p>
+            <a:fld id="{37D050C8-32A2-8944-BC0A-E76DEAECED1E}" type="slidenum">
+              <a:rPr lang="en-US" smtClean="0"/>
+              <a:pPr/>
+              <a:t>‹#›</a:t>
+            </a:fld>
+            <a:endParaRPr lang="en-US" dirty="0"/>
+          </a:p>
+        </p:txBody>
+      </p:sp>
     </p:spTree>
     <p:extLst>
       <p:ext uri="{BB962C8B-B14F-4D97-AF65-F5344CB8AC3E}">
-        <p14:creationId xmlns:p14="http://schemas.microsoft.com/office/powerpoint/2010/main" val="3669151704"/>
+        <p14:creationId xmlns:p14="http://schemas.microsoft.com/office/powerpoint/2010/main" val="194745675"/>
       </p:ext>
     </p:extLst>
   </p:cSld>
@@ -945,375 +1038,16 @@
   </p:clrMapOvr>
   <mc:AlternateContent xmlns:mc="http://schemas.openxmlformats.org/markup-compatibility/2006" xmlns:p14="http://schemas.microsoft.com/office/powerpoint/2010/main">
     <mc:Choice Requires="p14">
-      <p:transition spd="slow" p14:dur="1200">
-        <p14:prism/>
+      <p:transition spd="slow" p14:dur="2000">
+        <p14:prism isContent="1"/>
       </p:transition>
     </mc:Choice>
     <mc:Fallback xmlns="">
-      <p:transition xmlns:p14="http://schemas.microsoft.com/office/powerpoint/2010/main" spd="slow">
+      <p:transition spd="slow">
         <p:fade/>
       </p:transition>
     </mc:Fallback>
   </mc:AlternateContent>
-</p:sldLayout>
-</file>
-
-<file path=ppt/slideLayouts/slideLayout10.xml><?xml version="1.0" encoding="utf-8"?>
-<p:sldLayout xmlns:a="http://schemas.openxmlformats.org/drawingml/2006/main" xmlns:r="http://schemas.openxmlformats.org/officeDocument/2006/relationships" xmlns:p="http://schemas.openxmlformats.org/presentationml/2006/main">
-  <p:cSld name="Code Only">
-    <p:spTree>
-      <p:nvGrpSpPr>
-        <p:cNvPr id="1" name=""/>
-        <p:cNvGrpSpPr/>
-        <p:nvPr/>
-      </p:nvGrpSpPr>
-      <p:grpSpPr>
-        <a:xfrm>
-          <a:off x="0" y="0"/>
-          <a:ext cx="0" cy="0"/>
-          <a:chOff x="0" y="0"/>
-          <a:chExt cx="0" cy="0"/>
-        </a:xfrm>
-      </p:grpSpPr>
-      <p:sp>
-        <p:nvSpPr>
-          <p:cNvPr id="3" name="Content Placeholder 2"/>
-          <p:cNvSpPr>
-            <a:spLocks noGrp="1"/>
-          </p:cNvSpPr>
-          <p:nvPr>
-            <p:ph idx="1"/>
-          </p:nvPr>
-        </p:nvSpPr>
-        <p:spPr>
-          <a:xfrm>
-            <a:off x="609600" y="430305"/>
-            <a:ext cx="10972800" cy="5695859"/>
-          </a:xfrm>
-          <a:ln w="25400">
-            <a:solidFill>
-              <a:schemeClr val="tx1"/>
-            </a:solidFill>
-          </a:ln>
-        </p:spPr>
-        <p:txBody>
-          <a:bodyPr tIns="228600">
-            <a:normAutofit/>
-          </a:bodyPr>
-          <a:lstStyle>
-            <a:lvl1pPr marL="0" indent="0">
-              <a:buNone/>
-              <a:defRPr sz="2667" b="0" i="0">
-                <a:latin typeface="Menlo" panose="020B0609030804020204" pitchFamily="49" charset="0"/>
-                <a:ea typeface="Menlo" panose="020B0609030804020204" pitchFamily="49" charset="0"/>
-                <a:cs typeface="Menlo" panose="020B0609030804020204" pitchFamily="49" charset="0"/>
-              </a:defRPr>
-            </a:lvl1pPr>
-          </a:lstStyle>
-          <a:p>
-            <a:pPr lvl="0"/>
-            <a:r>
-              <a:rPr lang="en-US"/>
-              <a:t>Click to edit Master text styles</a:t>
-            </a:r>
-          </a:p>
-        </p:txBody>
-      </p:sp>
-      <p:sp>
-        <p:nvSpPr>
-          <p:cNvPr id="4" name="Date Placeholder 3"/>
-          <p:cNvSpPr>
-            <a:spLocks noGrp="1"/>
-          </p:cNvSpPr>
-          <p:nvPr>
-            <p:ph type="dt" sz="half" idx="10"/>
-          </p:nvPr>
-        </p:nvSpPr>
-        <p:spPr/>
-        <p:txBody>
-          <a:bodyPr/>
-          <a:lstStyle/>
-          <a:p>
-            <a:fld id="{624D9F20-0CDB-DC45-97C1-8E3888B449A2}" type="datetimeFigureOut">
-              <a:rPr lang="en-US" smtClean="0"/>
-              <a:t>8/27/26</a:t>
-            </a:fld>
-            <a:endParaRPr lang="en-US"/>
-          </a:p>
-        </p:txBody>
-      </p:sp>
-      <p:sp>
-        <p:nvSpPr>
-          <p:cNvPr id="5" name="Footer Placeholder 4"/>
-          <p:cNvSpPr>
-            <a:spLocks noGrp="1"/>
-          </p:cNvSpPr>
-          <p:nvPr>
-            <p:ph type="ftr" sz="quarter" idx="11"/>
-          </p:nvPr>
-        </p:nvSpPr>
-        <p:spPr/>
-        <p:txBody>
-          <a:bodyPr/>
-          <a:lstStyle/>
-          <a:p>
-            <a:endParaRPr lang="en-US"/>
-          </a:p>
-        </p:txBody>
-      </p:sp>
-      <p:sp>
-        <p:nvSpPr>
-          <p:cNvPr id="6" name="Slide Number Placeholder 5"/>
-          <p:cNvSpPr>
-            <a:spLocks noGrp="1"/>
-          </p:cNvSpPr>
-          <p:nvPr>
-            <p:ph type="sldNum" sz="quarter" idx="12"/>
-          </p:nvPr>
-        </p:nvSpPr>
-        <p:spPr/>
-        <p:txBody>
-          <a:bodyPr/>
-          <a:lstStyle/>
-          <a:p>
-            <a:fld id="{8BADA5E7-275A-0142-8584-066D5199CC3B}" type="slidenum">
-              <a:rPr lang="en-US" smtClean="0"/>
-              <a:t>‹#›</a:t>
-            </a:fld>
-            <a:endParaRPr lang="en-US"/>
-          </a:p>
-        </p:txBody>
-      </p:sp>
-    </p:spTree>
-    <p:extLst>
-      <p:ext uri="{BB962C8B-B14F-4D97-AF65-F5344CB8AC3E}">
-        <p14:creationId xmlns:p14="http://schemas.microsoft.com/office/powerpoint/2010/main" val="1398116000"/>
-      </p:ext>
-    </p:extLst>
-  </p:cSld>
-  <p:clrMapOvr>
-    <a:masterClrMapping/>
-  </p:clrMapOvr>
-</p:sldLayout>
-</file>
-
-<file path=ppt/slideLayouts/slideLayout11.xml><?xml version="1.0" encoding="utf-8"?>
-<p:sldLayout xmlns:a="http://schemas.openxmlformats.org/drawingml/2006/main" xmlns:r="http://schemas.openxmlformats.org/officeDocument/2006/relationships" xmlns:p="http://schemas.openxmlformats.org/presentationml/2006/main" type="title">
-  <p:cSld name="1_Title Slide">
-    <p:spTree>
-      <p:nvGrpSpPr>
-        <p:cNvPr id="1" name=""/>
-        <p:cNvGrpSpPr/>
-        <p:nvPr/>
-      </p:nvGrpSpPr>
-      <p:grpSpPr>
-        <a:xfrm>
-          <a:off x="0" y="0"/>
-          <a:ext cx="0" cy="0"/>
-          <a:chOff x="0" y="0"/>
-          <a:chExt cx="0" cy="0"/>
-        </a:xfrm>
-      </p:grpSpPr>
-      <p:sp>
-        <p:nvSpPr>
-          <p:cNvPr id="2" name="Title 1">
-            <a:extLst>
-              <a:ext uri="{FF2B5EF4-FFF2-40B4-BE49-F238E27FC236}">
-                <a16:creationId xmlns:a16="http://schemas.microsoft.com/office/drawing/2014/main" id="{A88DA7DB-B642-A610-5993-34620C31A08D}"/>
-              </a:ext>
-            </a:extLst>
-          </p:cNvPr>
-          <p:cNvSpPr>
-            <a:spLocks noGrp="1"/>
-          </p:cNvSpPr>
-          <p:nvPr>
-            <p:ph type="ctrTitle"/>
-          </p:nvPr>
-        </p:nvSpPr>
-        <p:spPr>
-          <a:xfrm>
-            <a:off x="1524000" y="1122363"/>
-            <a:ext cx="9144000" cy="2387600"/>
-          </a:xfrm>
-        </p:spPr>
-        <p:txBody>
-          <a:bodyPr anchor="b"/>
-          <a:lstStyle>
-            <a:lvl1pPr algn="ctr">
-              <a:defRPr sz="6000"/>
-            </a:lvl1pPr>
-          </a:lstStyle>
-          <a:p>
-            <a:r>
-              <a:rPr lang="en-US"/>
-              <a:t>Click to edit Master title style</a:t>
-            </a:r>
-          </a:p>
-        </p:txBody>
-      </p:sp>
-      <p:sp>
-        <p:nvSpPr>
-          <p:cNvPr id="3" name="Subtitle 2">
-            <a:extLst>
-              <a:ext uri="{FF2B5EF4-FFF2-40B4-BE49-F238E27FC236}">
-                <a16:creationId xmlns:a16="http://schemas.microsoft.com/office/drawing/2014/main" id="{899501FB-B55C-900C-8287-C27C97CC3906}"/>
-              </a:ext>
-            </a:extLst>
-          </p:cNvPr>
-          <p:cNvSpPr>
-            <a:spLocks noGrp="1"/>
-          </p:cNvSpPr>
-          <p:nvPr>
-            <p:ph type="subTitle" idx="1"/>
-          </p:nvPr>
-        </p:nvSpPr>
-        <p:spPr>
-          <a:xfrm>
-            <a:off x="1524000" y="3602038"/>
-            <a:ext cx="9144000" cy="1655762"/>
-          </a:xfrm>
-        </p:spPr>
-        <p:txBody>
-          <a:bodyPr/>
-          <a:lstStyle>
-            <a:lvl1pPr marL="0" indent="0" algn="ctr">
-              <a:buNone/>
-              <a:defRPr sz="2400"/>
-            </a:lvl1pPr>
-            <a:lvl2pPr marL="457200" indent="0" algn="ctr">
-              <a:buNone/>
-              <a:defRPr sz="2000"/>
-            </a:lvl2pPr>
-            <a:lvl3pPr marL="914400" indent="0" algn="ctr">
-              <a:buNone/>
-              <a:defRPr sz="1800"/>
-            </a:lvl3pPr>
-            <a:lvl4pPr marL="1371600" indent="0" algn="ctr">
-              <a:buNone/>
-              <a:defRPr sz="1600"/>
-            </a:lvl4pPr>
-            <a:lvl5pPr marL="1828800" indent="0" algn="ctr">
-              <a:buNone/>
-              <a:defRPr sz="1600"/>
-            </a:lvl5pPr>
-            <a:lvl6pPr marL="2286000" indent="0" algn="ctr">
-              <a:buNone/>
-              <a:defRPr sz="1600"/>
-            </a:lvl6pPr>
-            <a:lvl7pPr marL="2743200" indent="0" algn="ctr">
-              <a:buNone/>
-              <a:defRPr sz="1600"/>
-            </a:lvl7pPr>
-            <a:lvl8pPr marL="3200400" indent="0" algn="ctr">
-              <a:buNone/>
-              <a:defRPr sz="1600"/>
-            </a:lvl8pPr>
-            <a:lvl9pPr marL="3657600" indent="0" algn="ctr">
-              <a:buNone/>
-              <a:defRPr sz="1600"/>
-            </a:lvl9pPr>
-          </a:lstStyle>
-          <a:p>
-            <a:r>
-              <a:rPr lang="en-US"/>
-              <a:t>Click to edit Master subtitle style</a:t>
-            </a:r>
-          </a:p>
-        </p:txBody>
-      </p:sp>
-      <p:sp>
-        <p:nvSpPr>
-          <p:cNvPr id="4" name="Date Placeholder 3">
-            <a:extLst>
-              <a:ext uri="{FF2B5EF4-FFF2-40B4-BE49-F238E27FC236}">
-                <a16:creationId xmlns:a16="http://schemas.microsoft.com/office/drawing/2014/main" id="{0D6F8267-068D-7A3E-160F-6D196492A0A0}"/>
-              </a:ext>
-            </a:extLst>
-          </p:cNvPr>
-          <p:cNvSpPr>
-            <a:spLocks noGrp="1"/>
-          </p:cNvSpPr>
-          <p:nvPr>
-            <p:ph type="dt" sz="half" idx="10"/>
-          </p:nvPr>
-        </p:nvSpPr>
-        <p:spPr/>
-        <p:txBody>
-          <a:bodyPr/>
-          <a:lstStyle/>
-          <a:p>
-            <a:fld id="{624D9F20-0CDB-DC45-97C1-8E3888B449A2}" type="datetimeFigureOut">
-              <a:rPr lang="en-US" smtClean="0"/>
-              <a:t>8/27/26</a:t>
-            </a:fld>
-            <a:endParaRPr lang="en-US"/>
-          </a:p>
-        </p:txBody>
-      </p:sp>
-      <p:sp>
-        <p:nvSpPr>
-          <p:cNvPr id="5" name="Footer Placeholder 4">
-            <a:extLst>
-              <a:ext uri="{FF2B5EF4-FFF2-40B4-BE49-F238E27FC236}">
-                <a16:creationId xmlns:a16="http://schemas.microsoft.com/office/drawing/2014/main" id="{FD11ADC4-1D21-CD39-025F-A8CE717B07E7}"/>
-              </a:ext>
-            </a:extLst>
-          </p:cNvPr>
-          <p:cNvSpPr>
-            <a:spLocks noGrp="1"/>
-          </p:cNvSpPr>
-          <p:nvPr>
-            <p:ph type="ftr" sz="quarter" idx="11"/>
-          </p:nvPr>
-        </p:nvSpPr>
-        <p:spPr/>
-        <p:txBody>
-          <a:bodyPr/>
-          <a:lstStyle/>
-          <a:p>
-            <a:endParaRPr lang="en-US"/>
-          </a:p>
-        </p:txBody>
-      </p:sp>
-      <p:sp>
-        <p:nvSpPr>
-          <p:cNvPr id="6" name="Slide Number Placeholder 5">
-            <a:extLst>
-              <a:ext uri="{FF2B5EF4-FFF2-40B4-BE49-F238E27FC236}">
-                <a16:creationId xmlns:a16="http://schemas.microsoft.com/office/drawing/2014/main" id="{13BD04B2-BCB9-6C2F-30FA-32FFD0631531}"/>
-              </a:ext>
-            </a:extLst>
-          </p:cNvPr>
-          <p:cNvSpPr>
-            <a:spLocks noGrp="1"/>
-          </p:cNvSpPr>
-          <p:nvPr>
-            <p:ph type="sldNum" sz="quarter" idx="12"/>
-          </p:nvPr>
-        </p:nvSpPr>
-        <p:spPr/>
-        <p:txBody>
-          <a:bodyPr/>
-          <a:lstStyle/>
-          <a:p>
-            <a:fld id="{8BADA5E7-275A-0142-8584-066D5199CC3B}" type="slidenum">
-              <a:rPr lang="en-US" smtClean="0"/>
-              <a:t>‹#›</a:t>
-            </a:fld>
-            <a:endParaRPr lang="en-US"/>
-          </a:p>
-        </p:txBody>
-      </p:sp>
-    </p:spTree>
-    <p:extLst>
-      <p:ext uri="{BB962C8B-B14F-4D97-AF65-F5344CB8AC3E}">
-        <p14:creationId xmlns:p14="http://schemas.microsoft.com/office/powerpoint/2010/main" val="2797512813"/>
-      </p:ext>
-    </p:extLst>
-  </p:cSld>
-  <p:clrMapOvr>
-    <a:masterClrMapping/>
-  </p:clrMapOvr>
 </p:sldLayout>
 </file>
 
@@ -1336,6 +1070,28 @@
       </p:grpSpPr>
       <p:sp>
         <p:nvSpPr>
+          <p:cNvPr id="2" name="Title 1"/>
+          <p:cNvSpPr>
+            <a:spLocks noGrp="1"/>
+          </p:cNvSpPr>
+          <p:nvPr>
+            <p:ph type="title"/>
+          </p:nvPr>
+        </p:nvSpPr>
+        <p:spPr/>
+        <p:txBody>
+          <a:bodyPr/>
+          <a:lstStyle/>
+          <a:p>
+            <a:r>
+              <a:rPr lang="en-US"/>
+              <a:t>Click to edit Master title style</a:t>
+            </a:r>
+          </a:p>
+        </p:txBody>
+      </p:sp>
+      <p:sp>
+        <p:nvSpPr>
           <p:cNvPr id="3" name="Content Placeholder 2"/>
           <p:cNvSpPr>
             <a:spLocks noGrp="1"/>
@@ -1387,18 +1143,52 @@
               <a:rPr lang="en-US"/>
               <a:t>Fifth level</a:t>
             </a:r>
-            <a:endParaRPr lang="en-US" dirty="0"/>
-          </a:p>
-        </p:txBody>
-      </p:sp>
-      <p:sp>
-        <p:nvSpPr>
-          <p:cNvPr id="2" name="Title 1"/>
-          <p:cNvSpPr>
-            <a:spLocks noGrp="1"/>
-          </p:cNvSpPr>
-          <p:nvPr>
-            <p:ph type="title"/>
+          </a:p>
+        </p:txBody>
+      </p:sp>
+      <p:sp>
+        <p:nvSpPr>
+          <p:cNvPr id="8" name="Date Placeholder 7">
+            <a:extLst>
+              <a:ext uri="{FF2B5EF4-FFF2-40B4-BE49-F238E27FC236}">
+                <a16:creationId xmlns:a16="http://schemas.microsoft.com/office/drawing/2014/main" id="{DB39033B-5031-2DE5-AF8A-E269BDEE889F}"/>
+              </a:ext>
+            </a:extLst>
+          </p:cNvPr>
+          <p:cNvSpPr>
+            <a:spLocks noGrp="1"/>
+          </p:cNvSpPr>
+          <p:nvPr>
+            <p:ph type="dt" sz="half" idx="10"/>
+          </p:nvPr>
+        </p:nvSpPr>
+        <p:spPr/>
+        <p:txBody>
+          <a:bodyPr/>
+          <a:lstStyle/>
+          <a:p>
+            <a:fld id="{1FDF9E9D-AF29-D242-BADD-83CF3C8BC1FC}" type="datetime1">
+              <a:rPr lang="en-US" smtClean="0"/>
+              <a:t>10/8/26</a:t>
+            </a:fld>
+            <a:endParaRPr lang="en-US"/>
+          </a:p>
+        </p:txBody>
+      </p:sp>
+      <p:sp>
+        <p:nvSpPr>
+          <p:cNvPr id="9" name="Footer Placeholder 8">
+            <a:extLst>
+              <a:ext uri="{FF2B5EF4-FFF2-40B4-BE49-F238E27FC236}">
+                <a16:creationId xmlns:a16="http://schemas.microsoft.com/office/drawing/2014/main" id="{8CC0AD20-1FAB-5697-725E-A23B4E11A490}"/>
+              </a:ext>
+            </a:extLst>
+          </p:cNvPr>
+          <p:cNvSpPr>
+            <a:spLocks noGrp="1"/>
+          </p:cNvSpPr>
+          <p:nvPr>
+            <p:ph type="ftr" sz="quarter" idx="11"/>
           </p:nvPr>
         </p:nvSpPr>
         <p:spPr/>
@@ -1408,33 +1198,20 @@
           <a:p>
             <a:r>
               <a:rPr lang="en-US"/>
-              <a:t>Click to edit Master title style</a:t>
-            </a:r>
-          </a:p>
-        </p:txBody>
-      </p:sp>
-      <p:sp>
-        <p:nvSpPr>
-          <p:cNvPr id="5" name="Footer Placeholder 4"/>
-          <p:cNvSpPr>
-            <a:spLocks noGrp="1"/>
-          </p:cNvSpPr>
-          <p:nvPr>
-            <p:ph type="ftr" sz="quarter" idx="11"/>
-          </p:nvPr>
-        </p:nvSpPr>
-        <p:spPr/>
-        <p:txBody>
-          <a:bodyPr/>
-          <a:lstStyle/>
-          <a:p>
-            <a:endParaRPr lang="en-US"/>
-          </a:p>
-        </p:txBody>
-      </p:sp>
-      <p:sp>
-        <p:nvSpPr>
-          <p:cNvPr id="6" name="Slide Number Placeholder 5"/>
+              <a:t>© Steve Beaty and others as cited</a:t>
+            </a:r>
+          </a:p>
+        </p:txBody>
+      </p:sp>
+      <p:sp>
+        <p:nvSpPr>
+          <p:cNvPr id="10" name="SlideNumberWithTotal">
+            <a:extLst>
+              <a:ext uri="{FF2B5EF4-FFF2-40B4-BE49-F238E27FC236}">
+                <a16:creationId xmlns:a16="http://schemas.microsoft.com/office/drawing/2014/main" id="{C85ADDAF-31A4-85DD-32A3-DD43B60F68C2}"/>
+              </a:ext>
+            </a:extLst>
+          </p:cNvPr>
           <p:cNvSpPr>
             <a:spLocks noGrp="1"/>
           </p:cNvSpPr>
@@ -1455,146 +1232,10 @@
           </a:p>
         </p:txBody>
       </p:sp>
-      <p:sp>
-        <p:nvSpPr>
-          <p:cNvPr id="7" name="Date Placeholder 2">
-            <a:extLst>
-              <a:ext uri="{FF2B5EF4-FFF2-40B4-BE49-F238E27FC236}">
-                <a16:creationId xmlns:a16="http://schemas.microsoft.com/office/drawing/2014/main" id="{FD3C3453-6596-1340-01B9-8877C1567E49}"/>
-              </a:ext>
-            </a:extLst>
-          </p:cNvPr>
-          <p:cNvSpPr txBox="1">
-            <a:spLocks/>
-          </p:cNvSpPr>
-          <p:nvPr/>
-        </p:nvSpPr>
-        <p:spPr>
-          <a:xfrm>
-            <a:off x="605141" y="6308726"/>
-            <a:ext cx="1169155" cy="487680"/>
-          </a:xfrm>
-          <a:prstGeom prst="rect">
-            <a:avLst/>
-          </a:prstGeom>
-          <a:solidFill>
-            <a:schemeClr val="bg1"/>
-          </a:solidFill>
-          <a:effectLst>
-            <a:softEdge rad="63500"/>
-          </a:effectLst>
-        </p:spPr>
-        <p:txBody>
-          <a:bodyPr anchor="ctr" anchorCtr="0"/>
-          <a:lstStyle>
-            <a:defPPr>
-              <a:defRPr lang="en-US"/>
-            </a:defPPr>
-            <a:lvl1pPr marL="0" algn="ctr" defTabSz="914400" rtl="0" eaLnBrk="1" latinLnBrk="0" hangingPunct="1">
-              <a:defRPr sz="1600" kern="1200">
-                <a:solidFill>
-                  <a:schemeClr val="tx1"/>
-                </a:solidFill>
-                <a:latin typeface="+mn-lt"/>
-                <a:ea typeface="+mn-ea"/>
-                <a:cs typeface="+mn-cs"/>
-              </a:defRPr>
-            </a:lvl1pPr>
-            <a:lvl2pPr marL="457200" algn="l" defTabSz="914400" rtl="0" eaLnBrk="1" latinLnBrk="0" hangingPunct="1">
-              <a:defRPr sz="1800" kern="1200">
-                <a:solidFill>
-                  <a:schemeClr val="tx1"/>
-                </a:solidFill>
-                <a:latin typeface="+mn-lt"/>
-                <a:ea typeface="+mn-ea"/>
-                <a:cs typeface="+mn-cs"/>
-              </a:defRPr>
-            </a:lvl2pPr>
-            <a:lvl3pPr marL="914400" algn="l" defTabSz="914400" rtl="0" eaLnBrk="1" latinLnBrk="0" hangingPunct="1">
-              <a:defRPr sz="1800" kern="1200">
-                <a:solidFill>
-                  <a:schemeClr val="tx1"/>
-                </a:solidFill>
-                <a:latin typeface="+mn-lt"/>
-                <a:ea typeface="+mn-ea"/>
-                <a:cs typeface="+mn-cs"/>
-              </a:defRPr>
-            </a:lvl3pPr>
-            <a:lvl4pPr marL="1371600" algn="l" defTabSz="914400" rtl="0" eaLnBrk="1" latinLnBrk="0" hangingPunct="1">
-              <a:defRPr sz="1800" kern="1200">
-                <a:solidFill>
-                  <a:schemeClr val="tx1"/>
-                </a:solidFill>
-                <a:latin typeface="+mn-lt"/>
-                <a:ea typeface="+mn-ea"/>
-                <a:cs typeface="+mn-cs"/>
-              </a:defRPr>
-            </a:lvl4pPr>
-            <a:lvl5pPr marL="1828800" algn="l" defTabSz="914400" rtl="0" eaLnBrk="1" latinLnBrk="0" hangingPunct="1">
-              <a:defRPr sz="1800" kern="1200">
-                <a:solidFill>
-                  <a:schemeClr val="tx1"/>
-                </a:solidFill>
-                <a:latin typeface="+mn-lt"/>
-                <a:ea typeface="+mn-ea"/>
-                <a:cs typeface="+mn-cs"/>
-              </a:defRPr>
-            </a:lvl5pPr>
-            <a:lvl6pPr marL="2286000" algn="l" defTabSz="914400" rtl="0" eaLnBrk="1" latinLnBrk="0" hangingPunct="1">
-              <a:defRPr sz="1800" kern="1200">
-                <a:solidFill>
-                  <a:schemeClr val="tx1"/>
-                </a:solidFill>
-                <a:latin typeface="+mn-lt"/>
-                <a:ea typeface="+mn-ea"/>
-                <a:cs typeface="+mn-cs"/>
-              </a:defRPr>
-            </a:lvl6pPr>
-            <a:lvl7pPr marL="2743200" algn="l" defTabSz="914400" rtl="0" eaLnBrk="1" latinLnBrk="0" hangingPunct="1">
-              <a:defRPr sz="1800" kern="1200">
-                <a:solidFill>
-                  <a:schemeClr val="tx1"/>
-                </a:solidFill>
-                <a:latin typeface="+mn-lt"/>
-                <a:ea typeface="+mn-ea"/>
-                <a:cs typeface="+mn-cs"/>
-              </a:defRPr>
-            </a:lvl7pPr>
-            <a:lvl8pPr marL="3200400" algn="l" defTabSz="914400" rtl="0" eaLnBrk="1" latinLnBrk="0" hangingPunct="1">
-              <a:defRPr sz="1800" kern="1200">
-                <a:solidFill>
-                  <a:schemeClr val="tx1"/>
-                </a:solidFill>
-                <a:latin typeface="+mn-lt"/>
-                <a:ea typeface="+mn-ea"/>
-                <a:cs typeface="+mn-cs"/>
-              </a:defRPr>
-            </a:lvl8pPr>
-            <a:lvl9pPr marL="3657600" algn="l" defTabSz="914400" rtl="0" eaLnBrk="1" latinLnBrk="0" hangingPunct="1">
-              <a:defRPr sz="1800" kern="1200">
-                <a:solidFill>
-                  <a:schemeClr val="tx1"/>
-                </a:solidFill>
-                <a:latin typeface="+mn-lt"/>
-                <a:ea typeface="+mn-ea"/>
-                <a:cs typeface="+mn-cs"/>
-              </a:defRPr>
-            </a:lvl9pPr>
-          </a:lstStyle>
-          <a:p>
-            <a:fld id="{59E145AF-2465-1345-A673-F2664B07CED8}" type="datetime5">
-              <a:rPr lang="en-US" smtClean="0"/>
-              <a:pPr/>
-              <a:t>27-Aug-26</a:t>
-            </a:fld>
-            <a:endParaRPr lang="en-US" dirty="0"/>
-          </a:p>
-        </p:txBody>
-      </p:sp>
     </p:spTree>
     <p:extLst>
       <p:ext uri="{BB962C8B-B14F-4D97-AF65-F5344CB8AC3E}">
-        <p14:creationId xmlns:p14="http://schemas.microsoft.com/office/powerpoint/2010/main" val="2278938285"/>
+        <p14:creationId xmlns:p14="http://schemas.microsoft.com/office/powerpoint/2010/main" val="2761488901"/>
       </p:ext>
     </p:extLst>
   </p:cSld>
@@ -1603,12 +1244,12 @@
   </p:clrMapOvr>
   <mc:AlternateContent xmlns:mc="http://schemas.openxmlformats.org/markup-compatibility/2006" xmlns:p14="http://schemas.microsoft.com/office/powerpoint/2010/main">
     <mc:Choice Requires="p14">
-      <p:transition spd="slow" p14:dur="1200">
-        <p14:prism/>
+      <p:transition spd="slow" p14:dur="2000">
+        <p14:prism isContent="1"/>
       </p:transition>
     </mc:Choice>
     <mc:Fallback xmlns="">
-      <p:transition xmlns:p14="http://schemas.microsoft.com/office/powerpoint/2010/main" spd="slow">
+      <p:transition spd="slow">
         <p:fade/>
       </p:transition>
     </mc:Fallback>
@@ -1701,7 +1342,42 @@
       </p:sp>
       <p:sp>
         <p:nvSpPr>
-          <p:cNvPr id="5" name="Footer Placeholder 4"/>
+          <p:cNvPr id="8" name="Date Placeholder 7">
+            <a:extLst>
+              <a:ext uri="{FF2B5EF4-FFF2-40B4-BE49-F238E27FC236}">
+                <a16:creationId xmlns:a16="http://schemas.microsoft.com/office/drawing/2014/main" id="{DEEF9C46-CD18-5177-41DC-5A44F050BB88}"/>
+              </a:ext>
+            </a:extLst>
+          </p:cNvPr>
+          <p:cNvSpPr>
+            <a:spLocks noGrp="1"/>
+          </p:cNvSpPr>
+          <p:nvPr>
+            <p:ph type="dt" sz="half" idx="10"/>
+          </p:nvPr>
+        </p:nvSpPr>
+        <p:spPr/>
+        <p:txBody>
+          <a:bodyPr/>
+          <a:lstStyle/>
+          <a:p>
+            <a:fld id="{4ACEFF2F-F8CF-8B47-BF1B-D79009DD55D9}" type="datetime1">
+              <a:rPr lang="en-US" smtClean="0"/>
+              <a:t>10/8/26</a:t>
+            </a:fld>
+            <a:endParaRPr lang="en-US"/>
+          </a:p>
+        </p:txBody>
+      </p:sp>
+      <p:sp>
+        <p:nvSpPr>
+          <p:cNvPr id="9" name="Footer Placeholder 8">
+            <a:extLst>
+              <a:ext uri="{FF2B5EF4-FFF2-40B4-BE49-F238E27FC236}">
+                <a16:creationId xmlns:a16="http://schemas.microsoft.com/office/drawing/2014/main" id="{A6447FE1-5C78-6FAD-D883-46A9B247C887}"/>
+              </a:ext>
+            </a:extLst>
+          </p:cNvPr>
           <p:cNvSpPr>
             <a:spLocks noGrp="1"/>
           </p:cNvSpPr>
@@ -1714,13 +1390,22 @@
           <a:bodyPr/>
           <a:lstStyle/>
           <a:p>
-            <a:endParaRPr lang="en-US"/>
-          </a:p>
-        </p:txBody>
-      </p:sp>
-      <p:sp>
-        <p:nvSpPr>
-          <p:cNvPr id="6" name="Slide Number Placeholder 5"/>
+            <a:r>
+              <a:rPr lang="en-US"/>
+              <a:t>© Steve Beaty and others as cited</a:t>
+            </a:r>
+          </a:p>
+        </p:txBody>
+      </p:sp>
+      <p:sp>
+        <p:nvSpPr>
+          <p:cNvPr id="10" name="Slide Number Placeholder 9">
+            <a:extLst>
+              <a:ext uri="{FF2B5EF4-FFF2-40B4-BE49-F238E27FC236}">
+                <a16:creationId xmlns:a16="http://schemas.microsoft.com/office/drawing/2014/main" id="{3BEAED22-447D-B036-C934-3337B57F57F0}"/>
+              </a:ext>
+            </a:extLst>
+          </p:cNvPr>
           <p:cNvSpPr>
             <a:spLocks noGrp="1"/>
           </p:cNvSpPr>
@@ -1741,152 +1426,28 @@
           </a:p>
         </p:txBody>
       </p:sp>
-      <p:sp>
-        <p:nvSpPr>
-          <p:cNvPr id="7" name="Date Placeholder 2">
-            <a:extLst>
-              <a:ext uri="{FF2B5EF4-FFF2-40B4-BE49-F238E27FC236}">
-                <a16:creationId xmlns:a16="http://schemas.microsoft.com/office/drawing/2014/main" id="{9887BBEB-32D5-2D50-07CA-3F51A75FA0E8}"/>
-              </a:ext>
-            </a:extLst>
-          </p:cNvPr>
-          <p:cNvSpPr txBox="1">
-            <a:spLocks/>
-          </p:cNvSpPr>
-          <p:nvPr/>
-        </p:nvSpPr>
-        <p:spPr>
-          <a:xfrm>
-            <a:off x="605141" y="6308726"/>
-            <a:ext cx="1169155" cy="487680"/>
-          </a:xfrm>
-          <a:prstGeom prst="rect">
-            <a:avLst/>
-          </a:prstGeom>
-          <a:solidFill>
-            <a:schemeClr val="bg1"/>
-          </a:solidFill>
-          <a:effectLst>
-            <a:softEdge rad="63500"/>
-          </a:effectLst>
-        </p:spPr>
-        <p:txBody>
-          <a:bodyPr anchor="ctr" anchorCtr="0"/>
-          <a:lstStyle>
-            <a:defPPr>
-              <a:defRPr lang="en-US"/>
-            </a:defPPr>
-            <a:lvl1pPr marL="0" algn="ctr" defTabSz="914400" rtl="0" eaLnBrk="1" latinLnBrk="0" hangingPunct="1">
-              <a:defRPr sz="1600" kern="1200">
-                <a:solidFill>
-                  <a:schemeClr val="tx1"/>
-                </a:solidFill>
-                <a:latin typeface="+mn-lt"/>
-                <a:ea typeface="+mn-ea"/>
-                <a:cs typeface="+mn-cs"/>
-              </a:defRPr>
-            </a:lvl1pPr>
-            <a:lvl2pPr marL="457200" algn="l" defTabSz="914400" rtl="0" eaLnBrk="1" latinLnBrk="0" hangingPunct="1">
-              <a:defRPr sz="1800" kern="1200">
-                <a:solidFill>
-                  <a:schemeClr val="tx1"/>
-                </a:solidFill>
-                <a:latin typeface="+mn-lt"/>
-                <a:ea typeface="+mn-ea"/>
-                <a:cs typeface="+mn-cs"/>
-              </a:defRPr>
-            </a:lvl2pPr>
-            <a:lvl3pPr marL="914400" algn="l" defTabSz="914400" rtl="0" eaLnBrk="1" latinLnBrk="0" hangingPunct="1">
-              <a:defRPr sz="1800" kern="1200">
-                <a:solidFill>
-                  <a:schemeClr val="tx1"/>
-                </a:solidFill>
-                <a:latin typeface="+mn-lt"/>
-                <a:ea typeface="+mn-ea"/>
-                <a:cs typeface="+mn-cs"/>
-              </a:defRPr>
-            </a:lvl3pPr>
-            <a:lvl4pPr marL="1371600" algn="l" defTabSz="914400" rtl="0" eaLnBrk="1" latinLnBrk="0" hangingPunct="1">
-              <a:defRPr sz="1800" kern="1200">
-                <a:solidFill>
-                  <a:schemeClr val="tx1"/>
-                </a:solidFill>
-                <a:latin typeface="+mn-lt"/>
-                <a:ea typeface="+mn-ea"/>
-                <a:cs typeface="+mn-cs"/>
-              </a:defRPr>
-            </a:lvl4pPr>
-            <a:lvl5pPr marL="1828800" algn="l" defTabSz="914400" rtl="0" eaLnBrk="1" latinLnBrk="0" hangingPunct="1">
-              <a:defRPr sz="1800" kern="1200">
-                <a:solidFill>
-                  <a:schemeClr val="tx1"/>
-                </a:solidFill>
-                <a:latin typeface="+mn-lt"/>
-                <a:ea typeface="+mn-ea"/>
-                <a:cs typeface="+mn-cs"/>
-              </a:defRPr>
-            </a:lvl5pPr>
-            <a:lvl6pPr marL="2286000" algn="l" defTabSz="914400" rtl="0" eaLnBrk="1" latinLnBrk="0" hangingPunct="1">
-              <a:defRPr sz="1800" kern="1200">
-                <a:solidFill>
-                  <a:schemeClr val="tx1"/>
-                </a:solidFill>
-                <a:latin typeface="+mn-lt"/>
-                <a:ea typeface="+mn-ea"/>
-                <a:cs typeface="+mn-cs"/>
-              </a:defRPr>
-            </a:lvl6pPr>
-            <a:lvl7pPr marL="2743200" algn="l" defTabSz="914400" rtl="0" eaLnBrk="1" latinLnBrk="0" hangingPunct="1">
-              <a:defRPr sz="1800" kern="1200">
-                <a:solidFill>
-                  <a:schemeClr val="tx1"/>
-                </a:solidFill>
-                <a:latin typeface="+mn-lt"/>
-                <a:ea typeface="+mn-ea"/>
-                <a:cs typeface="+mn-cs"/>
-              </a:defRPr>
-            </a:lvl7pPr>
-            <a:lvl8pPr marL="3200400" algn="l" defTabSz="914400" rtl="0" eaLnBrk="1" latinLnBrk="0" hangingPunct="1">
-              <a:defRPr sz="1800" kern="1200">
-                <a:solidFill>
-                  <a:schemeClr val="tx1"/>
-                </a:solidFill>
-                <a:latin typeface="+mn-lt"/>
-                <a:ea typeface="+mn-ea"/>
-                <a:cs typeface="+mn-cs"/>
-              </a:defRPr>
-            </a:lvl8pPr>
-            <a:lvl9pPr marL="3657600" algn="l" defTabSz="914400" rtl="0" eaLnBrk="1" latinLnBrk="0" hangingPunct="1">
-              <a:defRPr sz="1800" kern="1200">
-                <a:solidFill>
-                  <a:schemeClr val="tx1"/>
-                </a:solidFill>
-                <a:latin typeface="+mn-lt"/>
-                <a:ea typeface="+mn-ea"/>
-                <a:cs typeface="+mn-cs"/>
-              </a:defRPr>
-            </a:lvl9pPr>
-          </a:lstStyle>
-          <a:p>
-            <a:fld id="{59E145AF-2465-1345-A673-F2664B07CED8}" type="datetime5">
-              <a:rPr lang="en-US" smtClean="0"/>
-              <a:pPr/>
-              <a:t>27-Aug-26</a:t>
-            </a:fld>
-            <a:endParaRPr lang="en-US" dirty="0"/>
-          </a:p>
-        </p:txBody>
-      </p:sp>
     </p:spTree>
     <p:extLst>
       <p:ext uri="{BB962C8B-B14F-4D97-AF65-F5344CB8AC3E}">
-        <p14:creationId xmlns:p14="http://schemas.microsoft.com/office/powerpoint/2010/main" val="3744914694"/>
+        <p14:creationId xmlns:p14="http://schemas.microsoft.com/office/powerpoint/2010/main" val="3253720987"/>
       </p:ext>
     </p:extLst>
   </p:cSld>
   <p:clrMapOvr>
     <a:masterClrMapping/>
   </p:clrMapOvr>
+  <mc:AlternateContent xmlns:mc="http://schemas.openxmlformats.org/markup-compatibility/2006" xmlns:p14="http://schemas.microsoft.com/office/powerpoint/2010/main">
+    <mc:Choice Requires="p14">
+      <p:transition spd="slow" p14:dur="2000">
+        <p14:prism isContent="1"/>
+      </p:transition>
+    </mc:Choice>
+    <mc:Fallback xmlns="">
+      <p:transition spd="slow">
+        <p:fade/>
+      </p:transition>
+    </mc:Fallback>
+  </mc:AlternateContent>
 </p:sldLayout>
 </file>
 
@@ -1941,7 +1502,7 @@
         </p:nvSpPr>
         <p:spPr>
           <a:xfrm>
-            <a:off x="609600" y="1602487"/>
+            <a:off x="609600" y="1602488"/>
             <a:ext cx="5321600" cy="4525963"/>
           </a:xfrm>
           <a:ln w="25400" cap="flat">
@@ -1976,48 +1537,6 @@
       </p:sp>
       <p:sp>
         <p:nvSpPr>
-          <p:cNvPr id="5" name="Footer Placeholder 4"/>
-          <p:cNvSpPr>
-            <a:spLocks noGrp="1"/>
-          </p:cNvSpPr>
-          <p:nvPr>
-            <p:ph type="ftr" sz="quarter" idx="11"/>
-          </p:nvPr>
-        </p:nvSpPr>
-        <p:spPr/>
-        <p:txBody>
-          <a:bodyPr/>
-          <a:lstStyle/>
-          <a:p>
-            <a:endParaRPr lang="en-US"/>
-          </a:p>
-        </p:txBody>
-      </p:sp>
-      <p:sp>
-        <p:nvSpPr>
-          <p:cNvPr id="6" name="Slide Number Placeholder 5"/>
-          <p:cNvSpPr>
-            <a:spLocks noGrp="1"/>
-          </p:cNvSpPr>
-          <p:nvPr>
-            <p:ph type="sldNum" sz="quarter" idx="12"/>
-          </p:nvPr>
-        </p:nvSpPr>
-        <p:spPr/>
-        <p:txBody>
-          <a:bodyPr/>
-          <a:lstStyle/>
-          <a:p>
-            <a:fld id="{8BADA5E7-275A-0142-8584-066D5199CC3B}" type="slidenum">
-              <a:rPr lang="en-US" smtClean="0"/>
-              <a:t>‹#›</a:t>
-            </a:fld>
-            <a:endParaRPr lang="en-US"/>
-          </a:p>
-        </p:txBody>
-      </p:sp>
-      <p:sp>
-        <p:nvSpPr>
           <p:cNvPr id="7" name="Content Placeholder 2">
             <a:extLst>
               <a:ext uri="{FF2B5EF4-FFF2-40B4-BE49-F238E27FC236}">
@@ -2068,150 +1587,112 @@
       </p:sp>
       <p:sp>
         <p:nvSpPr>
-          <p:cNvPr id="8" name="Date Placeholder 2">
-            <a:extLst>
-              <a:ext uri="{FF2B5EF4-FFF2-40B4-BE49-F238E27FC236}">
-                <a16:creationId xmlns:a16="http://schemas.microsoft.com/office/drawing/2014/main" id="{7DDEEDF1-8A77-85F3-9C93-920E453307BB}"/>
-              </a:ext>
-            </a:extLst>
-          </p:cNvPr>
-          <p:cNvSpPr txBox="1">
-            <a:spLocks/>
-          </p:cNvSpPr>
-          <p:nvPr/>
-        </p:nvSpPr>
-        <p:spPr>
-          <a:xfrm>
-            <a:off x="605141" y="6308726"/>
-            <a:ext cx="1169155" cy="487680"/>
-          </a:xfrm>
-          <a:prstGeom prst="rect">
-            <a:avLst/>
-          </a:prstGeom>
-          <a:solidFill>
-            <a:schemeClr val="bg1"/>
-          </a:solidFill>
-          <a:effectLst>
-            <a:softEdge rad="63500"/>
-          </a:effectLst>
-        </p:spPr>
-        <p:txBody>
-          <a:bodyPr anchor="ctr" anchorCtr="0"/>
-          <a:lstStyle>
-            <a:defPPr>
-              <a:defRPr lang="en-US"/>
-            </a:defPPr>
-            <a:lvl1pPr marL="0" algn="ctr" defTabSz="914400" rtl="0" eaLnBrk="1" latinLnBrk="0" hangingPunct="1">
-              <a:defRPr sz="1600" kern="1200">
-                <a:solidFill>
-                  <a:schemeClr val="tx1"/>
-                </a:solidFill>
-                <a:latin typeface="+mn-lt"/>
-                <a:ea typeface="+mn-ea"/>
-                <a:cs typeface="+mn-cs"/>
-              </a:defRPr>
-            </a:lvl1pPr>
-            <a:lvl2pPr marL="457200" algn="l" defTabSz="914400" rtl="0" eaLnBrk="1" latinLnBrk="0" hangingPunct="1">
-              <a:defRPr sz="1800" kern="1200">
-                <a:solidFill>
-                  <a:schemeClr val="tx1"/>
-                </a:solidFill>
-                <a:latin typeface="+mn-lt"/>
-                <a:ea typeface="+mn-ea"/>
-                <a:cs typeface="+mn-cs"/>
-              </a:defRPr>
-            </a:lvl2pPr>
-            <a:lvl3pPr marL="914400" algn="l" defTabSz="914400" rtl="0" eaLnBrk="1" latinLnBrk="0" hangingPunct="1">
-              <a:defRPr sz="1800" kern="1200">
-                <a:solidFill>
-                  <a:schemeClr val="tx1"/>
-                </a:solidFill>
-                <a:latin typeface="+mn-lt"/>
-                <a:ea typeface="+mn-ea"/>
-                <a:cs typeface="+mn-cs"/>
-              </a:defRPr>
-            </a:lvl3pPr>
-            <a:lvl4pPr marL="1371600" algn="l" defTabSz="914400" rtl="0" eaLnBrk="1" latinLnBrk="0" hangingPunct="1">
-              <a:defRPr sz="1800" kern="1200">
-                <a:solidFill>
-                  <a:schemeClr val="tx1"/>
-                </a:solidFill>
-                <a:latin typeface="+mn-lt"/>
-                <a:ea typeface="+mn-ea"/>
-                <a:cs typeface="+mn-cs"/>
-              </a:defRPr>
-            </a:lvl4pPr>
-            <a:lvl5pPr marL="1828800" algn="l" defTabSz="914400" rtl="0" eaLnBrk="1" latinLnBrk="0" hangingPunct="1">
-              <a:defRPr sz="1800" kern="1200">
-                <a:solidFill>
-                  <a:schemeClr val="tx1"/>
-                </a:solidFill>
-                <a:latin typeface="+mn-lt"/>
-                <a:ea typeface="+mn-ea"/>
-                <a:cs typeface="+mn-cs"/>
-              </a:defRPr>
-            </a:lvl5pPr>
-            <a:lvl6pPr marL="2286000" algn="l" defTabSz="914400" rtl="0" eaLnBrk="1" latinLnBrk="0" hangingPunct="1">
-              <a:defRPr sz="1800" kern="1200">
-                <a:solidFill>
-                  <a:schemeClr val="tx1"/>
-                </a:solidFill>
-                <a:latin typeface="+mn-lt"/>
-                <a:ea typeface="+mn-ea"/>
-                <a:cs typeface="+mn-cs"/>
-              </a:defRPr>
-            </a:lvl6pPr>
-            <a:lvl7pPr marL="2743200" algn="l" defTabSz="914400" rtl="0" eaLnBrk="1" latinLnBrk="0" hangingPunct="1">
-              <a:defRPr sz="1800" kern="1200">
-                <a:solidFill>
-                  <a:schemeClr val="tx1"/>
-                </a:solidFill>
-                <a:latin typeface="+mn-lt"/>
-                <a:ea typeface="+mn-ea"/>
-                <a:cs typeface="+mn-cs"/>
-              </a:defRPr>
-            </a:lvl7pPr>
-            <a:lvl8pPr marL="3200400" algn="l" defTabSz="914400" rtl="0" eaLnBrk="1" latinLnBrk="0" hangingPunct="1">
-              <a:defRPr sz="1800" kern="1200">
-                <a:solidFill>
-                  <a:schemeClr val="tx1"/>
-                </a:solidFill>
-                <a:latin typeface="+mn-lt"/>
-                <a:ea typeface="+mn-ea"/>
-                <a:cs typeface="+mn-cs"/>
-              </a:defRPr>
-            </a:lvl8pPr>
-            <a:lvl9pPr marL="3657600" algn="l" defTabSz="914400" rtl="0" eaLnBrk="1" latinLnBrk="0" hangingPunct="1">
-              <a:defRPr sz="1800" kern="1200">
-                <a:solidFill>
-                  <a:schemeClr val="tx1"/>
-                </a:solidFill>
-                <a:latin typeface="+mn-lt"/>
-                <a:ea typeface="+mn-ea"/>
-                <a:cs typeface="+mn-cs"/>
-              </a:defRPr>
-            </a:lvl9pPr>
-          </a:lstStyle>
-          <a:p>
-            <a:fld id="{59E145AF-2465-1345-A673-F2664B07CED8}" type="datetime5">
+          <p:cNvPr id="9" name="Date Placeholder 8">
+            <a:extLst>
+              <a:ext uri="{FF2B5EF4-FFF2-40B4-BE49-F238E27FC236}">
+                <a16:creationId xmlns:a16="http://schemas.microsoft.com/office/drawing/2014/main" id="{71D19512-769A-1A2D-AE4B-615827F538DF}"/>
+              </a:ext>
+            </a:extLst>
+          </p:cNvPr>
+          <p:cNvSpPr>
+            <a:spLocks noGrp="1"/>
+          </p:cNvSpPr>
+          <p:nvPr>
+            <p:ph type="dt" sz="half" idx="14"/>
+          </p:nvPr>
+        </p:nvSpPr>
+        <p:spPr/>
+        <p:txBody>
+          <a:bodyPr/>
+          <a:lstStyle/>
+          <a:p>
+            <a:fld id="{F2268B94-524E-AC43-BBB9-6965E0248C33}" type="datetime1">
               <a:rPr lang="en-US" smtClean="0"/>
-              <a:pPr/>
-              <a:t>27-Aug-26</a:t>
+              <a:t>10/8/26</a:t>
             </a:fld>
-            <a:endParaRPr lang="en-US" dirty="0"/>
+            <a:endParaRPr lang="en-US"/>
+          </a:p>
+        </p:txBody>
+      </p:sp>
+      <p:sp>
+        <p:nvSpPr>
+          <p:cNvPr id="10" name="Footer Placeholder 9">
+            <a:extLst>
+              <a:ext uri="{FF2B5EF4-FFF2-40B4-BE49-F238E27FC236}">
+                <a16:creationId xmlns:a16="http://schemas.microsoft.com/office/drawing/2014/main" id="{88537417-0F7B-4AB8-2913-FC8911CF4DFA}"/>
+              </a:ext>
+            </a:extLst>
+          </p:cNvPr>
+          <p:cNvSpPr>
+            <a:spLocks noGrp="1"/>
+          </p:cNvSpPr>
+          <p:nvPr>
+            <p:ph type="ftr" sz="quarter" idx="15"/>
+          </p:nvPr>
+        </p:nvSpPr>
+        <p:spPr/>
+        <p:txBody>
+          <a:bodyPr/>
+          <a:lstStyle/>
+          <a:p>
+            <a:r>
+              <a:rPr lang="en-US"/>
+              <a:t>© Steve Beaty and others as cited</a:t>
+            </a:r>
+          </a:p>
+        </p:txBody>
+      </p:sp>
+      <p:sp>
+        <p:nvSpPr>
+          <p:cNvPr id="11" name="Slide Number Placeholder 10">
+            <a:extLst>
+              <a:ext uri="{FF2B5EF4-FFF2-40B4-BE49-F238E27FC236}">
+                <a16:creationId xmlns:a16="http://schemas.microsoft.com/office/drawing/2014/main" id="{6C508543-3E8A-F349-1E14-7A34163E0A10}"/>
+              </a:ext>
+            </a:extLst>
+          </p:cNvPr>
+          <p:cNvSpPr>
+            <a:spLocks noGrp="1"/>
+          </p:cNvSpPr>
+          <p:nvPr>
+            <p:ph type="sldNum" sz="quarter" idx="16"/>
+          </p:nvPr>
+        </p:nvSpPr>
+        <p:spPr/>
+        <p:txBody>
+          <a:bodyPr/>
+          <a:lstStyle/>
+          <a:p>
+            <a:fld id="{8BADA5E7-275A-0142-8584-066D5199CC3B}" type="slidenum">
+              <a:rPr lang="en-US" smtClean="0"/>
+              <a:t>‹#›</a:t>
+            </a:fld>
+            <a:endParaRPr lang="en-US"/>
           </a:p>
         </p:txBody>
       </p:sp>
     </p:spTree>
     <p:extLst>
       <p:ext uri="{BB962C8B-B14F-4D97-AF65-F5344CB8AC3E}">
-        <p14:creationId xmlns:p14="http://schemas.microsoft.com/office/powerpoint/2010/main" val="3641684570"/>
+        <p14:creationId xmlns:p14="http://schemas.microsoft.com/office/powerpoint/2010/main" val="1999007848"/>
       </p:ext>
     </p:extLst>
   </p:cSld>
   <p:clrMapOvr>
     <a:masterClrMapping/>
   </p:clrMapOvr>
+  <mc:AlternateContent xmlns:mc="http://schemas.openxmlformats.org/markup-compatibility/2006" xmlns:p14="http://schemas.microsoft.com/office/powerpoint/2010/main">
+    <mc:Choice Requires="p14">
+      <p:transition spd="slow" p14:dur="2000">
+        <p14:prism isContent="1"/>
+      </p:transition>
+    </mc:Choice>
+    <mc:Fallback xmlns="">
+      <p:transition spd="slow">
+        <p:fade/>
+      </p:transition>
+    </mc:Fallback>
+  </mc:AlternateContent>
 </p:sldLayout>
 </file>
 
@@ -2424,6 +1905,37 @@
       </p:sp>
       <p:sp>
         <p:nvSpPr>
+          <p:cNvPr id="5" name="Date Placeholder 4"/>
+          <p:cNvSpPr>
+            <a:spLocks noGrp="1"/>
+          </p:cNvSpPr>
+          <p:nvPr>
+            <p:ph type="dt" sz="half" idx="10"/>
+          </p:nvPr>
+        </p:nvSpPr>
+        <p:spPr>
+          <a:xfrm>
+            <a:off x="4406052" y="6308727"/>
+            <a:ext cx="1169155" cy="485424"/>
+          </a:xfrm>
+          <a:prstGeom prst="rect">
+            <a:avLst/>
+          </a:prstGeom>
+        </p:spPr>
+        <p:txBody>
+          <a:bodyPr/>
+          <a:lstStyle/>
+          <a:p>
+            <a:fld id="{0647EA94-B14A-464D-A653-D62F9427C725}" type="datetime1">
+              <a:rPr lang="en-US" smtClean="0"/>
+              <a:t>10/8/26</a:t>
+            </a:fld>
+            <a:endParaRPr lang="en-US"/>
+          </a:p>
+        </p:txBody>
+      </p:sp>
+      <p:sp>
+        <p:nvSpPr>
           <p:cNvPr id="6" name="Footer Placeholder 5"/>
           <p:cNvSpPr>
             <a:spLocks noGrp="1"/>
@@ -2437,7 +1949,10 @@
           <a:bodyPr/>
           <a:lstStyle/>
           <a:p>
-            <a:endParaRPr lang="en-US"/>
+            <a:r>
+              <a:rPr lang="en-US"/>
+              <a:t>© Steve Beaty and others as cited</a:t>
+            </a:r>
           </a:p>
         </p:txBody>
       </p:sp>
@@ -2464,146 +1979,10 @@
           </a:p>
         </p:txBody>
       </p:sp>
-      <p:sp>
-        <p:nvSpPr>
-          <p:cNvPr id="8" name="Date Placeholder 2">
-            <a:extLst>
-              <a:ext uri="{FF2B5EF4-FFF2-40B4-BE49-F238E27FC236}">
-                <a16:creationId xmlns:a16="http://schemas.microsoft.com/office/drawing/2014/main" id="{BC7257D9-CFE4-6187-731B-973A817958BF}"/>
-              </a:ext>
-            </a:extLst>
-          </p:cNvPr>
-          <p:cNvSpPr txBox="1">
-            <a:spLocks/>
-          </p:cNvSpPr>
-          <p:nvPr/>
-        </p:nvSpPr>
-        <p:spPr>
-          <a:xfrm>
-            <a:off x="605141" y="6308726"/>
-            <a:ext cx="1169155" cy="487680"/>
-          </a:xfrm>
-          <a:prstGeom prst="rect">
-            <a:avLst/>
-          </a:prstGeom>
-          <a:solidFill>
-            <a:schemeClr val="bg1"/>
-          </a:solidFill>
-          <a:effectLst>
-            <a:softEdge rad="63500"/>
-          </a:effectLst>
-        </p:spPr>
-        <p:txBody>
-          <a:bodyPr anchor="ctr" anchorCtr="0"/>
-          <a:lstStyle>
-            <a:defPPr>
-              <a:defRPr lang="en-US"/>
-            </a:defPPr>
-            <a:lvl1pPr marL="0" algn="ctr" defTabSz="914400" rtl="0" eaLnBrk="1" latinLnBrk="0" hangingPunct="1">
-              <a:defRPr sz="1600" kern="1200">
-                <a:solidFill>
-                  <a:schemeClr val="tx1"/>
-                </a:solidFill>
-                <a:latin typeface="+mn-lt"/>
-                <a:ea typeface="+mn-ea"/>
-                <a:cs typeface="+mn-cs"/>
-              </a:defRPr>
-            </a:lvl1pPr>
-            <a:lvl2pPr marL="457200" algn="l" defTabSz="914400" rtl="0" eaLnBrk="1" latinLnBrk="0" hangingPunct="1">
-              <a:defRPr sz="1800" kern="1200">
-                <a:solidFill>
-                  <a:schemeClr val="tx1"/>
-                </a:solidFill>
-                <a:latin typeface="+mn-lt"/>
-                <a:ea typeface="+mn-ea"/>
-                <a:cs typeface="+mn-cs"/>
-              </a:defRPr>
-            </a:lvl2pPr>
-            <a:lvl3pPr marL="914400" algn="l" defTabSz="914400" rtl="0" eaLnBrk="1" latinLnBrk="0" hangingPunct="1">
-              <a:defRPr sz="1800" kern="1200">
-                <a:solidFill>
-                  <a:schemeClr val="tx1"/>
-                </a:solidFill>
-                <a:latin typeface="+mn-lt"/>
-                <a:ea typeface="+mn-ea"/>
-                <a:cs typeface="+mn-cs"/>
-              </a:defRPr>
-            </a:lvl3pPr>
-            <a:lvl4pPr marL="1371600" algn="l" defTabSz="914400" rtl="0" eaLnBrk="1" latinLnBrk="0" hangingPunct="1">
-              <a:defRPr sz="1800" kern="1200">
-                <a:solidFill>
-                  <a:schemeClr val="tx1"/>
-                </a:solidFill>
-                <a:latin typeface="+mn-lt"/>
-                <a:ea typeface="+mn-ea"/>
-                <a:cs typeface="+mn-cs"/>
-              </a:defRPr>
-            </a:lvl4pPr>
-            <a:lvl5pPr marL="1828800" algn="l" defTabSz="914400" rtl="0" eaLnBrk="1" latinLnBrk="0" hangingPunct="1">
-              <a:defRPr sz="1800" kern="1200">
-                <a:solidFill>
-                  <a:schemeClr val="tx1"/>
-                </a:solidFill>
-                <a:latin typeface="+mn-lt"/>
-                <a:ea typeface="+mn-ea"/>
-                <a:cs typeface="+mn-cs"/>
-              </a:defRPr>
-            </a:lvl5pPr>
-            <a:lvl6pPr marL="2286000" algn="l" defTabSz="914400" rtl="0" eaLnBrk="1" latinLnBrk="0" hangingPunct="1">
-              <a:defRPr sz="1800" kern="1200">
-                <a:solidFill>
-                  <a:schemeClr val="tx1"/>
-                </a:solidFill>
-                <a:latin typeface="+mn-lt"/>
-                <a:ea typeface="+mn-ea"/>
-                <a:cs typeface="+mn-cs"/>
-              </a:defRPr>
-            </a:lvl6pPr>
-            <a:lvl7pPr marL="2743200" algn="l" defTabSz="914400" rtl="0" eaLnBrk="1" latinLnBrk="0" hangingPunct="1">
-              <a:defRPr sz="1800" kern="1200">
-                <a:solidFill>
-                  <a:schemeClr val="tx1"/>
-                </a:solidFill>
-                <a:latin typeface="+mn-lt"/>
-                <a:ea typeface="+mn-ea"/>
-                <a:cs typeface="+mn-cs"/>
-              </a:defRPr>
-            </a:lvl7pPr>
-            <a:lvl8pPr marL="3200400" algn="l" defTabSz="914400" rtl="0" eaLnBrk="1" latinLnBrk="0" hangingPunct="1">
-              <a:defRPr sz="1800" kern="1200">
-                <a:solidFill>
-                  <a:schemeClr val="tx1"/>
-                </a:solidFill>
-                <a:latin typeface="+mn-lt"/>
-                <a:ea typeface="+mn-ea"/>
-                <a:cs typeface="+mn-cs"/>
-              </a:defRPr>
-            </a:lvl8pPr>
-            <a:lvl9pPr marL="3657600" algn="l" defTabSz="914400" rtl="0" eaLnBrk="1" latinLnBrk="0" hangingPunct="1">
-              <a:defRPr sz="1800" kern="1200">
-                <a:solidFill>
-                  <a:schemeClr val="tx1"/>
-                </a:solidFill>
-                <a:latin typeface="+mn-lt"/>
-                <a:ea typeface="+mn-ea"/>
-                <a:cs typeface="+mn-cs"/>
-              </a:defRPr>
-            </a:lvl9pPr>
-          </a:lstStyle>
-          <a:p>
-            <a:fld id="{59E145AF-2465-1345-A673-F2664B07CED8}" type="datetime5">
-              <a:rPr lang="en-US" smtClean="0"/>
-              <a:pPr/>
-              <a:t>27-Aug-26</a:t>
-            </a:fld>
-            <a:endParaRPr lang="en-US" dirty="0"/>
-          </a:p>
-        </p:txBody>
-      </p:sp>
     </p:spTree>
     <p:extLst>
       <p:ext uri="{BB962C8B-B14F-4D97-AF65-F5344CB8AC3E}">
-        <p14:creationId xmlns:p14="http://schemas.microsoft.com/office/powerpoint/2010/main" val="1919532969"/>
+        <p14:creationId xmlns:p14="http://schemas.microsoft.com/office/powerpoint/2010/main" val="1709131131"/>
       </p:ext>
     </p:extLst>
   </p:cSld>
@@ -2612,12 +1991,12 @@
   </p:clrMapOvr>
   <mc:AlternateContent xmlns:mc="http://schemas.openxmlformats.org/markup-compatibility/2006" xmlns:p14="http://schemas.microsoft.com/office/powerpoint/2010/main">
     <mc:Choice Requires="p14">
-      <p:transition spd="slow" p14:dur="1200">
-        <p14:prism/>
+      <p:transition spd="slow" p14:dur="2000">
+        <p14:prism isContent="1"/>
       </p:transition>
     </mc:Choice>
     <mc:Fallback xmlns="">
-      <p:transition xmlns:p14="http://schemas.microsoft.com/office/powerpoint/2010/main" spd="slow">
+      <p:transition spd="slow">
         <p:fade/>
       </p:transition>
     </mc:Fallback>
@@ -2666,7 +2045,42 @@
       </p:sp>
       <p:sp>
         <p:nvSpPr>
-          <p:cNvPr id="4" name="Footer Placeholder 3"/>
+          <p:cNvPr id="7" name="Date Placeholder 6">
+            <a:extLst>
+              <a:ext uri="{FF2B5EF4-FFF2-40B4-BE49-F238E27FC236}">
+                <a16:creationId xmlns:a16="http://schemas.microsoft.com/office/drawing/2014/main" id="{CD92DC31-8A1B-D6EF-9DCB-F31748611FEA}"/>
+              </a:ext>
+            </a:extLst>
+          </p:cNvPr>
+          <p:cNvSpPr>
+            <a:spLocks noGrp="1"/>
+          </p:cNvSpPr>
+          <p:nvPr>
+            <p:ph type="dt" sz="half" idx="10"/>
+          </p:nvPr>
+        </p:nvSpPr>
+        <p:spPr/>
+        <p:txBody>
+          <a:bodyPr/>
+          <a:lstStyle/>
+          <a:p>
+            <a:fld id="{A9E61270-3BC5-784D-9113-048EB371D990}" type="datetime1">
+              <a:rPr lang="en-US" smtClean="0"/>
+              <a:t>10/8/26</a:t>
+            </a:fld>
+            <a:endParaRPr lang="en-US"/>
+          </a:p>
+        </p:txBody>
+      </p:sp>
+      <p:sp>
+        <p:nvSpPr>
+          <p:cNvPr id="8" name="Footer Placeholder 7">
+            <a:extLst>
+              <a:ext uri="{FF2B5EF4-FFF2-40B4-BE49-F238E27FC236}">
+                <a16:creationId xmlns:a16="http://schemas.microsoft.com/office/drawing/2014/main" id="{3E733F8A-5589-31C8-DB78-246D75351B3B}"/>
+              </a:ext>
+            </a:extLst>
+          </p:cNvPr>
           <p:cNvSpPr>
             <a:spLocks noGrp="1"/>
           </p:cNvSpPr>
@@ -2674,23 +2088,27 @@
             <p:ph type="ftr" sz="quarter" idx="11"/>
           </p:nvPr>
         </p:nvSpPr>
-        <p:spPr>
-          <a:xfrm>
-            <a:off x="1881808" y="6308726"/>
-            <a:ext cx="8605793" cy="487680"/>
-          </a:xfrm>
-        </p:spPr>
-        <p:txBody>
-          <a:bodyPr/>
-          <a:lstStyle/>
-          <a:p>
-            <a:endParaRPr lang="en-US"/>
-          </a:p>
-        </p:txBody>
-      </p:sp>
-      <p:sp>
-        <p:nvSpPr>
-          <p:cNvPr id="5" name="Slide Number Placeholder 4"/>
+        <p:spPr/>
+        <p:txBody>
+          <a:bodyPr/>
+          <a:lstStyle/>
+          <a:p>
+            <a:r>
+              <a:rPr lang="en-US"/>
+              <a:t>© Steve Beaty and others as cited</a:t>
+            </a:r>
+          </a:p>
+        </p:txBody>
+      </p:sp>
+      <p:sp>
+        <p:nvSpPr>
+          <p:cNvPr id="9" name="Slide Number Placeholder 8">
+            <a:extLst>
+              <a:ext uri="{FF2B5EF4-FFF2-40B4-BE49-F238E27FC236}">
+                <a16:creationId xmlns:a16="http://schemas.microsoft.com/office/drawing/2014/main" id="{CF4200DB-D3DA-2D0A-8CD3-6E48E32FC594}"/>
+              </a:ext>
+            </a:extLst>
+          </p:cNvPr>
           <p:cNvSpPr>
             <a:spLocks noGrp="1"/>
           </p:cNvSpPr>
@@ -2711,146 +2129,10 @@
           </a:p>
         </p:txBody>
       </p:sp>
-      <p:sp>
-        <p:nvSpPr>
-          <p:cNvPr id="6" name="Date Placeholder 2">
-            <a:extLst>
-              <a:ext uri="{FF2B5EF4-FFF2-40B4-BE49-F238E27FC236}">
-                <a16:creationId xmlns:a16="http://schemas.microsoft.com/office/drawing/2014/main" id="{346DE585-182D-C90D-7BFC-E67326368F83}"/>
-              </a:ext>
-            </a:extLst>
-          </p:cNvPr>
-          <p:cNvSpPr txBox="1">
-            <a:spLocks/>
-          </p:cNvSpPr>
-          <p:nvPr/>
-        </p:nvSpPr>
-        <p:spPr>
-          <a:xfrm>
-            <a:off x="605141" y="6308726"/>
-            <a:ext cx="1169155" cy="487680"/>
-          </a:xfrm>
-          <a:prstGeom prst="rect">
-            <a:avLst/>
-          </a:prstGeom>
-          <a:solidFill>
-            <a:schemeClr val="bg1"/>
-          </a:solidFill>
-          <a:effectLst>
-            <a:softEdge rad="63500"/>
-          </a:effectLst>
-        </p:spPr>
-        <p:txBody>
-          <a:bodyPr anchor="ctr" anchorCtr="0"/>
-          <a:lstStyle>
-            <a:defPPr>
-              <a:defRPr lang="en-US"/>
-            </a:defPPr>
-            <a:lvl1pPr marL="0" algn="ctr" defTabSz="914400" rtl="0" eaLnBrk="1" latinLnBrk="0" hangingPunct="1">
-              <a:defRPr sz="1600" kern="1200">
-                <a:solidFill>
-                  <a:schemeClr val="tx1"/>
-                </a:solidFill>
-                <a:latin typeface="+mn-lt"/>
-                <a:ea typeface="+mn-ea"/>
-                <a:cs typeface="+mn-cs"/>
-              </a:defRPr>
-            </a:lvl1pPr>
-            <a:lvl2pPr marL="457200" algn="l" defTabSz="914400" rtl="0" eaLnBrk="1" latinLnBrk="0" hangingPunct="1">
-              <a:defRPr sz="1800" kern="1200">
-                <a:solidFill>
-                  <a:schemeClr val="tx1"/>
-                </a:solidFill>
-                <a:latin typeface="+mn-lt"/>
-                <a:ea typeface="+mn-ea"/>
-                <a:cs typeface="+mn-cs"/>
-              </a:defRPr>
-            </a:lvl2pPr>
-            <a:lvl3pPr marL="914400" algn="l" defTabSz="914400" rtl="0" eaLnBrk="1" latinLnBrk="0" hangingPunct="1">
-              <a:defRPr sz="1800" kern="1200">
-                <a:solidFill>
-                  <a:schemeClr val="tx1"/>
-                </a:solidFill>
-                <a:latin typeface="+mn-lt"/>
-                <a:ea typeface="+mn-ea"/>
-                <a:cs typeface="+mn-cs"/>
-              </a:defRPr>
-            </a:lvl3pPr>
-            <a:lvl4pPr marL="1371600" algn="l" defTabSz="914400" rtl="0" eaLnBrk="1" latinLnBrk="0" hangingPunct="1">
-              <a:defRPr sz="1800" kern="1200">
-                <a:solidFill>
-                  <a:schemeClr val="tx1"/>
-                </a:solidFill>
-                <a:latin typeface="+mn-lt"/>
-                <a:ea typeface="+mn-ea"/>
-                <a:cs typeface="+mn-cs"/>
-              </a:defRPr>
-            </a:lvl4pPr>
-            <a:lvl5pPr marL="1828800" algn="l" defTabSz="914400" rtl="0" eaLnBrk="1" latinLnBrk="0" hangingPunct="1">
-              <a:defRPr sz="1800" kern="1200">
-                <a:solidFill>
-                  <a:schemeClr val="tx1"/>
-                </a:solidFill>
-                <a:latin typeface="+mn-lt"/>
-                <a:ea typeface="+mn-ea"/>
-                <a:cs typeface="+mn-cs"/>
-              </a:defRPr>
-            </a:lvl5pPr>
-            <a:lvl6pPr marL="2286000" algn="l" defTabSz="914400" rtl="0" eaLnBrk="1" latinLnBrk="0" hangingPunct="1">
-              <a:defRPr sz="1800" kern="1200">
-                <a:solidFill>
-                  <a:schemeClr val="tx1"/>
-                </a:solidFill>
-                <a:latin typeface="+mn-lt"/>
-                <a:ea typeface="+mn-ea"/>
-                <a:cs typeface="+mn-cs"/>
-              </a:defRPr>
-            </a:lvl6pPr>
-            <a:lvl7pPr marL="2743200" algn="l" defTabSz="914400" rtl="0" eaLnBrk="1" latinLnBrk="0" hangingPunct="1">
-              <a:defRPr sz="1800" kern="1200">
-                <a:solidFill>
-                  <a:schemeClr val="tx1"/>
-                </a:solidFill>
-                <a:latin typeface="+mn-lt"/>
-                <a:ea typeface="+mn-ea"/>
-                <a:cs typeface="+mn-cs"/>
-              </a:defRPr>
-            </a:lvl7pPr>
-            <a:lvl8pPr marL="3200400" algn="l" defTabSz="914400" rtl="0" eaLnBrk="1" latinLnBrk="0" hangingPunct="1">
-              <a:defRPr sz="1800" kern="1200">
-                <a:solidFill>
-                  <a:schemeClr val="tx1"/>
-                </a:solidFill>
-                <a:latin typeface="+mn-lt"/>
-                <a:ea typeface="+mn-ea"/>
-                <a:cs typeface="+mn-cs"/>
-              </a:defRPr>
-            </a:lvl8pPr>
-            <a:lvl9pPr marL="3657600" algn="l" defTabSz="914400" rtl="0" eaLnBrk="1" latinLnBrk="0" hangingPunct="1">
-              <a:defRPr sz="1800" kern="1200">
-                <a:solidFill>
-                  <a:schemeClr val="tx1"/>
-                </a:solidFill>
-                <a:latin typeface="+mn-lt"/>
-                <a:ea typeface="+mn-ea"/>
-                <a:cs typeface="+mn-cs"/>
-              </a:defRPr>
-            </a:lvl9pPr>
-          </a:lstStyle>
-          <a:p>
-            <a:fld id="{59E145AF-2465-1345-A673-F2664B07CED8}" type="datetime5">
-              <a:rPr lang="en-US" smtClean="0"/>
-              <a:pPr/>
-              <a:t>27-Aug-26</a:t>
-            </a:fld>
-            <a:endParaRPr lang="en-US" dirty="0"/>
-          </a:p>
-        </p:txBody>
-      </p:sp>
     </p:spTree>
     <p:extLst>
       <p:ext uri="{BB962C8B-B14F-4D97-AF65-F5344CB8AC3E}">
-        <p14:creationId xmlns:p14="http://schemas.microsoft.com/office/powerpoint/2010/main" val="3863517460"/>
+        <p14:creationId xmlns:p14="http://schemas.microsoft.com/office/powerpoint/2010/main" val="569724118"/>
       </p:ext>
     </p:extLst>
   </p:cSld>
@@ -2859,12 +2141,12 @@
   </p:clrMapOvr>
   <mc:AlternateContent xmlns:mc="http://schemas.openxmlformats.org/markup-compatibility/2006" xmlns:p14="http://schemas.microsoft.com/office/powerpoint/2010/main">
     <mc:Choice Requires="p14">
-      <p:transition spd="slow" p14:dur="1200">
-        <p14:prism/>
+      <p:transition spd="slow" p14:dur="2000">
+        <p14:prism isContent="1"/>
       </p:transition>
     </mc:Choice>
     <mc:Fallback xmlns="">
-      <p:transition xmlns:p14="http://schemas.microsoft.com/office/powerpoint/2010/main" spd="slow">
+      <p:transition spd="slow">
         <p:fade/>
       </p:transition>
     </mc:Fallback>
@@ -2891,7 +2173,42 @@
       </p:grpSpPr>
       <p:sp>
         <p:nvSpPr>
-          <p:cNvPr id="4" name="Footer Placeholder 3"/>
+          <p:cNvPr id="6" name="Date Placeholder 5">
+            <a:extLst>
+              <a:ext uri="{FF2B5EF4-FFF2-40B4-BE49-F238E27FC236}">
+                <a16:creationId xmlns:a16="http://schemas.microsoft.com/office/drawing/2014/main" id="{5C487D0D-A6BE-50D0-4804-465FF9AE0F65}"/>
+              </a:ext>
+            </a:extLst>
+          </p:cNvPr>
+          <p:cNvSpPr>
+            <a:spLocks noGrp="1"/>
+          </p:cNvSpPr>
+          <p:nvPr>
+            <p:ph type="dt" sz="half" idx="10"/>
+          </p:nvPr>
+        </p:nvSpPr>
+        <p:spPr/>
+        <p:txBody>
+          <a:bodyPr/>
+          <a:lstStyle/>
+          <a:p>
+            <a:fld id="{EF3200F1-F65B-194F-A5DE-AAA7619A5033}" type="datetime1">
+              <a:rPr lang="en-US" smtClean="0"/>
+              <a:t>10/8/26</a:t>
+            </a:fld>
+            <a:endParaRPr lang="en-US"/>
+          </a:p>
+        </p:txBody>
+      </p:sp>
+      <p:sp>
+        <p:nvSpPr>
+          <p:cNvPr id="7" name="Footer Placeholder 6">
+            <a:extLst>
+              <a:ext uri="{FF2B5EF4-FFF2-40B4-BE49-F238E27FC236}">
+                <a16:creationId xmlns:a16="http://schemas.microsoft.com/office/drawing/2014/main" id="{FF4343B0-C3EA-68AB-7293-4C580E1ED630}"/>
+              </a:ext>
+            </a:extLst>
+          </p:cNvPr>
           <p:cNvSpPr>
             <a:spLocks noGrp="1"/>
           </p:cNvSpPr>
@@ -2899,23 +2216,27 @@
             <p:ph type="ftr" sz="quarter" idx="11"/>
           </p:nvPr>
         </p:nvSpPr>
-        <p:spPr>
-          <a:xfrm>
-            <a:off x="1957222" y="6308726"/>
-            <a:ext cx="8605793" cy="487680"/>
-          </a:xfrm>
-        </p:spPr>
-        <p:txBody>
-          <a:bodyPr/>
-          <a:lstStyle/>
-          <a:p>
-            <a:endParaRPr lang="en-US"/>
-          </a:p>
-        </p:txBody>
-      </p:sp>
-      <p:sp>
-        <p:nvSpPr>
-          <p:cNvPr id="5" name="Slide Number Placeholder 4"/>
+        <p:spPr/>
+        <p:txBody>
+          <a:bodyPr/>
+          <a:lstStyle/>
+          <a:p>
+            <a:r>
+              <a:rPr lang="en-US"/>
+              <a:t>© Steve Beaty and others as cited</a:t>
+            </a:r>
+          </a:p>
+        </p:txBody>
+      </p:sp>
+      <p:sp>
+        <p:nvSpPr>
+          <p:cNvPr id="8" name="Slide Number Placeholder 7">
+            <a:extLst>
+              <a:ext uri="{FF2B5EF4-FFF2-40B4-BE49-F238E27FC236}">
+                <a16:creationId xmlns:a16="http://schemas.microsoft.com/office/drawing/2014/main" id="{498496D9-0557-9109-1A11-35D97D8FDD5A}"/>
+              </a:ext>
+            </a:extLst>
+          </p:cNvPr>
           <p:cNvSpPr>
             <a:spLocks noGrp="1"/>
           </p:cNvSpPr>
@@ -2923,12 +2244,7 @@
             <p:ph type="sldNum" sz="quarter" idx="12"/>
           </p:nvPr>
         </p:nvSpPr>
-        <p:spPr>
-          <a:xfrm>
-            <a:off x="10745942" y="6308726"/>
-            <a:ext cx="879777" cy="487680"/>
-          </a:xfrm>
-        </p:spPr>
+        <p:spPr/>
         <p:txBody>
           <a:bodyPr/>
           <a:lstStyle/>
@@ -2941,57 +2257,10 @@
           </a:p>
         </p:txBody>
       </p:sp>
-      <p:sp>
-        <p:nvSpPr>
-          <p:cNvPr id="2" name="Date Placeholder 2">
-            <a:extLst>
-              <a:ext uri="{FF2B5EF4-FFF2-40B4-BE49-F238E27FC236}">
-                <a16:creationId xmlns:a16="http://schemas.microsoft.com/office/drawing/2014/main" id="{ED4BD15D-B8F3-E5F7-61A8-F1581CE5EF72}"/>
-              </a:ext>
-            </a:extLst>
-          </p:cNvPr>
-          <p:cNvSpPr>
-            <a:spLocks noGrp="1"/>
-          </p:cNvSpPr>
-          <p:nvPr>
-            <p:ph type="dt" sz="half" idx="2"/>
-          </p:nvPr>
-        </p:nvSpPr>
-        <p:spPr>
-          <a:xfrm>
-            <a:off x="605141" y="6308726"/>
-            <a:ext cx="1169155" cy="487680"/>
-          </a:xfrm>
-          <a:prstGeom prst="rect">
-            <a:avLst/>
-          </a:prstGeom>
-          <a:solidFill>
-            <a:schemeClr val="bg1"/>
-          </a:solidFill>
-          <a:effectLst>
-            <a:softEdge rad="63500"/>
-          </a:effectLst>
-        </p:spPr>
-        <p:txBody>
-          <a:bodyPr anchor="ctr" anchorCtr="0"/>
-          <a:lstStyle>
-            <a:lvl1pPr algn="ctr">
-              <a:defRPr sz="1600"/>
-            </a:lvl1pPr>
-          </a:lstStyle>
-          <a:p>
-            <a:fld id="{624D9F20-0CDB-DC45-97C1-8E3888B449A2}" type="datetimeFigureOut">
-              <a:rPr lang="en-US" smtClean="0"/>
-              <a:t>8/27/26</a:t>
-            </a:fld>
-            <a:endParaRPr lang="en-US"/>
-          </a:p>
-        </p:txBody>
-      </p:sp>
     </p:spTree>
     <p:extLst>
       <p:ext uri="{BB962C8B-B14F-4D97-AF65-F5344CB8AC3E}">
-        <p14:creationId xmlns:p14="http://schemas.microsoft.com/office/powerpoint/2010/main" val="109645888"/>
+        <p14:creationId xmlns:p14="http://schemas.microsoft.com/office/powerpoint/2010/main" val="216143271"/>
       </p:ext>
     </p:extLst>
   </p:cSld>
@@ -3000,12 +2269,12 @@
   </p:clrMapOvr>
   <mc:AlternateContent xmlns:mc="http://schemas.openxmlformats.org/markup-compatibility/2006" xmlns:p14="http://schemas.microsoft.com/office/powerpoint/2010/main">
     <mc:Choice Requires="p14">
-      <p:transition spd="slow" p14:dur="1200">
-        <p14:prism/>
+      <p:transition spd="slow" p14:dur="2000">
+        <p14:prism isContent="1"/>
       </p:transition>
     </mc:Choice>
     <mc:Fallback xmlns="">
-      <p:transition xmlns:p14="http://schemas.microsoft.com/office/powerpoint/2010/main" spd="slow">
+      <p:transition spd="slow">
         <p:fade/>
       </p:transition>
     </mc:Fallback>
@@ -3090,9 +2359,9 @@
           <a:bodyPr/>
           <a:lstStyle/>
           <a:p>
-            <a:fld id="{624D9F20-0CDB-DC45-97C1-8E3888B449A2}" type="datetimeFigureOut">
+            <a:fld id="{F062997C-0643-ED4A-AE2F-8EF27DDEAB0D}" type="datetime1">
               <a:rPr lang="en-US" smtClean="0"/>
-              <a:t>8/27/26</a:t>
+              <a:t>10/8/26</a:t>
             </a:fld>
             <a:endParaRPr lang="en-US"/>
           </a:p>
@@ -3119,7 +2388,10 @@
           <a:bodyPr/>
           <a:lstStyle/>
           <a:p>
-            <a:endParaRPr lang="en-US"/>
+            <a:r>
+              <a:rPr lang="en-US"/>
+              <a:t>© Steve Beaty and others as cited</a:t>
+            </a:r>
           </a:p>
         </p:txBody>
       </p:sp>
@@ -3155,7 +2427,7 @@
     </p:spTree>
     <p:extLst>
       <p:ext uri="{BB962C8B-B14F-4D97-AF65-F5344CB8AC3E}">
-        <p14:creationId xmlns:p14="http://schemas.microsoft.com/office/powerpoint/2010/main" val="1071524753"/>
+        <p14:creationId xmlns:p14="http://schemas.microsoft.com/office/powerpoint/2010/main" val="1403857347"/>
       </p:ext>
     </p:extLst>
   </p:cSld>
@@ -3165,104 +2437,13 @@
 </p:sldLayout>
 </file>
 
-<file path=ppt/slideLayouts/slideLayout9.xml><?xml version="1.0" encoding="utf-8"?>
-<p:sldLayout xmlns:a="http://schemas.openxmlformats.org/drawingml/2006/main" xmlns:r="http://schemas.openxmlformats.org/officeDocument/2006/relationships" xmlns:p="http://schemas.openxmlformats.org/presentationml/2006/main" type="tx">
-  <p:cSld name="Photo">
-    <p:spTree>
-      <p:nvGrpSpPr>
-        <p:cNvPr id="1" name=""/>
-        <p:cNvGrpSpPr/>
-        <p:nvPr/>
-      </p:nvGrpSpPr>
-      <p:grpSpPr>
-        <a:xfrm>
-          <a:off x="0" y="0"/>
-          <a:ext cx="0" cy="0"/>
-          <a:chOff x="0" y="0"/>
-          <a:chExt cx="0" cy="0"/>
-        </a:xfrm>
-      </p:grpSpPr>
-      <p:sp>
-        <p:nvSpPr>
-          <p:cNvPr id="111" name="Image"/>
-          <p:cNvSpPr>
-            <a:spLocks noGrp="1"/>
-          </p:cNvSpPr>
-          <p:nvPr>
-            <p:ph type="pic" idx="13"/>
-          </p:nvPr>
-        </p:nvSpPr>
-        <p:spPr>
-          <a:xfrm>
-            <a:off x="0" y="0"/>
-            <a:ext cx="12192000" cy="6858000"/>
-          </a:xfrm>
-          <a:prstGeom prst="rect">
-            <a:avLst/>
-          </a:prstGeom>
-        </p:spPr>
-        <p:txBody>
-          <a:bodyPr lIns="91439" tIns="45719" rIns="91439" bIns="45719" anchor="t">
-            <a:noAutofit/>
-          </a:bodyPr>
-          <a:lstStyle/>
-          <a:p>
-            <a:r>
-              <a:rPr lang="en-US"/>
-              <a:t>Click icon to add picture</a:t>
-            </a:r>
-            <a:endParaRPr/>
-          </a:p>
-        </p:txBody>
-      </p:sp>
-      <p:sp>
-        <p:nvSpPr>
-          <p:cNvPr id="112" name="Slide Number"/>
-          <p:cNvSpPr txBox="1">
-            <a:spLocks noGrp="1"/>
-          </p:cNvSpPr>
-          <p:nvPr>
-            <p:ph type="sldNum" sz="quarter" idx="2"/>
-          </p:nvPr>
-        </p:nvSpPr>
-        <p:spPr>
-          <a:prstGeom prst="rect">
-            <a:avLst/>
-          </a:prstGeom>
-        </p:spPr>
-        <p:txBody>
-          <a:bodyPr/>
-          <a:lstStyle/>
-          <a:p>
-            <a:fld id="{8BADA5E7-275A-0142-8584-066D5199CC3B}" type="slidenum">
-              <a:rPr lang="en-US" smtClean="0"/>
-              <a:t>‹#›</a:t>
-            </a:fld>
-            <a:endParaRPr lang="en-US"/>
-          </a:p>
-        </p:txBody>
-      </p:sp>
-    </p:spTree>
-    <p:extLst>
-      <p:ext uri="{BB962C8B-B14F-4D97-AF65-F5344CB8AC3E}">
-        <p14:creationId xmlns:p14="http://schemas.microsoft.com/office/powerpoint/2010/main" val="3669071310"/>
-      </p:ext>
-    </p:extLst>
-  </p:cSld>
-  <p:clrMapOvr>
-    <a:masterClrMapping/>
-  </p:clrMapOvr>
-  <p:transition spd="med"/>
-</p:sldLayout>
-</file>
-
 <file path=ppt/slideMasters/slideMaster1.xml><?xml version="1.0" encoding="utf-8"?>
 <p:sldMaster xmlns:a="http://schemas.openxmlformats.org/drawingml/2006/main" xmlns:r="http://schemas.openxmlformats.org/officeDocument/2006/relationships" xmlns:p="http://schemas.openxmlformats.org/presentationml/2006/main">
   <p:cSld>
     <p:bg>
       <p:bgPr>
         <a:blipFill dpi="0" rotWithShape="1">
-          <a:blip r:embed="rId13">
+          <a:blip r:embed="rId10">
             <a:lum/>
           </a:blip>
           <a:srcRect/>
@@ -3289,20 +2470,70 @@
       </p:grpSpPr>
       <p:sp>
         <p:nvSpPr>
-          <p:cNvPr id="3" name="Text Placeholder 2"/>
-          <p:cNvSpPr>
-            <a:spLocks noGrp="1"/>
-          </p:cNvSpPr>
-          <p:nvPr>
-            <p:ph type="body" idx="1"/>
+          <p:cNvPr id="2" name="Title Placeholder 1"/>
+          <p:cNvSpPr>
+            <a:spLocks noGrp="1"/>
+          </p:cNvSpPr>
+          <p:nvPr>
+            <p:ph type="title"/>
           </p:nvPr>
         </p:nvSpPr>
         <p:spPr>
           <a:xfrm>
-            <a:off x="609600" y="1616423"/>
+            <a:off x="609600" y="274639"/>
+            <a:ext cx="10972800" cy="1143000"/>
+          </a:xfrm>
+          <a:prstGeom prst="roundRect">
+            <a:avLst>
+              <a:gd name="adj" fmla="val 44167"/>
+            </a:avLst>
+          </a:prstGeom>
+          <a:solidFill>
+            <a:schemeClr val="bg1">
+              <a:alpha val="95000"/>
+            </a:schemeClr>
+          </a:solidFill>
+          <a:effectLst>
+            <a:softEdge rad="0"/>
+          </a:effectLst>
+          <a:scene3d>
+            <a:camera prst="orthographicFront"/>
+            <a:lightRig rig="threePt" dir="t"/>
+          </a:scene3d>
+          <a:sp3d>
+            <a:bevelT/>
+          </a:sp3d>
+        </p:spPr>
+        <p:txBody>
+          <a:bodyPr vert="horz" lIns="91440" tIns="45720" rIns="91440" bIns="45720" rtlCol="0" anchor="ctr">
+            <a:normAutofit/>
+          </a:bodyPr>
+          <a:lstStyle/>
+          <a:p>
+            <a:r>
+              <a:rPr lang="en-US"/>
+              <a:t>Click to edit Master title style</a:t>
+            </a:r>
+            <a:endParaRPr lang="en-US" dirty="0"/>
+          </a:p>
+        </p:txBody>
+      </p:sp>
+      <p:sp>
+        <p:nvSpPr>
+          <p:cNvPr id="3" name="Text Placeholder 2"/>
+          <p:cNvSpPr>
+            <a:spLocks noGrp="1"/>
+          </p:cNvSpPr>
+          <p:nvPr>
+            <p:ph type="body" idx="1"/>
+          </p:nvPr>
+        </p:nvSpPr>
+        <p:spPr>
+          <a:xfrm>
+            <a:off x="609600" y="1600201"/>
             <a:ext cx="10972800" cy="4525963"/>
           </a:xfrm>
-          <a:prstGeom prst="rect">
+          <a:prstGeom prst="roundRect">
             <a:avLst/>
           </a:prstGeom>
           <a:solidFill>
@@ -3366,69 +2597,23 @@
       </p:sp>
       <p:sp>
         <p:nvSpPr>
-          <p:cNvPr id="2" name="Title Placeholder 1"/>
-          <p:cNvSpPr>
-            <a:spLocks noGrp="1"/>
-          </p:cNvSpPr>
-          <p:nvPr>
-            <p:ph type="title"/>
+          <p:cNvPr id="5" name="Footer Placeholder 4"/>
+          <p:cNvSpPr>
+            <a:spLocks noGrp="1"/>
+          </p:cNvSpPr>
+          <p:nvPr>
+            <p:ph type="ftr" sz="quarter" idx="3"/>
           </p:nvPr>
         </p:nvSpPr>
         <p:spPr>
           <a:xfrm>
-            <a:off x="609600" y="274639"/>
-            <a:ext cx="10972800" cy="1143000"/>
+            <a:off x="1881809" y="6308727"/>
+            <a:ext cx="7945363" cy="487680"/>
           </a:xfrm>
-          <a:prstGeom prst="rect">
-            <a:avLst/>
-          </a:prstGeom>
-          <a:solidFill>
-            <a:schemeClr val="bg1">
-              <a:alpha val="95000"/>
-            </a:schemeClr>
-          </a:solidFill>
-          <a:effectLst>
-            <a:softEdge rad="0"/>
-          </a:effectLst>
-          <a:scene3d>
-            <a:camera prst="orthographicFront"/>
-            <a:lightRig rig="threePt" dir="t"/>
-          </a:scene3d>
-          <a:sp3d>
-            <a:bevelT/>
-          </a:sp3d>
-        </p:spPr>
-        <p:txBody>
-          <a:bodyPr vert="horz" lIns="91440" tIns="45720" rIns="91440" bIns="45720" rtlCol="0" anchor="ctr">
-            <a:normAutofit/>
-          </a:bodyPr>
-          <a:lstStyle/>
-          <a:p>
-            <a:r>
-              <a:rPr lang="en-US"/>
-              <a:t>Click to edit Master title style</a:t>
-            </a:r>
-            <a:endParaRPr lang="en-US" dirty="0"/>
-          </a:p>
-        </p:txBody>
-      </p:sp>
-      <p:sp>
-        <p:nvSpPr>
-          <p:cNvPr id="5" name="Footer Placeholder 4"/>
-          <p:cNvSpPr>
-            <a:spLocks noGrp="1"/>
-          </p:cNvSpPr>
-          <p:nvPr>
-            <p:ph type="ftr" sz="quarter" idx="3"/>
-          </p:nvPr>
-        </p:nvSpPr>
-        <p:spPr>
-          <a:xfrm>
-            <a:off x="1881808" y="6308726"/>
-            <a:ext cx="8605793" cy="487680"/>
-          </a:xfrm>
-          <a:prstGeom prst="rect">
-            <a:avLst/>
+          <a:prstGeom prst="roundRect">
+            <a:avLst>
+              <a:gd name="adj" fmla="val 48894"/>
+            </a:avLst>
           </a:prstGeom>
           <a:solidFill>
             <a:schemeClr val="bg1"/>
@@ -3449,7 +2634,10 @@
             </a:lvl1pPr>
           </a:lstStyle>
           <a:p>
-            <a:endParaRPr lang="en-US"/>
+            <a:r>
+              <a:rPr lang="en-US"/>
+              <a:t>© Steve Beaty and others as cited</a:t>
+            </a:r>
           </a:p>
         </p:txBody>
       </p:sp>
@@ -3465,11 +2653,13 @@
         </p:nvSpPr>
         <p:spPr>
           <a:xfrm>
-            <a:off x="10595113" y="6308726"/>
-            <a:ext cx="987287" cy="487680"/>
+            <a:off x="9934686" y="6308727"/>
+            <a:ext cx="879777" cy="487680"/>
           </a:xfrm>
-          <a:prstGeom prst="rect">
-            <a:avLst/>
+          <a:prstGeom prst="roundRect">
+            <a:avLst>
+              <a:gd name="adj" fmla="val 43034"/>
+            </a:avLst>
           </a:prstGeom>
           <a:solidFill>
             <a:schemeClr val="bg1"/>
@@ -3518,11 +2708,13 @@
         </p:nvSpPr>
         <p:spPr>
           <a:xfrm>
-            <a:off x="605141" y="6308726"/>
+            <a:off x="605141" y="6308727"/>
             <a:ext cx="1169155" cy="487680"/>
           </a:xfrm>
-          <a:prstGeom prst="rect">
-            <a:avLst/>
+          <a:prstGeom prst="roundRect">
+            <a:avLst>
+              <a:gd name="adj" fmla="val 48894"/>
+            </a:avLst>
           </a:prstGeom>
           <a:solidFill>
             <a:schemeClr val="bg1"/>
@@ -3539,34 +2731,170 @@
             </a:lvl1pPr>
           </a:lstStyle>
           <a:p>
-            <a:fld id="{624D9F20-0CDB-DC45-97C1-8E3888B449A2}" type="datetimeFigureOut">
+            <a:fld id="{328D3DA6-7887-1549-8D73-EC35594C9F14}" type="datetime1">
               <a:rPr lang="en-US" smtClean="0"/>
-              <a:t>8/27/26</a:t>
+              <a:t>10/8/26</a:t>
             </a:fld>
             <a:endParaRPr lang="en-US"/>
+          </a:p>
+        </p:txBody>
+      </p:sp>
+      <p:sp>
+        <p:nvSpPr>
+          <p:cNvPr id="7" name="SlideTotal">
+            <a:extLst>
+              <a:ext uri="{FF2B5EF4-FFF2-40B4-BE49-F238E27FC236}">
+                <a16:creationId xmlns:a16="http://schemas.microsoft.com/office/drawing/2014/main" id="{B74D5B4B-3C60-FF6A-4438-A067B7DE7333}"/>
+              </a:ext>
+            </a:extLst>
+          </p:cNvPr>
+          <p:cNvSpPr txBox="1">
+            <a:spLocks/>
+          </p:cNvSpPr>
+          <p:nvPr/>
+        </p:nvSpPr>
+        <p:spPr>
+          <a:xfrm>
+            <a:off x="10702624" y="6308727"/>
+            <a:ext cx="879777" cy="487680"/>
+          </a:xfrm>
+          <a:prstGeom prst="roundRect">
+            <a:avLst>
+              <a:gd name="adj" fmla="val 43034"/>
+            </a:avLst>
+          </a:prstGeom>
+          <a:solidFill>
+            <a:schemeClr val="bg1"/>
+          </a:solidFill>
+          <a:effectLst>
+            <a:softEdge rad="63500"/>
+          </a:effectLst>
+        </p:spPr>
+        <p:txBody>
+          <a:bodyPr vert="horz" lIns="121920" tIns="60960" rIns="121920" bIns="60960" rtlCol="0" anchor="ctr"/>
+          <a:lstStyle>
+            <a:defPPr>
+              <a:defRPr lang="en-US"/>
+            </a:defPPr>
+            <a:lvl1pPr marL="0" algn="ctr" defTabSz="914400" rtl="0" eaLnBrk="1" latinLnBrk="0" hangingPunct="1">
+              <a:defRPr sz="1200" kern="1200">
+                <a:solidFill>
+                  <a:schemeClr val="tx1">
+                    <a:tint val="75000"/>
+                  </a:schemeClr>
+                </a:solidFill>
+                <a:latin typeface="+mn-lt"/>
+                <a:ea typeface="+mn-ea"/>
+                <a:cs typeface="+mn-cs"/>
+              </a:defRPr>
+            </a:lvl1pPr>
+            <a:lvl2pPr marL="457200" algn="l" defTabSz="914400" rtl="0" eaLnBrk="1" latinLnBrk="0" hangingPunct="1">
+              <a:defRPr sz="1800" kern="1200">
+                <a:solidFill>
+                  <a:schemeClr val="tx1"/>
+                </a:solidFill>
+                <a:latin typeface="+mn-lt"/>
+                <a:ea typeface="+mn-ea"/>
+                <a:cs typeface="+mn-cs"/>
+              </a:defRPr>
+            </a:lvl2pPr>
+            <a:lvl3pPr marL="914400" algn="l" defTabSz="914400" rtl="0" eaLnBrk="1" latinLnBrk="0" hangingPunct="1">
+              <a:defRPr sz="1800" kern="1200">
+                <a:solidFill>
+                  <a:schemeClr val="tx1"/>
+                </a:solidFill>
+                <a:latin typeface="+mn-lt"/>
+                <a:ea typeface="+mn-ea"/>
+                <a:cs typeface="+mn-cs"/>
+              </a:defRPr>
+            </a:lvl3pPr>
+            <a:lvl4pPr marL="1371600" algn="l" defTabSz="914400" rtl="0" eaLnBrk="1" latinLnBrk="0" hangingPunct="1">
+              <a:defRPr sz="1800" kern="1200">
+                <a:solidFill>
+                  <a:schemeClr val="tx1"/>
+                </a:solidFill>
+                <a:latin typeface="+mn-lt"/>
+                <a:ea typeface="+mn-ea"/>
+                <a:cs typeface="+mn-cs"/>
+              </a:defRPr>
+            </a:lvl4pPr>
+            <a:lvl5pPr marL="1828800" algn="l" defTabSz="914400" rtl="0" eaLnBrk="1" latinLnBrk="0" hangingPunct="1">
+              <a:defRPr sz="1800" kern="1200">
+                <a:solidFill>
+                  <a:schemeClr val="tx1"/>
+                </a:solidFill>
+                <a:latin typeface="+mn-lt"/>
+                <a:ea typeface="+mn-ea"/>
+                <a:cs typeface="+mn-cs"/>
+              </a:defRPr>
+            </a:lvl5pPr>
+            <a:lvl6pPr marL="2286000" algn="l" defTabSz="914400" rtl="0" eaLnBrk="1" latinLnBrk="0" hangingPunct="1">
+              <a:defRPr sz="1800" kern="1200">
+                <a:solidFill>
+                  <a:schemeClr val="tx1"/>
+                </a:solidFill>
+                <a:latin typeface="+mn-lt"/>
+                <a:ea typeface="+mn-ea"/>
+                <a:cs typeface="+mn-cs"/>
+              </a:defRPr>
+            </a:lvl6pPr>
+            <a:lvl7pPr marL="2743200" algn="l" defTabSz="914400" rtl="0" eaLnBrk="1" latinLnBrk="0" hangingPunct="1">
+              <a:defRPr sz="1800" kern="1200">
+                <a:solidFill>
+                  <a:schemeClr val="tx1"/>
+                </a:solidFill>
+                <a:latin typeface="+mn-lt"/>
+                <a:ea typeface="+mn-ea"/>
+                <a:cs typeface="+mn-cs"/>
+              </a:defRPr>
+            </a:lvl7pPr>
+            <a:lvl8pPr marL="3200400" algn="l" defTabSz="914400" rtl="0" eaLnBrk="1" latinLnBrk="0" hangingPunct="1">
+              <a:defRPr sz="1800" kern="1200">
+                <a:solidFill>
+                  <a:schemeClr val="tx1"/>
+                </a:solidFill>
+                <a:latin typeface="+mn-lt"/>
+                <a:ea typeface="+mn-ea"/>
+                <a:cs typeface="+mn-cs"/>
+              </a:defRPr>
+            </a:lvl8pPr>
+            <a:lvl9pPr marL="3657600" algn="l" defTabSz="914400" rtl="0" eaLnBrk="1" latinLnBrk="0" hangingPunct="1">
+              <a:defRPr sz="1800" kern="1200">
+                <a:solidFill>
+                  <a:schemeClr val="tx1"/>
+                </a:solidFill>
+                <a:latin typeface="+mn-lt"/>
+                <a:ea typeface="+mn-ea"/>
+                <a:cs typeface="+mn-cs"/>
+              </a:defRPr>
+            </a:lvl9pPr>
+          </a:lstStyle>
+          <a:p>
+            <a:r>
+              <a:rPr lang="en-US" sz="1600"/>
+              <a:t>46</a:t>
+            </a:r>
+            <a:endParaRPr lang="en-US" sz="1600" dirty="0"/>
           </a:p>
         </p:txBody>
       </p:sp>
     </p:spTree>
     <p:extLst>
       <p:ext uri="{BB962C8B-B14F-4D97-AF65-F5344CB8AC3E}">
-        <p14:creationId xmlns:p14="http://schemas.microsoft.com/office/powerpoint/2010/main" val="689459120"/>
+        <p14:creationId xmlns:p14="http://schemas.microsoft.com/office/powerpoint/2010/main" val="1618109205"/>
       </p:ext>
     </p:extLst>
   </p:cSld>
   <p:clrMap bg1="lt1" tx1="dk1" bg2="lt2" tx2="dk2" accent1="accent1" accent2="accent2" accent3="accent3" accent4="accent4" accent5="accent5" accent6="accent6" hlink="hlink" folHlink="folHlink"/>
   <p:sldLayoutIdLst>
-    <p:sldLayoutId id="2147483661" r:id="rId1"/>
-    <p:sldLayoutId id="2147483662" r:id="rId2"/>
-    <p:sldLayoutId id="2147483663" r:id="rId3"/>
-    <p:sldLayoutId id="2147483664" r:id="rId4"/>
-    <p:sldLayoutId id="2147483665" r:id="rId5"/>
-    <p:sldLayoutId id="2147483666" r:id="rId6"/>
-    <p:sldLayoutId id="2147483667" r:id="rId7"/>
-    <p:sldLayoutId id="2147483668" r:id="rId8"/>
-    <p:sldLayoutId id="2147483669" r:id="rId9"/>
-    <p:sldLayoutId id="2147483670" r:id="rId10"/>
-    <p:sldLayoutId id="2147483671" r:id="rId11"/>
+    <p:sldLayoutId id="2147483673" r:id="rId1"/>
+    <p:sldLayoutId id="2147483674" r:id="rId2"/>
+    <p:sldLayoutId id="2147483675" r:id="rId3"/>
+    <p:sldLayoutId id="2147483676" r:id="rId4"/>
+    <p:sldLayoutId id="2147483677" r:id="rId5"/>
+    <p:sldLayoutId id="2147483678" r:id="rId6"/>
+    <p:sldLayoutId id="2147483679" r:id="rId7"/>
+    <p:sldLayoutId id="2147483680" r:id="rId8"/>
   </p:sldLayoutIdLst>
   <mc:AlternateContent xmlns:mc="http://schemas.openxmlformats.org/markup-compatibility/2006" xmlns:p14="http://schemas.microsoft.com/office/powerpoint/2010/main">
     <mc:Choice Requires="p14">
@@ -3580,9 +2908,10 @@
       </p:transition>
     </mc:Fallback>
   </mc:AlternateContent>
+  <p:hf hdr="0"/>
   <p:txStyles>
     <p:titleStyle>
-      <a:lvl1pPr algn="ctr" defTabSz="609570" rtl="0" eaLnBrk="1" latinLnBrk="0" hangingPunct="1">
+      <a:lvl1pPr algn="ctr" defTabSz="609555" rtl="0" eaLnBrk="1" latinLnBrk="0" hangingPunct="1">
         <a:spcBef>
           <a:spcPct val="0"/>
         </a:spcBef>
@@ -3598,7 +2927,7 @@
       </a:lvl1pPr>
     </p:titleStyle>
     <p:bodyStyle>
-      <a:lvl1pPr marL="457177" indent="-457177" algn="l" defTabSz="609570" rtl="0" eaLnBrk="1" latinLnBrk="0" hangingPunct="1">
+      <a:lvl1pPr marL="457166" indent="-457166" algn="l" defTabSz="609555" rtl="0" eaLnBrk="1" latinLnBrk="0" hangingPunct="1">
         <a:spcBef>
           <a:spcPct val="20000"/>
         </a:spcBef>
@@ -3613,7 +2942,7 @@
           <a:cs typeface="+mn-cs"/>
         </a:defRPr>
       </a:lvl1pPr>
-      <a:lvl2pPr marL="990551" indent="-380982" algn="l" defTabSz="609570" rtl="0" eaLnBrk="1" latinLnBrk="0" hangingPunct="1">
+      <a:lvl2pPr marL="990526" indent="-380973" algn="l" defTabSz="609555" rtl="0" eaLnBrk="1" latinLnBrk="0" hangingPunct="1">
         <a:spcBef>
           <a:spcPct val="20000"/>
         </a:spcBef>
@@ -3628,7 +2957,7 @@
           <a:cs typeface="+mn-cs"/>
         </a:defRPr>
       </a:lvl2pPr>
-      <a:lvl3pPr marL="1523923" indent="-304784" algn="l" defTabSz="609570" rtl="0" eaLnBrk="1" latinLnBrk="0" hangingPunct="1">
+      <a:lvl3pPr marL="1523885" indent="-304776" algn="l" defTabSz="609555" rtl="0" eaLnBrk="1" latinLnBrk="0" hangingPunct="1">
         <a:spcBef>
           <a:spcPct val="20000"/>
         </a:spcBef>
@@ -3643,7 +2972,7 @@
           <a:cs typeface="+mn-cs"/>
         </a:defRPr>
       </a:lvl3pPr>
-      <a:lvl4pPr marL="2133493" indent="-304784" algn="l" defTabSz="609570" rtl="0" eaLnBrk="1" latinLnBrk="0" hangingPunct="1">
+      <a:lvl4pPr marL="2133440" indent="-304776" algn="l" defTabSz="609555" rtl="0" eaLnBrk="1" latinLnBrk="0" hangingPunct="1">
         <a:spcBef>
           <a:spcPct val="20000"/>
         </a:spcBef>
@@ -3658,7 +2987,7 @@
           <a:cs typeface="+mn-cs"/>
         </a:defRPr>
       </a:lvl4pPr>
-      <a:lvl5pPr marL="2743063" indent="-304784" algn="l" defTabSz="609570" rtl="0" eaLnBrk="1" latinLnBrk="0" hangingPunct="1">
+      <a:lvl5pPr marL="2742994" indent="-304776" algn="l" defTabSz="609555" rtl="0" eaLnBrk="1" latinLnBrk="0" hangingPunct="1">
         <a:spcBef>
           <a:spcPct val="20000"/>
         </a:spcBef>
@@ -3673,7 +3002,7 @@
           <a:cs typeface="+mn-cs"/>
         </a:defRPr>
       </a:lvl5pPr>
-      <a:lvl6pPr marL="3352632" indent="-304784" algn="l" defTabSz="609570" rtl="0" eaLnBrk="1" latinLnBrk="0" hangingPunct="1">
+      <a:lvl6pPr marL="3352548" indent="-304776" algn="l" defTabSz="609555" rtl="0" eaLnBrk="1" latinLnBrk="0" hangingPunct="1">
         <a:spcBef>
           <a:spcPct val="20000"/>
         </a:spcBef>
@@ -3688,7 +3017,7 @@
           <a:cs typeface="+mn-cs"/>
         </a:defRPr>
       </a:lvl6pPr>
-      <a:lvl7pPr marL="3962202" indent="-304784" algn="l" defTabSz="609570" rtl="0" eaLnBrk="1" latinLnBrk="0" hangingPunct="1">
+      <a:lvl7pPr marL="3962104" indent="-304776" algn="l" defTabSz="609555" rtl="0" eaLnBrk="1" latinLnBrk="0" hangingPunct="1">
         <a:spcBef>
           <a:spcPct val="20000"/>
         </a:spcBef>
@@ -3703,7 +3032,7 @@
           <a:cs typeface="+mn-cs"/>
         </a:defRPr>
       </a:lvl7pPr>
-      <a:lvl8pPr marL="4571771" indent="-304784" algn="l" defTabSz="609570" rtl="0" eaLnBrk="1" latinLnBrk="0" hangingPunct="1">
+      <a:lvl8pPr marL="4571656" indent="-304776" algn="l" defTabSz="609555" rtl="0" eaLnBrk="1" latinLnBrk="0" hangingPunct="1">
         <a:spcBef>
           <a:spcPct val="20000"/>
         </a:spcBef>
@@ -3718,7 +3047,7 @@
           <a:cs typeface="+mn-cs"/>
         </a:defRPr>
       </a:lvl8pPr>
-      <a:lvl9pPr marL="5181341" indent="-304784" algn="l" defTabSz="609570" rtl="0" eaLnBrk="1" latinLnBrk="0" hangingPunct="1">
+      <a:lvl9pPr marL="5181212" indent="-304776" algn="l" defTabSz="609555" rtl="0" eaLnBrk="1" latinLnBrk="0" hangingPunct="1">
         <a:spcBef>
           <a:spcPct val="20000"/>
         </a:spcBef>
@@ -3738,7 +3067,7 @@
       <a:defPPr>
         <a:defRPr lang="en-US"/>
       </a:defPPr>
-      <a:lvl1pPr marL="0" algn="l" defTabSz="609570" rtl="0" eaLnBrk="1" latinLnBrk="0" hangingPunct="1">
+      <a:lvl1pPr marL="0" algn="l" defTabSz="609555" rtl="0" eaLnBrk="1" latinLnBrk="0" hangingPunct="1">
         <a:defRPr sz="2400" kern="1200">
           <a:solidFill>
             <a:schemeClr val="tx1"/>
@@ -3748,7 +3077,7 @@
           <a:cs typeface="+mn-cs"/>
         </a:defRPr>
       </a:lvl1pPr>
-      <a:lvl2pPr marL="609570" algn="l" defTabSz="609570" rtl="0" eaLnBrk="1" latinLnBrk="0" hangingPunct="1">
+      <a:lvl2pPr marL="609555" algn="l" defTabSz="609555" rtl="0" eaLnBrk="1" latinLnBrk="0" hangingPunct="1">
         <a:defRPr sz="2400" kern="1200">
           <a:solidFill>
             <a:schemeClr val="tx1"/>
@@ -3758,7 +3087,7 @@
           <a:cs typeface="+mn-cs"/>
         </a:defRPr>
       </a:lvl2pPr>
-      <a:lvl3pPr marL="1219139" algn="l" defTabSz="609570" rtl="0" eaLnBrk="1" latinLnBrk="0" hangingPunct="1">
+      <a:lvl3pPr marL="1219108" algn="l" defTabSz="609555" rtl="0" eaLnBrk="1" latinLnBrk="0" hangingPunct="1">
         <a:defRPr sz="2400" kern="1200">
           <a:solidFill>
             <a:schemeClr val="tx1"/>
@@ -3768,7 +3097,7 @@
           <a:cs typeface="+mn-cs"/>
         </a:defRPr>
       </a:lvl3pPr>
-      <a:lvl4pPr marL="1828709" algn="l" defTabSz="609570" rtl="0" eaLnBrk="1" latinLnBrk="0" hangingPunct="1">
+      <a:lvl4pPr marL="1828664" algn="l" defTabSz="609555" rtl="0" eaLnBrk="1" latinLnBrk="0" hangingPunct="1">
         <a:defRPr sz="2400" kern="1200">
           <a:solidFill>
             <a:schemeClr val="tx1"/>
@@ -3778,7 +3107,7 @@
           <a:cs typeface="+mn-cs"/>
         </a:defRPr>
       </a:lvl4pPr>
-      <a:lvl5pPr marL="2438278" algn="l" defTabSz="609570" rtl="0" eaLnBrk="1" latinLnBrk="0" hangingPunct="1">
+      <a:lvl5pPr marL="2438218" algn="l" defTabSz="609555" rtl="0" eaLnBrk="1" latinLnBrk="0" hangingPunct="1">
         <a:defRPr sz="2400" kern="1200">
           <a:solidFill>
             <a:schemeClr val="tx1"/>
@@ -3788,7 +3117,7 @@
           <a:cs typeface="+mn-cs"/>
         </a:defRPr>
       </a:lvl5pPr>
-      <a:lvl6pPr marL="3047848" algn="l" defTabSz="609570" rtl="0" eaLnBrk="1" latinLnBrk="0" hangingPunct="1">
+      <a:lvl6pPr marL="3047772" algn="l" defTabSz="609555" rtl="0" eaLnBrk="1" latinLnBrk="0" hangingPunct="1">
         <a:defRPr sz="2400" kern="1200">
           <a:solidFill>
             <a:schemeClr val="tx1"/>
@@ -3798,7 +3127,7 @@
           <a:cs typeface="+mn-cs"/>
         </a:defRPr>
       </a:lvl6pPr>
-      <a:lvl7pPr marL="3657417" algn="l" defTabSz="609570" rtl="0" eaLnBrk="1" latinLnBrk="0" hangingPunct="1">
+      <a:lvl7pPr marL="3657326" algn="l" defTabSz="609555" rtl="0" eaLnBrk="1" latinLnBrk="0" hangingPunct="1">
         <a:defRPr sz="2400" kern="1200">
           <a:solidFill>
             <a:schemeClr val="tx1"/>
@@ -3808,7 +3137,7 @@
           <a:cs typeface="+mn-cs"/>
         </a:defRPr>
       </a:lvl7pPr>
-      <a:lvl8pPr marL="4266987" algn="l" defTabSz="609570" rtl="0" eaLnBrk="1" latinLnBrk="0" hangingPunct="1">
+      <a:lvl8pPr marL="4266880" algn="l" defTabSz="609555" rtl="0" eaLnBrk="1" latinLnBrk="0" hangingPunct="1">
         <a:defRPr sz="2400" kern="1200">
           <a:solidFill>
             <a:schemeClr val="tx1"/>
@@ -3818,7 +3147,7 @@
           <a:cs typeface="+mn-cs"/>
         </a:defRPr>
       </a:lvl8pPr>
-      <a:lvl9pPr marL="4876557" algn="l" defTabSz="609570" rtl="0" eaLnBrk="1" latinLnBrk="0" hangingPunct="1">
+      <a:lvl9pPr marL="4876435" algn="l" defTabSz="609555" rtl="0" eaLnBrk="1" latinLnBrk="0" hangingPunct="1">
         <a:defRPr sz="2400" kern="1200">
           <a:solidFill>
             <a:schemeClr val="tx1"/>
@@ -3906,6 +3235,94 @@
           </a:p>
         </p:txBody>
       </p:sp>
+      <p:sp>
+        <p:nvSpPr>
+          <p:cNvPr id="2" name="Date Placeholder 1">
+            <a:extLst>
+              <a:ext uri="{FF2B5EF4-FFF2-40B4-BE49-F238E27FC236}">
+                <a16:creationId xmlns:a16="http://schemas.microsoft.com/office/drawing/2014/main" id="{4DF78BC1-8C59-9161-B8B1-B462F801CF10}"/>
+              </a:ext>
+            </a:extLst>
+          </p:cNvPr>
+          <p:cNvSpPr>
+            <a:spLocks noGrp="1"/>
+          </p:cNvSpPr>
+          <p:nvPr>
+            <p:ph type="dt" sz="half" idx="11"/>
+          </p:nvPr>
+        </p:nvSpPr>
+        <p:spPr/>
+        <p:txBody>
+          <a:bodyPr/>
+          <a:lstStyle/>
+          <a:p>
+            <a:fld id="{8E3E6BB3-5034-8643-991C-4735733095F0}" type="datetime1">
+              <a:rPr lang="en-US" smtClean="0"/>
+              <a:t>10/8/26</a:t>
+            </a:fld>
+            <a:endParaRPr lang="en-US" dirty="0"/>
+          </a:p>
+        </p:txBody>
+      </p:sp>
+      <p:sp>
+        <p:nvSpPr>
+          <p:cNvPr id="3" name="Footer Placeholder 2">
+            <a:extLst>
+              <a:ext uri="{FF2B5EF4-FFF2-40B4-BE49-F238E27FC236}">
+                <a16:creationId xmlns:a16="http://schemas.microsoft.com/office/drawing/2014/main" id="{730C5964-D91F-C01B-B6BC-DB9ECA5AEAAB}"/>
+              </a:ext>
+            </a:extLst>
+          </p:cNvPr>
+          <p:cNvSpPr>
+            <a:spLocks noGrp="1"/>
+          </p:cNvSpPr>
+          <p:nvPr>
+            <p:ph type="ftr" sz="quarter" idx="12"/>
+          </p:nvPr>
+        </p:nvSpPr>
+        <p:spPr/>
+        <p:txBody>
+          <a:bodyPr/>
+          <a:lstStyle/>
+          <a:p>
+            <a:r>
+              <a:rPr lang="en-US"/>
+              <a:t>© Steve Beaty and others as cited</a:t>
+            </a:r>
+            <a:endParaRPr lang="en-US" dirty="0"/>
+          </a:p>
+        </p:txBody>
+      </p:sp>
+      <p:sp>
+        <p:nvSpPr>
+          <p:cNvPr id="6" name="Slide Number Placeholder 5">
+            <a:extLst>
+              <a:ext uri="{FF2B5EF4-FFF2-40B4-BE49-F238E27FC236}">
+                <a16:creationId xmlns:a16="http://schemas.microsoft.com/office/drawing/2014/main" id="{C976AAD6-E672-200C-8102-2947E1EED52E}"/>
+              </a:ext>
+            </a:extLst>
+          </p:cNvPr>
+          <p:cNvSpPr>
+            <a:spLocks noGrp="1"/>
+          </p:cNvSpPr>
+          <p:nvPr>
+            <p:ph type="sldNum" sz="quarter" idx="13"/>
+          </p:nvPr>
+        </p:nvSpPr>
+        <p:spPr/>
+        <p:txBody>
+          <a:bodyPr/>
+          <a:lstStyle/>
+          <a:p>
+            <a:fld id="{37D050C8-32A2-8944-BC0A-E76DEAECED1E}" type="slidenum">
+              <a:rPr lang="en-US" smtClean="0"/>
+              <a:pPr/>
+              <a:t>1</a:t>
+            </a:fld>
+            <a:endParaRPr lang="en-US" dirty="0"/>
+          </a:p>
+        </p:txBody>
+      </p:sp>
     </p:spTree>
     <p:extLst>
       <p:ext uri="{BB962C8B-B14F-4D97-AF65-F5344CB8AC3E}">
@@ -3918,12 +3335,12 @@
   </p:clrMapOvr>
   <mc:AlternateContent xmlns:mc="http://schemas.openxmlformats.org/markup-compatibility/2006" xmlns:p14="http://schemas.microsoft.com/office/powerpoint/2010/main">
     <mc:Choice Requires="p14">
-      <p:transition spd="slow" p14:dur="1200">
-        <p14:prism/>
+      <p:transition spd="slow" p14:dur="2000">
+        <p14:prism isContent="1"/>
       </p:transition>
     </mc:Choice>
     <mc:Fallback xmlns="">
-      <p:transition xmlns:p14="http://schemas.microsoft.com/office/powerpoint/2010/main" spd="slow">
+      <p:transition spd="slow">
         <p:fade/>
       </p:transition>
     </mc:Fallback>
@@ -3950,6 +3367,36 @@
       </p:grpSpPr>
       <p:sp>
         <p:nvSpPr>
+          <p:cNvPr id="3" name="Title 2">
+            <a:extLst>
+              <a:ext uri="{FF2B5EF4-FFF2-40B4-BE49-F238E27FC236}">
+                <a16:creationId xmlns:a16="http://schemas.microsoft.com/office/drawing/2014/main" id="{5C58E7F4-703D-3173-ABD9-B845B522BEFA}"/>
+              </a:ext>
+            </a:extLst>
+          </p:cNvPr>
+          <p:cNvSpPr>
+            <a:spLocks noGrp="1"/>
+          </p:cNvSpPr>
+          <p:nvPr>
+            <p:ph type="title"/>
+          </p:nvPr>
+        </p:nvSpPr>
+        <p:spPr/>
+        <p:txBody>
+          <a:bodyPr>
+            <a:normAutofit fontScale="90000"/>
+          </a:bodyPr>
+          <a:lstStyle/>
+          <a:p>
+            <a:r>
+              <a:rPr lang="en-US" dirty="0"/>
+              <a:t>The Big Four of OOP</a:t>
+            </a:r>
+          </a:p>
+        </p:txBody>
+      </p:sp>
+      <p:sp>
+        <p:nvSpPr>
           <p:cNvPr id="2" name="Content Placeholder 1">
             <a:extLst>
               <a:ext uri="{FF2B5EF4-FFF2-40B4-BE49-F238E27FC236}">
@@ -3967,7 +3414,7 @@
         <p:spPr/>
         <p:txBody>
           <a:bodyPr>
-            <a:normAutofit lnSpcReduction="10000"/>
+            <a:normAutofit fontScale="92500" lnSpcReduction="10000"/>
           </a:bodyPr>
           <a:lstStyle/>
           <a:p>
@@ -4027,31 +3474,87 @@
       </p:sp>
       <p:sp>
         <p:nvSpPr>
-          <p:cNvPr id="3" name="Title 2">
-            <a:extLst>
-              <a:ext uri="{FF2B5EF4-FFF2-40B4-BE49-F238E27FC236}">
-                <a16:creationId xmlns:a16="http://schemas.microsoft.com/office/drawing/2014/main" id="{5C58E7F4-703D-3173-ABD9-B845B522BEFA}"/>
-              </a:ext>
-            </a:extLst>
-          </p:cNvPr>
-          <p:cNvSpPr>
-            <a:spLocks noGrp="1"/>
-          </p:cNvSpPr>
-          <p:nvPr>
-            <p:ph type="title"/>
-          </p:nvPr>
-        </p:nvSpPr>
-        <p:spPr/>
-        <p:txBody>
-          <a:bodyPr>
-            <a:normAutofit/>
-          </a:bodyPr>
-          <a:lstStyle/>
-          <a:p>
-            <a:r>
-              <a:rPr lang="en-US" dirty="0"/>
-              <a:t>The Big Four of OOP</a:t>
-            </a:r>
+          <p:cNvPr id="4" name="Date Placeholder 3">
+            <a:extLst>
+              <a:ext uri="{FF2B5EF4-FFF2-40B4-BE49-F238E27FC236}">
+                <a16:creationId xmlns:a16="http://schemas.microsoft.com/office/drawing/2014/main" id="{DF2587AF-30D5-EC5A-A0B6-3B59BF361F5A}"/>
+              </a:ext>
+            </a:extLst>
+          </p:cNvPr>
+          <p:cNvSpPr>
+            <a:spLocks noGrp="1"/>
+          </p:cNvSpPr>
+          <p:nvPr>
+            <p:ph type="dt" sz="half" idx="10"/>
+          </p:nvPr>
+        </p:nvSpPr>
+        <p:spPr/>
+        <p:txBody>
+          <a:bodyPr/>
+          <a:lstStyle/>
+          <a:p>
+            <a:fld id="{B5777E6F-E087-3743-BD7C-29172737885E}" type="datetime1">
+              <a:rPr lang="en-US" smtClean="0"/>
+              <a:t>10/8/26</a:t>
+            </a:fld>
+            <a:endParaRPr lang="en-US"/>
+          </a:p>
+        </p:txBody>
+      </p:sp>
+      <p:sp>
+        <p:nvSpPr>
+          <p:cNvPr id="5" name="Footer Placeholder 4">
+            <a:extLst>
+              <a:ext uri="{FF2B5EF4-FFF2-40B4-BE49-F238E27FC236}">
+                <a16:creationId xmlns:a16="http://schemas.microsoft.com/office/drawing/2014/main" id="{9FC35DF9-2A94-8C58-5F7F-59728FD89E8D}"/>
+              </a:ext>
+            </a:extLst>
+          </p:cNvPr>
+          <p:cNvSpPr>
+            <a:spLocks noGrp="1"/>
+          </p:cNvSpPr>
+          <p:nvPr>
+            <p:ph type="ftr" sz="quarter" idx="11"/>
+          </p:nvPr>
+        </p:nvSpPr>
+        <p:spPr/>
+        <p:txBody>
+          <a:bodyPr/>
+          <a:lstStyle/>
+          <a:p>
+            <a:r>
+              <a:rPr lang="en-US"/>
+              <a:t>© Steve Beaty and others as cited</a:t>
+            </a:r>
+          </a:p>
+        </p:txBody>
+      </p:sp>
+      <p:sp>
+        <p:nvSpPr>
+          <p:cNvPr id="6" name="Slide Number Placeholder 5">
+            <a:extLst>
+              <a:ext uri="{FF2B5EF4-FFF2-40B4-BE49-F238E27FC236}">
+                <a16:creationId xmlns:a16="http://schemas.microsoft.com/office/drawing/2014/main" id="{5A8D1545-F2DD-E673-5BB0-11073DDD3D6B}"/>
+              </a:ext>
+            </a:extLst>
+          </p:cNvPr>
+          <p:cNvSpPr>
+            <a:spLocks noGrp="1"/>
+          </p:cNvSpPr>
+          <p:nvPr>
+            <p:ph type="sldNum" sz="quarter" idx="12"/>
+          </p:nvPr>
+        </p:nvSpPr>
+        <p:spPr/>
+        <p:txBody>
+          <a:bodyPr/>
+          <a:lstStyle/>
+          <a:p>
+            <a:fld id="{8BADA5E7-275A-0142-8584-066D5199CC3B}" type="slidenum">
+              <a:rPr lang="en-US" smtClean="0"/>
+              <a:t>10</a:t>
+            </a:fld>
+            <a:endParaRPr lang="en-US"/>
           </a:p>
         </p:txBody>
       </p:sp>
@@ -4067,12 +3570,12 @@
   </p:clrMapOvr>
   <mc:AlternateContent xmlns:mc="http://schemas.openxmlformats.org/markup-compatibility/2006" xmlns:p14="http://schemas.microsoft.com/office/powerpoint/2010/main">
     <mc:Choice Requires="p14">
-      <p:transition spd="slow" p14:dur="1200">
-        <p14:prism/>
+      <p:transition spd="slow" p14:dur="2000">
+        <p14:prism isContent="1"/>
       </p:transition>
     </mc:Choice>
     <mc:Fallback xmlns="">
-      <p:transition xmlns:p14="http://schemas.microsoft.com/office/powerpoint/2010/main" spd="slow">
+      <p:transition spd="slow">
         <p:fade/>
       </p:transition>
     </mc:Fallback>
@@ -4122,6 +3625,92 @@
               <a:rPr lang="en-US" dirty="0"/>
               <a:t>Abstraction</a:t>
             </a:r>
+          </a:p>
+        </p:txBody>
+      </p:sp>
+      <p:sp>
+        <p:nvSpPr>
+          <p:cNvPr id="2" name="Date Placeholder 1">
+            <a:extLst>
+              <a:ext uri="{FF2B5EF4-FFF2-40B4-BE49-F238E27FC236}">
+                <a16:creationId xmlns:a16="http://schemas.microsoft.com/office/drawing/2014/main" id="{09F92C04-9942-5F29-51FB-1F6F201BED9C}"/>
+              </a:ext>
+            </a:extLst>
+          </p:cNvPr>
+          <p:cNvSpPr>
+            <a:spLocks noGrp="1"/>
+          </p:cNvSpPr>
+          <p:nvPr>
+            <p:ph type="dt" sz="half" idx="10"/>
+          </p:nvPr>
+        </p:nvSpPr>
+        <p:spPr/>
+        <p:txBody>
+          <a:bodyPr/>
+          <a:lstStyle/>
+          <a:p>
+            <a:fld id="{43E141F3-F07A-D048-805A-773A4B75C1FD}" type="datetime1">
+              <a:rPr lang="en-US" smtClean="0"/>
+              <a:t>10/8/26</a:t>
+            </a:fld>
+            <a:endParaRPr lang="en-US"/>
+          </a:p>
+        </p:txBody>
+      </p:sp>
+      <p:sp>
+        <p:nvSpPr>
+          <p:cNvPr id="3" name="Footer Placeholder 2">
+            <a:extLst>
+              <a:ext uri="{FF2B5EF4-FFF2-40B4-BE49-F238E27FC236}">
+                <a16:creationId xmlns:a16="http://schemas.microsoft.com/office/drawing/2014/main" id="{60F441DD-49A6-5278-0B3B-6DB24C344F5C}"/>
+              </a:ext>
+            </a:extLst>
+          </p:cNvPr>
+          <p:cNvSpPr>
+            <a:spLocks noGrp="1"/>
+          </p:cNvSpPr>
+          <p:nvPr>
+            <p:ph type="ftr" sz="quarter" idx="11"/>
+          </p:nvPr>
+        </p:nvSpPr>
+        <p:spPr/>
+        <p:txBody>
+          <a:bodyPr/>
+          <a:lstStyle/>
+          <a:p>
+            <a:r>
+              <a:rPr lang="en-US"/>
+              <a:t>© Steve Beaty and others as cited</a:t>
+            </a:r>
+          </a:p>
+        </p:txBody>
+      </p:sp>
+      <p:sp>
+        <p:nvSpPr>
+          <p:cNvPr id="5" name="Slide Number Placeholder 4">
+            <a:extLst>
+              <a:ext uri="{FF2B5EF4-FFF2-40B4-BE49-F238E27FC236}">
+                <a16:creationId xmlns:a16="http://schemas.microsoft.com/office/drawing/2014/main" id="{BE2FADBF-8FB5-F81A-3BE3-AB3A4D6F5AD1}"/>
+              </a:ext>
+            </a:extLst>
+          </p:cNvPr>
+          <p:cNvSpPr>
+            <a:spLocks noGrp="1"/>
+          </p:cNvSpPr>
+          <p:nvPr>
+            <p:ph type="sldNum" sz="quarter" idx="12"/>
+          </p:nvPr>
+        </p:nvSpPr>
+        <p:spPr/>
+        <p:txBody>
+          <a:bodyPr/>
+          <a:lstStyle/>
+          <a:p>
+            <a:fld id="{8BADA5E7-275A-0142-8584-066D5199CC3B}" type="slidenum">
+              <a:rPr lang="en-US" smtClean="0"/>
+              <a:t>11</a:t>
+            </a:fld>
+            <a:endParaRPr lang="en-US"/>
           </a:p>
         </p:txBody>
       </p:sp>
@@ -4169,6 +3758,36 @@
       </p:grpSpPr>
       <p:sp>
         <p:nvSpPr>
+          <p:cNvPr id="3" name="Title 2">
+            <a:extLst>
+              <a:ext uri="{FF2B5EF4-FFF2-40B4-BE49-F238E27FC236}">
+                <a16:creationId xmlns:a16="http://schemas.microsoft.com/office/drawing/2014/main" id="{77A4CEEC-07F5-BF53-0C1D-0B5105E9AE20}"/>
+              </a:ext>
+            </a:extLst>
+          </p:cNvPr>
+          <p:cNvSpPr>
+            <a:spLocks noGrp="1"/>
+          </p:cNvSpPr>
+          <p:nvPr>
+            <p:ph type="title"/>
+          </p:nvPr>
+        </p:nvSpPr>
+        <p:spPr/>
+        <p:txBody>
+          <a:bodyPr>
+            <a:normAutofit fontScale="90000"/>
+          </a:bodyPr>
+          <a:lstStyle/>
+          <a:p>
+            <a:r>
+              <a:rPr lang="en-US" dirty="0"/>
+              <a:t>A: Abstraction</a:t>
+            </a:r>
+          </a:p>
+        </p:txBody>
+      </p:sp>
+      <p:sp>
+        <p:nvSpPr>
           <p:cNvPr id="4" name="Content Placeholder 3">
             <a:extLst>
               <a:ext uri="{FF2B5EF4-FFF2-40B4-BE49-F238E27FC236}">
@@ -4186,7 +3805,7 @@
         <p:spPr/>
         <p:txBody>
           <a:bodyPr>
-            <a:normAutofit fontScale="77500" lnSpcReduction="20000"/>
+            <a:normAutofit fontScale="70000" lnSpcReduction="20000"/>
           </a:bodyPr>
           <a:lstStyle/>
           <a:p>
@@ -4259,31 +3878,87 @@
       </p:sp>
       <p:sp>
         <p:nvSpPr>
-          <p:cNvPr id="3" name="Title 2">
-            <a:extLst>
-              <a:ext uri="{FF2B5EF4-FFF2-40B4-BE49-F238E27FC236}">
-                <a16:creationId xmlns:a16="http://schemas.microsoft.com/office/drawing/2014/main" id="{77A4CEEC-07F5-BF53-0C1D-0B5105E9AE20}"/>
-              </a:ext>
-            </a:extLst>
-          </p:cNvPr>
-          <p:cNvSpPr>
-            <a:spLocks noGrp="1"/>
-          </p:cNvSpPr>
-          <p:nvPr>
-            <p:ph type="title"/>
-          </p:nvPr>
-        </p:nvSpPr>
-        <p:spPr/>
-        <p:txBody>
-          <a:bodyPr>
-            <a:normAutofit/>
-          </a:bodyPr>
-          <a:lstStyle/>
-          <a:p>
-            <a:r>
-              <a:rPr lang="en-US" dirty="0"/>
-              <a:t>A: Abstraction</a:t>
-            </a:r>
+          <p:cNvPr id="2" name="Date Placeholder 1">
+            <a:extLst>
+              <a:ext uri="{FF2B5EF4-FFF2-40B4-BE49-F238E27FC236}">
+                <a16:creationId xmlns:a16="http://schemas.microsoft.com/office/drawing/2014/main" id="{C4C5B817-CE99-909F-DF17-331FD3DB6ED9}"/>
+              </a:ext>
+            </a:extLst>
+          </p:cNvPr>
+          <p:cNvSpPr>
+            <a:spLocks noGrp="1"/>
+          </p:cNvSpPr>
+          <p:nvPr>
+            <p:ph type="dt" sz="half" idx="10"/>
+          </p:nvPr>
+        </p:nvSpPr>
+        <p:spPr/>
+        <p:txBody>
+          <a:bodyPr/>
+          <a:lstStyle/>
+          <a:p>
+            <a:fld id="{B0FE608B-AA4E-3E48-A2CF-6B191BB6A76E}" type="datetime1">
+              <a:rPr lang="en-US" smtClean="0"/>
+              <a:t>10/8/26</a:t>
+            </a:fld>
+            <a:endParaRPr lang="en-US"/>
+          </a:p>
+        </p:txBody>
+      </p:sp>
+      <p:sp>
+        <p:nvSpPr>
+          <p:cNvPr id="5" name="Footer Placeholder 4">
+            <a:extLst>
+              <a:ext uri="{FF2B5EF4-FFF2-40B4-BE49-F238E27FC236}">
+                <a16:creationId xmlns:a16="http://schemas.microsoft.com/office/drawing/2014/main" id="{94B64935-ACB0-636F-4DF6-A738CA9ABC61}"/>
+              </a:ext>
+            </a:extLst>
+          </p:cNvPr>
+          <p:cNvSpPr>
+            <a:spLocks noGrp="1"/>
+          </p:cNvSpPr>
+          <p:nvPr>
+            <p:ph type="ftr" sz="quarter" idx="11"/>
+          </p:nvPr>
+        </p:nvSpPr>
+        <p:spPr/>
+        <p:txBody>
+          <a:bodyPr/>
+          <a:lstStyle/>
+          <a:p>
+            <a:r>
+              <a:rPr lang="en-US"/>
+              <a:t>© Steve Beaty and others as cited</a:t>
+            </a:r>
+          </a:p>
+        </p:txBody>
+      </p:sp>
+      <p:sp>
+        <p:nvSpPr>
+          <p:cNvPr id="6" name="Slide Number Placeholder 5">
+            <a:extLst>
+              <a:ext uri="{FF2B5EF4-FFF2-40B4-BE49-F238E27FC236}">
+                <a16:creationId xmlns:a16="http://schemas.microsoft.com/office/drawing/2014/main" id="{8BFD035B-EF81-C619-71CC-DF1340568A59}"/>
+              </a:ext>
+            </a:extLst>
+          </p:cNvPr>
+          <p:cNvSpPr>
+            <a:spLocks noGrp="1"/>
+          </p:cNvSpPr>
+          <p:nvPr>
+            <p:ph type="sldNum" sz="quarter" idx="12"/>
+          </p:nvPr>
+        </p:nvSpPr>
+        <p:spPr/>
+        <p:txBody>
+          <a:bodyPr/>
+          <a:lstStyle/>
+          <a:p>
+            <a:fld id="{8BADA5E7-275A-0142-8584-066D5199CC3B}" type="slidenum">
+              <a:rPr lang="en-US" smtClean="0"/>
+              <a:t>12</a:t>
+            </a:fld>
+            <a:endParaRPr lang="en-US"/>
           </a:p>
         </p:txBody>
       </p:sp>
@@ -4299,12 +3974,12 @@
   </p:clrMapOvr>
   <mc:AlternateContent xmlns:mc="http://schemas.openxmlformats.org/markup-compatibility/2006" xmlns:p14="http://schemas.microsoft.com/office/powerpoint/2010/main">
     <mc:Choice Requires="p14">
-      <p:transition spd="slow" p14:dur="1200">
-        <p14:prism/>
+      <p:transition spd="slow" p14:dur="2000">
+        <p14:prism isContent="1"/>
       </p:transition>
     </mc:Choice>
     <mc:Fallback xmlns="">
-      <p:transition xmlns:p14="http://schemas.microsoft.com/office/powerpoint/2010/main" spd="slow">
+      <p:transition spd="slow">
         <p:fade/>
       </p:transition>
     </mc:Fallback>
@@ -4331,6 +4006,36 @@
       </p:grpSpPr>
       <p:sp>
         <p:nvSpPr>
+          <p:cNvPr id="3" name="Title 2">
+            <a:extLst>
+              <a:ext uri="{FF2B5EF4-FFF2-40B4-BE49-F238E27FC236}">
+                <a16:creationId xmlns:a16="http://schemas.microsoft.com/office/drawing/2014/main" id="{1438EA07-BB29-CD2A-91C9-29E62EFC13CD}"/>
+              </a:ext>
+            </a:extLst>
+          </p:cNvPr>
+          <p:cNvSpPr>
+            <a:spLocks noGrp="1"/>
+          </p:cNvSpPr>
+          <p:nvPr>
+            <p:ph type="title"/>
+          </p:nvPr>
+        </p:nvSpPr>
+        <p:spPr/>
+        <p:txBody>
+          <a:bodyPr>
+            <a:normAutofit fontScale="90000"/>
+          </a:bodyPr>
+          <a:lstStyle/>
+          <a:p>
+            <a:r>
+              <a:rPr lang="en-US" dirty="0"/>
+              <a:t>Abstraction in Practice</a:t>
+            </a:r>
+          </a:p>
+        </p:txBody>
+      </p:sp>
+      <p:sp>
+        <p:nvSpPr>
           <p:cNvPr id="2" name="Content Placeholder 1">
             <a:extLst>
               <a:ext uri="{FF2B5EF4-FFF2-40B4-BE49-F238E27FC236}">
@@ -4348,7 +4053,7 @@
         <p:spPr/>
         <p:txBody>
           <a:bodyPr>
-            <a:normAutofit fontScale="92500" lnSpcReduction="20000"/>
+            <a:normAutofit fontScale="85000" lnSpcReduction="20000"/>
           </a:bodyPr>
           <a:lstStyle/>
           <a:p>
@@ -4412,31 +4117,87 @@
       </p:sp>
       <p:sp>
         <p:nvSpPr>
-          <p:cNvPr id="3" name="Title 2">
-            <a:extLst>
-              <a:ext uri="{FF2B5EF4-FFF2-40B4-BE49-F238E27FC236}">
-                <a16:creationId xmlns:a16="http://schemas.microsoft.com/office/drawing/2014/main" id="{1438EA07-BB29-CD2A-91C9-29E62EFC13CD}"/>
-              </a:ext>
-            </a:extLst>
-          </p:cNvPr>
-          <p:cNvSpPr>
-            <a:spLocks noGrp="1"/>
-          </p:cNvSpPr>
-          <p:nvPr>
-            <p:ph type="title"/>
-          </p:nvPr>
-        </p:nvSpPr>
-        <p:spPr/>
-        <p:txBody>
-          <a:bodyPr>
-            <a:normAutofit/>
-          </a:bodyPr>
-          <a:lstStyle/>
-          <a:p>
-            <a:r>
-              <a:rPr lang="en-US" dirty="0"/>
-              <a:t>Abstraction in Practice</a:t>
-            </a:r>
+          <p:cNvPr id="4" name="Date Placeholder 3">
+            <a:extLst>
+              <a:ext uri="{FF2B5EF4-FFF2-40B4-BE49-F238E27FC236}">
+                <a16:creationId xmlns:a16="http://schemas.microsoft.com/office/drawing/2014/main" id="{E8E9BD17-6281-5B03-8485-5EAE18B4A799}"/>
+              </a:ext>
+            </a:extLst>
+          </p:cNvPr>
+          <p:cNvSpPr>
+            <a:spLocks noGrp="1"/>
+          </p:cNvSpPr>
+          <p:nvPr>
+            <p:ph type="dt" sz="half" idx="10"/>
+          </p:nvPr>
+        </p:nvSpPr>
+        <p:spPr/>
+        <p:txBody>
+          <a:bodyPr/>
+          <a:lstStyle/>
+          <a:p>
+            <a:fld id="{2C150AD1-1865-8042-8449-D86073B06F66}" type="datetime1">
+              <a:rPr lang="en-US" smtClean="0"/>
+              <a:t>10/8/26</a:t>
+            </a:fld>
+            <a:endParaRPr lang="en-US"/>
+          </a:p>
+        </p:txBody>
+      </p:sp>
+      <p:sp>
+        <p:nvSpPr>
+          <p:cNvPr id="5" name="Footer Placeholder 4">
+            <a:extLst>
+              <a:ext uri="{FF2B5EF4-FFF2-40B4-BE49-F238E27FC236}">
+                <a16:creationId xmlns:a16="http://schemas.microsoft.com/office/drawing/2014/main" id="{C34FDA15-7BFE-F837-4D2F-0194C9628C22}"/>
+              </a:ext>
+            </a:extLst>
+          </p:cNvPr>
+          <p:cNvSpPr>
+            <a:spLocks noGrp="1"/>
+          </p:cNvSpPr>
+          <p:nvPr>
+            <p:ph type="ftr" sz="quarter" idx="11"/>
+          </p:nvPr>
+        </p:nvSpPr>
+        <p:spPr/>
+        <p:txBody>
+          <a:bodyPr/>
+          <a:lstStyle/>
+          <a:p>
+            <a:r>
+              <a:rPr lang="en-US"/>
+              <a:t>© Steve Beaty and others as cited</a:t>
+            </a:r>
+          </a:p>
+        </p:txBody>
+      </p:sp>
+      <p:sp>
+        <p:nvSpPr>
+          <p:cNvPr id="6" name="Slide Number Placeholder 5">
+            <a:extLst>
+              <a:ext uri="{FF2B5EF4-FFF2-40B4-BE49-F238E27FC236}">
+                <a16:creationId xmlns:a16="http://schemas.microsoft.com/office/drawing/2014/main" id="{C18244AC-E0F2-9B64-5F9A-08870F680234}"/>
+              </a:ext>
+            </a:extLst>
+          </p:cNvPr>
+          <p:cNvSpPr>
+            <a:spLocks noGrp="1"/>
+          </p:cNvSpPr>
+          <p:nvPr>
+            <p:ph type="sldNum" sz="quarter" idx="12"/>
+          </p:nvPr>
+        </p:nvSpPr>
+        <p:spPr/>
+        <p:txBody>
+          <a:bodyPr/>
+          <a:lstStyle/>
+          <a:p>
+            <a:fld id="{8BADA5E7-275A-0142-8584-066D5199CC3B}" type="slidenum">
+              <a:rPr lang="en-US" smtClean="0"/>
+              <a:t>13</a:t>
+            </a:fld>
+            <a:endParaRPr lang="en-US"/>
           </a:p>
         </p:txBody>
       </p:sp>
@@ -4452,12 +4213,12 @@
   </p:clrMapOvr>
   <mc:AlternateContent xmlns:mc="http://schemas.openxmlformats.org/markup-compatibility/2006" xmlns:p14="http://schemas.microsoft.com/office/powerpoint/2010/main">
     <mc:Choice Requires="p14">
-      <p:transition spd="slow" p14:dur="1200">
-        <p14:prism/>
+      <p:transition spd="slow" p14:dur="2000">
+        <p14:prism isContent="1"/>
       </p:transition>
     </mc:Choice>
     <mc:Fallback xmlns="">
-      <p:transition xmlns:p14="http://schemas.microsoft.com/office/powerpoint/2010/main" spd="slow">
+      <p:transition spd="slow">
         <p:fade/>
       </p:transition>
     </mc:Fallback>
@@ -4484,6 +4245,36 @@
       </p:grpSpPr>
       <p:sp>
         <p:nvSpPr>
+          <p:cNvPr id="3" name="Title 2">
+            <a:extLst>
+              <a:ext uri="{FF2B5EF4-FFF2-40B4-BE49-F238E27FC236}">
+                <a16:creationId xmlns:a16="http://schemas.microsoft.com/office/drawing/2014/main" id="{AFD8EF8E-0EE1-68D9-FCEC-536A056866D7}"/>
+              </a:ext>
+            </a:extLst>
+          </p:cNvPr>
+          <p:cNvSpPr>
+            <a:spLocks noGrp="1"/>
+          </p:cNvSpPr>
+          <p:nvPr>
+            <p:ph type="title"/>
+          </p:nvPr>
+        </p:nvSpPr>
+        <p:spPr/>
+        <p:txBody>
+          <a:bodyPr>
+            <a:normAutofit fontScale="90000"/>
+          </a:bodyPr>
+          <a:lstStyle/>
+          <a:p>
+            <a:r>
+              <a:rPr lang="en-US" dirty="0"/>
+              <a:t>Creating Good APIs</a:t>
+            </a:r>
+          </a:p>
+        </p:txBody>
+      </p:sp>
+      <p:sp>
+        <p:nvSpPr>
           <p:cNvPr id="2" name="Content Placeholder 1">
             <a:extLst>
               <a:ext uri="{FF2B5EF4-FFF2-40B4-BE49-F238E27FC236}">
@@ -4501,7 +4292,7 @@
         <p:spPr/>
         <p:txBody>
           <a:bodyPr>
-            <a:normAutofit fontScale="92500" lnSpcReduction="20000"/>
+            <a:normAutofit fontScale="85000" lnSpcReduction="20000"/>
           </a:bodyPr>
           <a:lstStyle/>
           <a:p>
@@ -4558,31 +4349,87 @@
       </p:sp>
       <p:sp>
         <p:nvSpPr>
-          <p:cNvPr id="3" name="Title 2">
-            <a:extLst>
-              <a:ext uri="{FF2B5EF4-FFF2-40B4-BE49-F238E27FC236}">
-                <a16:creationId xmlns:a16="http://schemas.microsoft.com/office/drawing/2014/main" id="{AFD8EF8E-0EE1-68D9-FCEC-536A056866D7}"/>
-              </a:ext>
-            </a:extLst>
-          </p:cNvPr>
-          <p:cNvSpPr>
-            <a:spLocks noGrp="1"/>
-          </p:cNvSpPr>
-          <p:nvPr>
-            <p:ph type="title"/>
-          </p:nvPr>
-        </p:nvSpPr>
-        <p:spPr/>
-        <p:txBody>
-          <a:bodyPr>
-            <a:normAutofit/>
-          </a:bodyPr>
-          <a:lstStyle/>
-          <a:p>
-            <a:r>
-              <a:rPr lang="en-US" dirty="0"/>
-              <a:t>Creating Good APIs</a:t>
-            </a:r>
+          <p:cNvPr id="4" name="Date Placeholder 3">
+            <a:extLst>
+              <a:ext uri="{FF2B5EF4-FFF2-40B4-BE49-F238E27FC236}">
+                <a16:creationId xmlns:a16="http://schemas.microsoft.com/office/drawing/2014/main" id="{5E3B8442-BC45-887B-358B-476D27234C0A}"/>
+              </a:ext>
+            </a:extLst>
+          </p:cNvPr>
+          <p:cNvSpPr>
+            <a:spLocks noGrp="1"/>
+          </p:cNvSpPr>
+          <p:nvPr>
+            <p:ph type="dt" sz="half" idx="10"/>
+          </p:nvPr>
+        </p:nvSpPr>
+        <p:spPr/>
+        <p:txBody>
+          <a:bodyPr/>
+          <a:lstStyle/>
+          <a:p>
+            <a:fld id="{6DE87016-EA7B-0048-91CA-DAB8751C7869}" type="datetime1">
+              <a:rPr lang="en-US" smtClean="0"/>
+              <a:t>10/8/26</a:t>
+            </a:fld>
+            <a:endParaRPr lang="en-US"/>
+          </a:p>
+        </p:txBody>
+      </p:sp>
+      <p:sp>
+        <p:nvSpPr>
+          <p:cNvPr id="5" name="Footer Placeholder 4">
+            <a:extLst>
+              <a:ext uri="{FF2B5EF4-FFF2-40B4-BE49-F238E27FC236}">
+                <a16:creationId xmlns:a16="http://schemas.microsoft.com/office/drawing/2014/main" id="{D8B46949-27BE-B770-E5FB-4778BCD5887F}"/>
+              </a:ext>
+            </a:extLst>
+          </p:cNvPr>
+          <p:cNvSpPr>
+            <a:spLocks noGrp="1"/>
+          </p:cNvSpPr>
+          <p:nvPr>
+            <p:ph type="ftr" sz="quarter" idx="11"/>
+          </p:nvPr>
+        </p:nvSpPr>
+        <p:spPr/>
+        <p:txBody>
+          <a:bodyPr/>
+          <a:lstStyle/>
+          <a:p>
+            <a:r>
+              <a:rPr lang="en-US"/>
+              <a:t>© Steve Beaty and others as cited</a:t>
+            </a:r>
+          </a:p>
+        </p:txBody>
+      </p:sp>
+      <p:sp>
+        <p:nvSpPr>
+          <p:cNvPr id="6" name="Slide Number Placeholder 5">
+            <a:extLst>
+              <a:ext uri="{FF2B5EF4-FFF2-40B4-BE49-F238E27FC236}">
+                <a16:creationId xmlns:a16="http://schemas.microsoft.com/office/drawing/2014/main" id="{7A28F1FA-7C00-D7D1-A09F-D38DF15EE59A}"/>
+              </a:ext>
+            </a:extLst>
+          </p:cNvPr>
+          <p:cNvSpPr>
+            <a:spLocks noGrp="1"/>
+          </p:cNvSpPr>
+          <p:nvPr>
+            <p:ph type="sldNum" sz="quarter" idx="12"/>
+          </p:nvPr>
+        </p:nvSpPr>
+        <p:spPr/>
+        <p:txBody>
+          <a:bodyPr/>
+          <a:lstStyle/>
+          <a:p>
+            <a:fld id="{8BADA5E7-275A-0142-8584-066D5199CC3B}" type="slidenum">
+              <a:rPr lang="en-US" smtClean="0"/>
+              <a:t>14</a:t>
+            </a:fld>
+            <a:endParaRPr lang="en-US"/>
           </a:p>
         </p:txBody>
       </p:sp>
@@ -4598,12 +4445,12 @@
   </p:clrMapOvr>
   <mc:AlternateContent xmlns:mc="http://schemas.openxmlformats.org/markup-compatibility/2006" xmlns:p14="http://schemas.microsoft.com/office/powerpoint/2010/main">
     <mc:Choice Requires="p14">
-      <p:transition spd="slow" p14:dur="1200">
-        <p14:prism/>
+      <p:transition spd="slow" p14:dur="2000">
+        <p14:prism isContent="1"/>
       </p:transition>
     </mc:Choice>
     <mc:Fallback xmlns="">
-      <p:transition xmlns:p14="http://schemas.microsoft.com/office/powerpoint/2010/main" spd="slow">
+      <p:transition spd="slow">
         <p:fade/>
       </p:transition>
     </mc:Fallback>
@@ -4630,6 +4477,36 @@
       </p:grpSpPr>
       <p:sp>
         <p:nvSpPr>
+          <p:cNvPr id="3" name="Title 2">
+            <a:extLst>
+              <a:ext uri="{FF2B5EF4-FFF2-40B4-BE49-F238E27FC236}">
+                <a16:creationId xmlns:a16="http://schemas.microsoft.com/office/drawing/2014/main" id="{2EF2F25E-FDE4-C752-B307-18650D54F536}"/>
+              </a:ext>
+            </a:extLst>
+          </p:cNvPr>
+          <p:cNvSpPr>
+            <a:spLocks noGrp="1"/>
+          </p:cNvSpPr>
+          <p:nvPr>
+            <p:ph type="title"/>
+          </p:nvPr>
+        </p:nvSpPr>
+        <p:spPr/>
+        <p:txBody>
+          <a:bodyPr>
+            <a:normAutofit fontScale="90000"/>
+          </a:bodyPr>
+          <a:lstStyle/>
+          <a:p>
+            <a:r>
+              <a:rPr lang="en-US" dirty="0"/>
+              <a:t>Arrays in Ruby</a:t>
+            </a:r>
+          </a:p>
+        </p:txBody>
+      </p:sp>
+      <p:sp>
+        <p:nvSpPr>
           <p:cNvPr id="2" name="Content Placeholder 1">
             <a:extLst>
               <a:ext uri="{FF2B5EF4-FFF2-40B4-BE49-F238E27FC236}">
@@ -4647,7 +4524,7 @@
         <p:spPr/>
         <p:txBody>
           <a:bodyPr>
-            <a:normAutofit fontScale="92500" lnSpcReduction="10000"/>
+            <a:normAutofit fontScale="92500" lnSpcReduction="20000"/>
           </a:bodyPr>
           <a:lstStyle/>
           <a:p>
@@ -4702,31 +4579,87 @@
       </p:sp>
       <p:sp>
         <p:nvSpPr>
-          <p:cNvPr id="3" name="Title 2">
-            <a:extLst>
-              <a:ext uri="{FF2B5EF4-FFF2-40B4-BE49-F238E27FC236}">
-                <a16:creationId xmlns:a16="http://schemas.microsoft.com/office/drawing/2014/main" id="{2EF2F25E-FDE4-C752-B307-18650D54F536}"/>
-              </a:ext>
-            </a:extLst>
-          </p:cNvPr>
-          <p:cNvSpPr>
-            <a:spLocks noGrp="1"/>
-          </p:cNvSpPr>
-          <p:nvPr>
-            <p:ph type="title"/>
-          </p:nvPr>
-        </p:nvSpPr>
-        <p:spPr/>
-        <p:txBody>
-          <a:bodyPr>
-            <a:normAutofit/>
-          </a:bodyPr>
-          <a:lstStyle/>
-          <a:p>
-            <a:r>
-              <a:rPr lang="en-US" dirty="0"/>
-              <a:t>Arrays in Ruby</a:t>
-            </a:r>
+          <p:cNvPr id="4" name="Date Placeholder 3">
+            <a:extLst>
+              <a:ext uri="{FF2B5EF4-FFF2-40B4-BE49-F238E27FC236}">
+                <a16:creationId xmlns:a16="http://schemas.microsoft.com/office/drawing/2014/main" id="{CD1F560F-9B59-9B4A-53A3-169962662BC5}"/>
+              </a:ext>
+            </a:extLst>
+          </p:cNvPr>
+          <p:cNvSpPr>
+            <a:spLocks noGrp="1"/>
+          </p:cNvSpPr>
+          <p:nvPr>
+            <p:ph type="dt" sz="half" idx="10"/>
+          </p:nvPr>
+        </p:nvSpPr>
+        <p:spPr/>
+        <p:txBody>
+          <a:bodyPr/>
+          <a:lstStyle/>
+          <a:p>
+            <a:fld id="{8E0FE391-C27E-0E45-8307-4243F30223EF}" type="datetime1">
+              <a:rPr lang="en-US" smtClean="0"/>
+              <a:t>10/8/26</a:t>
+            </a:fld>
+            <a:endParaRPr lang="en-US"/>
+          </a:p>
+        </p:txBody>
+      </p:sp>
+      <p:sp>
+        <p:nvSpPr>
+          <p:cNvPr id="5" name="Footer Placeholder 4">
+            <a:extLst>
+              <a:ext uri="{FF2B5EF4-FFF2-40B4-BE49-F238E27FC236}">
+                <a16:creationId xmlns:a16="http://schemas.microsoft.com/office/drawing/2014/main" id="{D16EA389-02DF-ABAD-A33D-25AA4AAF3D0C}"/>
+              </a:ext>
+            </a:extLst>
+          </p:cNvPr>
+          <p:cNvSpPr>
+            <a:spLocks noGrp="1"/>
+          </p:cNvSpPr>
+          <p:nvPr>
+            <p:ph type="ftr" sz="quarter" idx="11"/>
+          </p:nvPr>
+        </p:nvSpPr>
+        <p:spPr/>
+        <p:txBody>
+          <a:bodyPr/>
+          <a:lstStyle/>
+          <a:p>
+            <a:r>
+              <a:rPr lang="en-US"/>
+              <a:t>© Steve Beaty and others as cited</a:t>
+            </a:r>
+          </a:p>
+        </p:txBody>
+      </p:sp>
+      <p:sp>
+        <p:nvSpPr>
+          <p:cNvPr id="6" name="Slide Number Placeholder 5">
+            <a:extLst>
+              <a:ext uri="{FF2B5EF4-FFF2-40B4-BE49-F238E27FC236}">
+                <a16:creationId xmlns:a16="http://schemas.microsoft.com/office/drawing/2014/main" id="{7CA5D6F3-522B-9EFB-14CB-FC07736217AC}"/>
+              </a:ext>
+            </a:extLst>
+          </p:cNvPr>
+          <p:cNvSpPr>
+            <a:spLocks noGrp="1"/>
+          </p:cNvSpPr>
+          <p:nvPr>
+            <p:ph type="sldNum" sz="quarter" idx="12"/>
+          </p:nvPr>
+        </p:nvSpPr>
+        <p:spPr/>
+        <p:txBody>
+          <a:bodyPr/>
+          <a:lstStyle/>
+          <a:p>
+            <a:fld id="{8BADA5E7-275A-0142-8584-066D5199CC3B}" type="slidenum">
+              <a:rPr lang="en-US" smtClean="0"/>
+              <a:t>15</a:t>
+            </a:fld>
+            <a:endParaRPr lang="en-US"/>
           </a:p>
         </p:txBody>
       </p:sp>
@@ -4742,12 +4675,12 @@
   </p:clrMapOvr>
   <mc:AlternateContent xmlns:mc="http://schemas.openxmlformats.org/markup-compatibility/2006" xmlns:p14="http://schemas.microsoft.com/office/powerpoint/2010/main">
     <mc:Choice Requires="p14">
-      <p:transition spd="slow" p14:dur="1200">
-        <p14:prism/>
+      <p:transition spd="slow" p14:dur="2000">
+        <p14:prism isContent="1"/>
       </p:transition>
     </mc:Choice>
     <mc:Fallback xmlns="">
-      <p:transition xmlns:p14="http://schemas.microsoft.com/office/powerpoint/2010/main" spd="slow">
+      <p:transition spd="slow">
         <p:fade/>
       </p:transition>
     </mc:Fallback>
@@ -4774,6 +4707,36 @@
       </p:grpSpPr>
       <p:sp>
         <p:nvSpPr>
+          <p:cNvPr id="3" name="Title 2">
+            <a:extLst>
+              <a:ext uri="{FF2B5EF4-FFF2-40B4-BE49-F238E27FC236}">
+                <a16:creationId xmlns:a16="http://schemas.microsoft.com/office/drawing/2014/main" id="{3C801895-E5FA-3714-80DD-D84C34D38524}"/>
+              </a:ext>
+            </a:extLst>
+          </p:cNvPr>
+          <p:cNvSpPr>
+            <a:spLocks noGrp="1"/>
+          </p:cNvSpPr>
+          <p:nvPr>
+            <p:ph type="title"/>
+          </p:nvPr>
+        </p:nvSpPr>
+        <p:spPr/>
+        <p:txBody>
+          <a:bodyPr>
+            <a:normAutofit fontScale="90000"/>
+          </a:bodyPr>
+          <a:lstStyle/>
+          <a:p>
+            <a:r>
+              <a:rPr lang="en-US" dirty="0"/>
+              <a:t>Unconventional Operations</a:t>
+            </a:r>
+          </a:p>
+        </p:txBody>
+      </p:sp>
+      <p:sp>
+        <p:nvSpPr>
           <p:cNvPr id="2" name="Content Placeholder 1">
             <a:extLst>
               <a:ext uri="{FF2B5EF4-FFF2-40B4-BE49-F238E27FC236}">
@@ -4791,7 +4754,7 @@
         <p:spPr/>
         <p:txBody>
           <a:bodyPr>
-            <a:normAutofit/>
+            <a:normAutofit fontScale="92500"/>
           </a:bodyPr>
           <a:lstStyle/>
           <a:p>
@@ -4829,31 +4792,87 @@
       </p:sp>
       <p:sp>
         <p:nvSpPr>
-          <p:cNvPr id="3" name="Title 2">
-            <a:extLst>
-              <a:ext uri="{FF2B5EF4-FFF2-40B4-BE49-F238E27FC236}">
-                <a16:creationId xmlns:a16="http://schemas.microsoft.com/office/drawing/2014/main" id="{3C801895-E5FA-3714-80DD-D84C34D38524}"/>
-              </a:ext>
-            </a:extLst>
-          </p:cNvPr>
-          <p:cNvSpPr>
-            <a:spLocks noGrp="1"/>
-          </p:cNvSpPr>
-          <p:nvPr>
-            <p:ph type="title"/>
-          </p:nvPr>
-        </p:nvSpPr>
-        <p:spPr/>
-        <p:txBody>
-          <a:bodyPr>
-            <a:normAutofit/>
-          </a:bodyPr>
-          <a:lstStyle/>
-          <a:p>
-            <a:r>
-              <a:rPr lang="en-US" dirty="0"/>
-              <a:t>Unconventional Operations</a:t>
-            </a:r>
+          <p:cNvPr id="4" name="Date Placeholder 3">
+            <a:extLst>
+              <a:ext uri="{FF2B5EF4-FFF2-40B4-BE49-F238E27FC236}">
+                <a16:creationId xmlns:a16="http://schemas.microsoft.com/office/drawing/2014/main" id="{88BDD4AD-8409-6DB1-7BDC-5B5408EFFE2B}"/>
+              </a:ext>
+            </a:extLst>
+          </p:cNvPr>
+          <p:cNvSpPr>
+            <a:spLocks noGrp="1"/>
+          </p:cNvSpPr>
+          <p:nvPr>
+            <p:ph type="dt" sz="half" idx="10"/>
+          </p:nvPr>
+        </p:nvSpPr>
+        <p:spPr/>
+        <p:txBody>
+          <a:bodyPr/>
+          <a:lstStyle/>
+          <a:p>
+            <a:fld id="{6845898F-0AAF-2049-81C5-E6AAF3EBAD29}" type="datetime1">
+              <a:rPr lang="en-US" smtClean="0"/>
+              <a:t>10/8/26</a:t>
+            </a:fld>
+            <a:endParaRPr lang="en-US"/>
+          </a:p>
+        </p:txBody>
+      </p:sp>
+      <p:sp>
+        <p:nvSpPr>
+          <p:cNvPr id="5" name="Footer Placeholder 4">
+            <a:extLst>
+              <a:ext uri="{FF2B5EF4-FFF2-40B4-BE49-F238E27FC236}">
+                <a16:creationId xmlns:a16="http://schemas.microsoft.com/office/drawing/2014/main" id="{15441C13-9F7B-B0BA-5E7E-1D388FD7D700}"/>
+              </a:ext>
+            </a:extLst>
+          </p:cNvPr>
+          <p:cNvSpPr>
+            <a:spLocks noGrp="1"/>
+          </p:cNvSpPr>
+          <p:nvPr>
+            <p:ph type="ftr" sz="quarter" idx="11"/>
+          </p:nvPr>
+        </p:nvSpPr>
+        <p:spPr/>
+        <p:txBody>
+          <a:bodyPr/>
+          <a:lstStyle/>
+          <a:p>
+            <a:r>
+              <a:rPr lang="en-US"/>
+              <a:t>© Steve Beaty and others as cited</a:t>
+            </a:r>
+          </a:p>
+        </p:txBody>
+      </p:sp>
+      <p:sp>
+        <p:nvSpPr>
+          <p:cNvPr id="6" name="Slide Number Placeholder 5">
+            <a:extLst>
+              <a:ext uri="{FF2B5EF4-FFF2-40B4-BE49-F238E27FC236}">
+                <a16:creationId xmlns:a16="http://schemas.microsoft.com/office/drawing/2014/main" id="{D061FAE5-905A-69D8-85B2-5278D32A2FBE}"/>
+              </a:ext>
+            </a:extLst>
+          </p:cNvPr>
+          <p:cNvSpPr>
+            <a:spLocks noGrp="1"/>
+          </p:cNvSpPr>
+          <p:nvPr>
+            <p:ph type="sldNum" sz="quarter" idx="12"/>
+          </p:nvPr>
+        </p:nvSpPr>
+        <p:spPr/>
+        <p:txBody>
+          <a:bodyPr/>
+          <a:lstStyle/>
+          <a:p>
+            <a:fld id="{8BADA5E7-275A-0142-8584-066D5199CC3B}" type="slidenum">
+              <a:rPr lang="en-US" smtClean="0"/>
+              <a:t>16</a:t>
+            </a:fld>
+            <a:endParaRPr lang="en-US"/>
           </a:p>
         </p:txBody>
       </p:sp>
@@ -4869,12 +4888,12 @@
   </p:clrMapOvr>
   <mc:AlternateContent xmlns:mc="http://schemas.openxmlformats.org/markup-compatibility/2006" xmlns:p14="http://schemas.microsoft.com/office/powerpoint/2010/main">
     <mc:Choice Requires="p14">
-      <p:transition spd="slow" p14:dur="1200">
-        <p14:prism/>
+      <p:transition spd="slow" p14:dur="2000">
+        <p14:prism isContent="1"/>
       </p:transition>
     </mc:Choice>
     <mc:Fallback xmlns="">
-      <p:transition xmlns:p14="http://schemas.microsoft.com/office/powerpoint/2010/main" spd="slow">
+      <p:transition spd="slow">
         <p:fade/>
       </p:transition>
     </mc:Fallback>
@@ -4917,7 +4936,9 @@
         </p:nvSpPr>
         <p:spPr/>
         <p:txBody>
-          <a:bodyPr/>
+          <a:bodyPr>
+            <a:normAutofit fontScale="90000"/>
+          </a:bodyPr>
           <a:lstStyle/>
           <a:p>
             <a:r>
@@ -4946,7 +4967,7 @@
         <p:spPr/>
         <p:txBody>
           <a:bodyPr>
-            <a:normAutofit fontScale="55000" lnSpcReduction="20000"/>
+            <a:normAutofit fontScale="47500" lnSpcReduction="20000"/>
           </a:bodyPr>
           <a:lstStyle/>
           <a:p>
@@ -5330,6 +5351,92 @@
               </a:rPr>
               <a:t>=&gt; [4, 5]</a:t>
             </a:r>
+          </a:p>
+        </p:txBody>
+      </p:sp>
+      <p:sp>
+        <p:nvSpPr>
+          <p:cNvPr id="2" name="Date Placeholder 1">
+            <a:extLst>
+              <a:ext uri="{FF2B5EF4-FFF2-40B4-BE49-F238E27FC236}">
+                <a16:creationId xmlns:a16="http://schemas.microsoft.com/office/drawing/2014/main" id="{2648CAFB-AF6D-6636-43DD-CD85548A5C5E}"/>
+              </a:ext>
+            </a:extLst>
+          </p:cNvPr>
+          <p:cNvSpPr>
+            <a:spLocks noGrp="1"/>
+          </p:cNvSpPr>
+          <p:nvPr>
+            <p:ph type="dt" sz="half" idx="10"/>
+          </p:nvPr>
+        </p:nvSpPr>
+        <p:spPr/>
+        <p:txBody>
+          <a:bodyPr/>
+          <a:lstStyle/>
+          <a:p>
+            <a:fld id="{83341451-21CD-F843-9A69-EE776739F145}" type="datetime1">
+              <a:rPr lang="en-US" smtClean="0"/>
+              <a:t>10/8/26</a:t>
+            </a:fld>
+            <a:endParaRPr lang="en-US"/>
+          </a:p>
+        </p:txBody>
+      </p:sp>
+      <p:sp>
+        <p:nvSpPr>
+          <p:cNvPr id="5" name="Footer Placeholder 4">
+            <a:extLst>
+              <a:ext uri="{FF2B5EF4-FFF2-40B4-BE49-F238E27FC236}">
+                <a16:creationId xmlns:a16="http://schemas.microsoft.com/office/drawing/2014/main" id="{817204CC-BC28-D5E8-9F79-D215D9DAB9B9}"/>
+              </a:ext>
+            </a:extLst>
+          </p:cNvPr>
+          <p:cNvSpPr>
+            <a:spLocks noGrp="1"/>
+          </p:cNvSpPr>
+          <p:nvPr>
+            <p:ph type="ftr" sz="quarter" idx="11"/>
+          </p:nvPr>
+        </p:nvSpPr>
+        <p:spPr/>
+        <p:txBody>
+          <a:bodyPr/>
+          <a:lstStyle/>
+          <a:p>
+            <a:r>
+              <a:rPr lang="en-US"/>
+              <a:t>© Steve Beaty and others as cited</a:t>
+            </a:r>
+          </a:p>
+        </p:txBody>
+      </p:sp>
+      <p:sp>
+        <p:nvSpPr>
+          <p:cNvPr id="6" name="Slide Number Placeholder 5">
+            <a:extLst>
+              <a:ext uri="{FF2B5EF4-FFF2-40B4-BE49-F238E27FC236}">
+                <a16:creationId xmlns:a16="http://schemas.microsoft.com/office/drawing/2014/main" id="{AB956CE2-D8EC-5885-F8AD-37CB9CA67374}"/>
+              </a:ext>
+            </a:extLst>
+          </p:cNvPr>
+          <p:cNvSpPr>
+            <a:spLocks noGrp="1"/>
+          </p:cNvSpPr>
+          <p:nvPr>
+            <p:ph type="sldNum" sz="quarter" idx="12"/>
+          </p:nvPr>
+        </p:nvSpPr>
+        <p:spPr/>
+        <p:txBody>
+          <a:bodyPr/>
+          <a:lstStyle/>
+          <a:p>
+            <a:fld id="{8BADA5E7-275A-0142-8584-066D5199CC3B}" type="slidenum">
+              <a:rPr lang="en-US" smtClean="0"/>
+              <a:t>17</a:t>
+            </a:fld>
+            <a:endParaRPr lang="en-US"/>
           </a:p>
         </p:txBody>
       </p:sp>
@@ -5393,7 +5500,9 @@
         </p:nvSpPr>
         <p:spPr/>
         <p:txBody>
-          <a:bodyPr/>
+          <a:bodyPr>
+            <a:normAutofit fontScale="90000"/>
+          </a:bodyPr>
           <a:lstStyle/>
           <a:p>
             <a:r>
@@ -5422,7 +5531,7 @@
         <p:spPr/>
         <p:txBody>
           <a:bodyPr>
-            <a:normAutofit fontScale="55000" lnSpcReduction="20000"/>
+            <a:normAutofit fontScale="47500" lnSpcReduction="20000"/>
           </a:bodyPr>
           <a:lstStyle/>
           <a:p>
@@ -5722,6 +5831,92 @@
               </a:rPr>
               <a:t>=&gt; [3, 4]</a:t>
             </a:r>
+          </a:p>
+        </p:txBody>
+      </p:sp>
+      <p:sp>
+        <p:nvSpPr>
+          <p:cNvPr id="4" name="Date Placeholder 3">
+            <a:extLst>
+              <a:ext uri="{FF2B5EF4-FFF2-40B4-BE49-F238E27FC236}">
+                <a16:creationId xmlns:a16="http://schemas.microsoft.com/office/drawing/2014/main" id="{E18C92E0-E802-8F3D-B88B-5E56457CB7AD}"/>
+              </a:ext>
+            </a:extLst>
+          </p:cNvPr>
+          <p:cNvSpPr>
+            <a:spLocks noGrp="1"/>
+          </p:cNvSpPr>
+          <p:nvPr>
+            <p:ph type="dt" sz="half" idx="10"/>
+          </p:nvPr>
+        </p:nvSpPr>
+        <p:spPr/>
+        <p:txBody>
+          <a:bodyPr/>
+          <a:lstStyle/>
+          <a:p>
+            <a:fld id="{C77EE822-FB14-3D4D-B33B-603A12083A33}" type="datetime1">
+              <a:rPr lang="en-US" smtClean="0"/>
+              <a:t>10/8/26</a:t>
+            </a:fld>
+            <a:endParaRPr lang="en-US"/>
+          </a:p>
+        </p:txBody>
+      </p:sp>
+      <p:sp>
+        <p:nvSpPr>
+          <p:cNvPr id="5" name="Footer Placeholder 4">
+            <a:extLst>
+              <a:ext uri="{FF2B5EF4-FFF2-40B4-BE49-F238E27FC236}">
+                <a16:creationId xmlns:a16="http://schemas.microsoft.com/office/drawing/2014/main" id="{7BDB3FEF-9CFA-DC66-7834-FC627EF7A77D}"/>
+              </a:ext>
+            </a:extLst>
+          </p:cNvPr>
+          <p:cNvSpPr>
+            <a:spLocks noGrp="1"/>
+          </p:cNvSpPr>
+          <p:nvPr>
+            <p:ph type="ftr" sz="quarter" idx="11"/>
+          </p:nvPr>
+        </p:nvSpPr>
+        <p:spPr/>
+        <p:txBody>
+          <a:bodyPr/>
+          <a:lstStyle/>
+          <a:p>
+            <a:r>
+              <a:rPr lang="en-US"/>
+              <a:t>© Steve Beaty and others as cited</a:t>
+            </a:r>
+          </a:p>
+        </p:txBody>
+      </p:sp>
+      <p:sp>
+        <p:nvSpPr>
+          <p:cNvPr id="6" name="Slide Number Placeholder 5">
+            <a:extLst>
+              <a:ext uri="{FF2B5EF4-FFF2-40B4-BE49-F238E27FC236}">
+                <a16:creationId xmlns:a16="http://schemas.microsoft.com/office/drawing/2014/main" id="{41BB10A7-DB94-C64F-6FAC-161F4122DA9D}"/>
+              </a:ext>
+            </a:extLst>
+          </p:cNvPr>
+          <p:cNvSpPr>
+            <a:spLocks noGrp="1"/>
+          </p:cNvSpPr>
+          <p:nvPr>
+            <p:ph type="sldNum" sz="quarter" idx="12"/>
+          </p:nvPr>
+        </p:nvSpPr>
+        <p:spPr/>
+        <p:txBody>
+          <a:bodyPr/>
+          <a:lstStyle/>
+          <a:p>
+            <a:fld id="{8BADA5E7-275A-0142-8584-066D5199CC3B}" type="slidenum">
+              <a:rPr lang="en-US" smtClean="0"/>
+              <a:t>18</a:t>
+            </a:fld>
+            <a:endParaRPr lang="en-US"/>
           </a:p>
         </p:txBody>
       </p:sp>
@@ -5735,6 +5930,18 @@
   <p:clrMapOvr>
     <a:masterClrMapping/>
   </p:clrMapOvr>
+  <mc:AlternateContent xmlns:mc="http://schemas.openxmlformats.org/markup-compatibility/2006" xmlns:p14="http://schemas.microsoft.com/office/powerpoint/2010/main">
+    <mc:Choice Requires="p14">
+      <p:transition spd="slow" p14:dur="2000">
+        <p14:prism isContent="1"/>
+      </p:transition>
+    </mc:Choice>
+    <mc:Fallback xmlns="">
+      <p:transition spd="slow">
+        <p:fade/>
+      </p:transition>
+    </mc:Fallback>
+  </mc:AlternateContent>
 </p:sld>
 </file>
 
@@ -5757,6 +5964,36 @@
       </p:grpSpPr>
       <p:sp>
         <p:nvSpPr>
+          <p:cNvPr id="2" name="Title 1">
+            <a:extLst>
+              <a:ext uri="{FF2B5EF4-FFF2-40B4-BE49-F238E27FC236}">
+                <a16:creationId xmlns:a16="http://schemas.microsoft.com/office/drawing/2014/main" id="{D6F2F5EC-6741-5A7C-9524-45E0F4A09EC5}"/>
+              </a:ext>
+            </a:extLst>
+          </p:cNvPr>
+          <p:cNvSpPr>
+            <a:spLocks noGrp="1"/>
+          </p:cNvSpPr>
+          <p:nvPr>
+            <p:ph type="title"/>
+          </p:nvPr>
+        </p:nvSpPr>
+        <p:spPr/>
+        <p:txBody>
+          <a:bodyPr>
+            <a:normAutofit fontScale="90000"/>
+          </a:bodyPr>
+          <a:lstStyle/>
+          <a:p>
+            <a:r>
+              <a:rPr lang="en-US" dirty="0"/>
+              <a:t>Symbols</a:t>
+            </a:r>
+          </a:p>
+        </p:txBody>
+      </p:sp>
+      <p:sp>
+        <p:nvSpPr>
           <p:cNvPr id="4" name="Content Placeholder 3">
             <a:extLst>
               <a:ext uri="{FF2B5EF4-FFF2-40B4-BE49-F238E27FC236}">
@@ -5774,7 +6011,7 @@
         <p:spPr/>
         <p:txBody>
           <a:bodyPr>
-            <a:normAutofit fontScale="77500" lnSpcReduction="20000"/>
+            <a:normAutofit fontScale="70000" lnSpcReduction="20000"/>
           </a:bodyPr>
           <a:lstStyle/>
           <a:p>
@@ -5866,29 +6103,87 @@
       </p:sp>
       <p:sp>
         <p:nvSpPr>
-          <p:cNvPr id="2" name="Title 1">
-            <a:extLst>
-              <a:ext uri="{FF2B5EF4-FFF2-40B4-BE49-F238E27FC236}">
-                <a16:creationId xmlns:a16="http://schemas.microsoft.com/office/drawing/2014/main" id="{D6F2F5EC-6741-5A7C-9524-45E0F4A09EC5}"/>
-              </a:ext>
-            </a:extLst>
-          </p:cNvPr>
-          <p:cNvSpPr>
-            <a:spLocks noGrp="1"/>
-          </p:cNvSpPr>
-          <p:nvPr>
-            <p:ph type="title"/>
-          </p:nvPr>
-        </p:nvSpPr>
-        <p:spPr/>
-        <p:txBody>
-          <a:bodyPr/>
-          <a:lstStyle/>
-          <a:p>
-            <a:r>
-              <a:rPr lang="en-US" dirty="0"/>
-              <a:t>Symbols</a:t>
-            </a:r>
+          <p:cNvPr id="3" name="Date Placeholder 2">
+            <a:extLst>
+              <a:ext uri="{FF2B5EF4-FFF2-40B4-BE49-F238E27FC236}">
+                <a16:creationId xmlns:a16="http://schemas.microsoft.com/office/drawing/2014/main" id="{44B6AD5E-E029-57B1-8456-F6720CD38517}"/>
+              </a:ext>
+            </a:extLst>
+          </p:cNvPr>
+          <p:cNvSpPr>
+            <a:spLocks noGrp="1"/>
+          </p:cNvSpPr>
+          <p:nvPr>
+            <p:ph type="dt" sz="half" idx="10"/>
+          </p:nvPr>
+        </p:nvSpPr>
+        <p:spPr/>
+        <p:txBody>
+          <a:bodyPr/>
+          <a:lstStyle/>
+          <a:p>
+            <a:fld id="{50086B79-4729-3B4F-8EEB-F32BF7EC7B79}" type="datetime1">
+              <a:rPr lang="en-US" smtClean="0"/>
+              <a:t>10/8/26</a:t>
+            </a:fld>
+            <a:endParaRPr lang="en-US"/>
+          </a:p>
+        </p:txBody>
+      </p:sp>
+      <p:sp>
+        <p:nvSpPr>
+          <p:cNvPr id="5" name="Footer Placeholder 4">
+            <a:extLst>
+              <a:ext uri="{FF2B5EF4-FFF2-40B4-BE49-F238E27FC236}">
+                <a16:creationId xmlns:a16="http://schemas.microsoft.com/office/drawing/2014/main" id="{E90EA29C-FD4C-BC37-B1CA-C1518614FDE7}"/>
+              </a:ext>
+            </a:extLst>
+          </p:cNvPr>
+          <p:cNvSpPr>
+            <a:spLocks noGrp="1"/>
+          </p:cNvSpPr>
+          <p:nvPr>
+            <p:ph type="ftr" sz="quarter" idx="11"/>
+          </p:nvPr>
+        </p:nvSpPr>
+        <p:spPr/>
+        <p:txBody>
+          <a:bodyPr/>
+          <a:lstStyle/>
+          <a:p>
+            <a:r>
+              <a:rPr lang="en-US"/>
+              <a:t>© Steve Beaty and others as cited</a:t>
+            </a:r>
+          </a:p>
+        </p:txBody>
+      </p:sp>
+      <p:sp>
+        <p:nvSpPr>
+          <p:cNvPr id="6" name="Slide Number Placeholder 5">
+            <a:extLst>
+              <a:ext uri="{FF2B5EF4-FFF2-40B4-BE49-F238E27FC236}">
+                <a16:creationId xmlns:a16="http://schemas.microsoft.com/office/drawing/2014/main" id="{72112074-CF3D-F242-4F59-7624A12FA191}"/>
+              </a:ext>
+            </a:extLst>
+          </p:cNvPr>
+          <p:cNvSpPr>
+            <a:spLocks noGrp="1"/>
+          </p:cNvSpPr>
+          <p:nvPr>
+            <p:ph type="sldNum" sz="quarter" idx="12"/>
+          </p:nvPr>
+        </p:nvSpPr>
+        <p:spPr/>
+        <p:txBody>
+          <a:bodyPr/>
+          <a:lstStyle/>
+          <a:p>
+            <a:fld id="{8BADA5E7-275A-0142-8584-066D5199CC3B}" type="slidenum">
+              <a:rPr lang="en-US" smtClean="0"/>
+              <a:t>19</a:t>
+            </a:fld>
+            <a:endParaRPr lang="en-US"/>
           </a:p>
         </p:txBody>
       </p:sp>
@@ -5904,12 +6199,12 @@
   </p:clrMapOvr>
   <mc:AlternateContent xmlns:mc="http://schemas.openxmlformats.org/markup-compatibility/2006" xmlns:p14="http://schemas.microsoft.com/office/powerpoint/2010/main">
     <mc:Choice Requires="p14">
-      <p:transition spd="slow" p14:dur="1200">
-        <p14:prism/>
+      <p:transition spd="slow" p14:dur="2000">
+        <p14:prism isContent="1"/>
       </p:transition>
     </mc:Choice>
     <mc:Fallback xmlns="">
-      <p:transition xmlns:p14="http://schemas.microsoft.com/office/powerpoint/2010/main" spd="slow">
+      <p:transition spd="slow">
         <p:fade/>
       </p:transition>
     </mc:Fallback>
@@ -5936,6 +6231,36 @@
       </p:grpSpPr>
       <p:sp>
         <p:nvSpPr>
+          <p:cNvPr id="3" name="Title 2">
+            <a:extLst>
+              <a:ext uri="{FF2B5EF4-FFF2-40B4-BE49-F238E27FC236}">
+                <a16:creationId xmlns:a16="http://schemas.microsoft.com/office/drawing/2014/main" id="{B47451E1-C097-EFD5-4D10-F7711BD22188}"/>
+              </a:ext>
+            </a:extLst>
+          </p:cNvPr>
+          <p:cNvSpPr>
+            <a:spLocks noGrp="1"/>
+          </p:cNvSpPr>
+          <p:nvPr>
+            <p:ph type="title"/>
+          </p:nvPr>
+        </p:nvSpPr>
+        <p:spPr/>
+        <p:txBody>
+          <a:bodyPr>
+            <a:normAutofit fontScale="90000"/>
+          </a:bodyPr>
+          <a:lstStyle/>
+          <a:p>
+            <a:r>
+              <a:rPr lang="en-US" dirty="0"/>
+              <a:t>Ruby</a:t>
+            </a:r>
+          </a:p>
+        </p:txBody>
+      </p:sp>
+      <p:sp>
+        <p:nvSpPr>
           <p:cNvPr id="2" name="Content Placeholder 1">
             <a:extLst>
               <a:ext uri="{FF2B5EF4-FFF2-40B4-BE49-F238E27FC236}">
@@ -5953,7 +6278,7 @@
         <p:spPr/>
         <p:txBody>
           <a:bodyPr>
-            <a:normAutofit fontScale="85000" lnSpcReduction="20000"/>
+            <a:normAutofit fontScale="77500" lnSpcReduction="20000"/>
           </a:bodyPr>
           <a:lstStyle/>
           <a:p>
@@ -5987,29 +6312,87 @@
       </p:sp>
       <p:sp>
         <p:nvSpPr>
-          <p:cNvPr id="3" name="Title 2">
-            <a:extLst>
-              <a:ext uri="{FF2B5EF4-FFF2-40B4-BE49-F238E27FC236}">
-                <a16:creationId xmlns:a16="http://schemas.microsoft.com/office/drawing/2014/main" id="{B47451E1-C097-EFD5-4D10-F7711BD22188}"/>
-              </a:ext>
-            </a:extLst>
-          </p:cNvPr>
-          <p:cNvSpPr>
-            <a:spLocks noGrp="1"/>
-          </p:cNvSpPr>
-          <p:nvPr>
-            <p:ph type="title"/>
-          </p:nvPr>
-        </p:nvSpPr>
-        <p:spPr/>
-        <p:txBody>
-          <a:bodyPr/>
-          <a:lstStyle/>
-          <a:p>
-            <a:r>
-              <a:rPr lang="en-US" dirty="0"/>
-              <a:t>Ruby</a:t>
-            </a:r>
+          <p:cNvPr id="4" name="Date Placeholder 3">
+            <a:extLst>
+              <a:ext uri="{FF2B5EF4-FFF2-40B4-BE49-F238E27FC236}">
+                <a16:creationId xmlns:a16="http://schemas.microsoft.com/office/drawing/2014/main" id="{431520BB-191A-905C-C331-A31FA0CFAD67}"/>
+              </a:ext>
+            </a:extLst>
+          </p:cNvPr>
+          <p:cNvSpPr>
+            <a:spLocks noGrp="1"/>
+          </p:cNvSpPr>
+          <p:nvPr>
+            <p:ph type="dt" sz="half" idx="10"/>
+          </p:nvPr>
+        </p:nvSpPr>
+        <p:spPr/>
+        <p:txBody>
+          <a:bodyPr/>
+          <a:lstStyle/>
+          <a:p>
+            <a:fld id="{FF1D3F73-77EE-7845-B76D-FA2F2F520AB3}" type="datetime1">
+              <a:rPr lang="en-US" smtClean="0"/>
+              <a:t>10/8/26</a:t>
+            </a:fld>
+            <a:endParaRPr lang="en-US"/>
+          </a:p>
+        </p:txBody>
+      </p:sp>
+      <p:sp>
+        <p:nvSpPr>
+          <p:cNvPr id="5" name="Footer Placeholder 4">
+            <a:extLst>
+              <a:ext uri="{FF2B5EF4-FFF2-40B4-BE49-F238E27FC236}">
+                <a16:creationId xmlns:a16="http://schemas.microsoft.com/office/drawing/2014/main" id="{E6C53FCC-020F-2733-EB65-55C465D7F9BE}"/>
+              </a:ext>
+            </a:extLst>
+          </p:cNvPr>
+          <p:cNvSpPr>
+            <a:spLocks noGrp="1"/>
+          </p:cNvSpPr>
+          <p:nvPr>
+            <p:ph type="ftr" sz="quarter" idx="11"/>
+          </p:nvPr>
+        </p:nvSpPr>
+        <p:spPr/>
+        <p:txBody>
+          <a:bodyPr/>
+          <a:lstStyle/>
+          <a:p>
+            <a:r>
+              <a:rPr lang="en-US"/>
+              <a:t>© Steve Beaty and others as cited</a:t>
+            </a:r>
+          </a:p>
+        </p:txBody>
+      </p:sp>
+      <p:sp>
+        <p:nvSpPr>
+          <p:cNvPr id="6" name="Slide Number Placeholder 5">
+            <a:extLst>
+              <a:ext uri="{FF2B5EF4-FFF2-40B4-BE49-F238E27FC236}">
+                <a16:creationId xmlns:a16="http://schemas.microsoft.com/office/drawing/2014/main" id="{D48D94A0-11FC-0F05-8890-5E559C41CA42}"/>
+              </a:ext>
+            </a:extLst>
+          </p:cNvPr>
+          <p:cNvSpPr>
+            <a:spLocks noGrp="1"/>
+          </p:cNvSpPr>
+          <p:nvPr>
+            <p:ph type="sldNum" sz="quarter" idx="12"/>
+          </p:nvPr>
+        </p:nvSpPr>
+        <p:spPr/>
+        <p:txBody>
+          <a:bodyPr/>
+          <a:lstStyle/>
+          <a:p>
+            <a:fld id="{8BADA5E7-275A-0142-8584-066D5199CC3B}" type="slidenum">
+              <a:rPr lang="en-US" smtClean="0"/>
+              <a:t>2</a:t>
+            </a:fld>
+            <a:endParaRPr lang="en-US"/>
           </a:p>
         </p:txBody>
       </p:sp>
@@ -6025,12 +6408,12 @@
   </p:clrMapOvr>
   <mc:AlternateContent xmlns:mc="http://schemas.openxmlformats.org/markup-compatibility/2006" xmlns:p14="http://schemas.microsoft.com/office/powerpoint/2010/main">
     <mc:Choice Requires="p14">
-      <p:transition spd="slow" p14:dur="1200">
-        <p14:prism/>
+      <p:transition spd="slow" p14:dur="2000">
+        <p14:prism isContent="1"/>
       </p:transition>
     </mc:Choice>
     <mc:Fallback xmlns="">
-      <p:transition xmlns:p14="http://schemas.microsoft.com/office/powerpoint/2010/main" spd="slow">
+      <p:transition spd="slow">
         <p:fade/>
       </p:transition>
     </mc:Fallback>
@@ -6057,6 +6440,36 @@
       </p:grpSpPr>
       <p:sp>
         <p:nvSpPr>
+          <p:cNvPr id="3" name="Title 2">
+            <a:extLst>
+              <a:ext uri="{FF2B5EF4-FFF2-40B4-BE49-F238E27FC236}">
+                <a16:creationId xmlns:a16="http://schemas.microsoft.com/office/drawing/2014/main" id="{C586F112-BE0C-D7F0-82F7-EB31F24839E2}"/>
+              </a:ext>
+            </a:extLst>
+          </p:cNvPr>
+          <p:cNvSpPr>
+            <a:spLocks noGrp="1"/>
+          </p:cNvSpPr>
+          <p:nvPr>
+            <p:ph type="title"/>
+          </p:nvPr>
+        </p:nvSpPr>
+        <p:spPr/>
+        <p:txBody>
+          <a:bodyPr>
+            <a:normAutofit fontScale="90000"/>
+          </a:bodyPr>
+          <a:lstStyle/>
+          <a:p>
+            <a:r>
+              <a:rPr lang="en-US" dirty="0"/>
+              <a:t>Hashes</a:t>
+            </a:r>
+          </a:p>
+        </p:txBody>
+      </p:sp>
+      <p:sp>
+        <p:nvSpPr>
           <p:cNvPr id="2" name="Content Placeholder 1">
             <a:extLst>
               <a:ext uri="{FF2B5EF4-FFF2-40B4-BE49-F238E27FC236}">
@@ -6074,7 +6487,7 @@
         <p:spPr/>
         <p:txBody>
           <a:bodyPr>
-            <a:normAutofit fontScale="85000" lnSpcReduction="10000"/>
+            <a:normAutofit fontScale="85000" lnSpcReduction="20000"/>
           </a:bodyPr>
           <a:lstStyle/>
           <a:p>
@@ -6131,31 +6544,87 @@
       </p:sp>
       <p:sp>
         <p:nvSpPr>
-          <p:cNvPr id="3" name="Title 2">
-            <a:extLst>
-              <a:ext uri="{FF2B5EF4-FFF2-40B4-BE49-F238E27FC236}">
-                <a16:creationId xmlns:a16="http://schemas.microsoft.com/office/drawing/2014/main" id="{C586F112-BE0C-D7F0-82F7-EB31F24839E2}"/>
-              </a:ext>
-            </a:extLst>
-          </p:cNvPr>
-          <p:cNvSpPr>
-            <a:spLocks noGrp="1"/>
-          </p:cNvSpPr>
-          <p:nvPr>
-            <p:ph type="title"/>
-          </p:nvPr>
-        </p:nvSpPr>
-        <p:spPr/>
-        <p:txBody>
-          <a:bodyPr>
-            <a:normAutofit/>
-          </a:bodyPr>
-          <a:lstStyle/>
-          <a:p>
-            <a:r>
-              <a:rPr lang="en-US" dirty="0"/>
-              <a:t>Hashes</a:t>
-            </a:r>
+          <p:cNvPr id="4" name="Date Placeholder 3">
+            <a:extLst>
+              <a:ext uri="{FF2B5EF4-FFF2-40B4-BE49-F238E27FC236}">
+                <a16:creationId xmlns:a16="http://schemas.microsoft.com/office/drawing/2014/main" id="{68701164-5B20-EDDF-8795-4FBE6F54706F}"/>
+              </a:ext>
+            </a:extLst>
+          </p:cNvPr>
+          <p:cNvSpPr>
+            <a:spLocks noGrp="1"/>
+          </p:cNvSpPr>
+          <p:nvPr>
+            <p:ph type="dt" sz="half" idx="10"/>
+          </p:nvPr>
+        </p:nvSpPr>
+        <p:spPr/>
+        <p:txBody>
+          <a:bodyPr/>
+          <a:lstStyle/>
+          <a:p>
+            <a:fld id="{2D21BFE8-2434-4D43-AA2A-4ABAC399C5D5}" type="datetime1">
+              <a:rPr lang="en-US" smtClean="0"/>
+              <a:t>10/8/26</a:t>
+            </a:fld>
+            <a:endParaRPr lang="en-US"/>
+          </a:p>
+        </p:txBody>
+      </p:sp>
+      <p:sp>
+        <p:nvSpPr>
+          <p:cNvPr id="5" name="Footer Placeholder 4">
+            <a:extLst>
+              <a:ext uri="{FF2B5EF4-FFF2-40B4-BE49-F238E27FC236}">
+                <a16:creationId xmlns:a16="http://schemas.microsoft.com/office/drawing/2014/main" id="{AF7BFA73-5524-DEF7-C6CD-6A5D3A03F5AD}"/>
+              </a:ext>
+            </a:extLst>
+          </p:cNvPr>
+          <p:cNvSpPr>
+            <a:spLocks noGrp="1"/>
+          </p:cNvSpPr>
+          <p:nvPr>
+            <p:ph type="ftr" sz="quarter" idx="11"/>
+          </p:nvPr>
+        </p:nvSpPr>
+        <p:spPr/>
+        <p:txBody>
+          <a:bodyPr/>
+          <a:lstStyle/>
+          <a:p>
+            <a:r>
+              <a:rPr lang="en-US"/>
+              <a:t>© Steve Beaty and others as cited</a:t>
+            </a:r>
+          </a:p>
+        </p:txBody>
+      </p:sp>
+      <p:sp>
+        <p:nvSpPr>
+          <p:cNvPr id="6" name="Slide Number Placeholder 5">
+            <a:extLst>
+              <a:ext uri="{FF2B5EF4-FFF2-40B4-BE49-F238E27FC236}">
+                <a16:creationId xmlns:a16="http://schemas.microsoft.com/office/drawing/2014/main" id="{5DECDFB3-FB0D-F03E-DB8B-4DF72B2E7F99}"/>
+              </a:ext>
+            </a:extLst>
+          </p:cNvPr>
+          <p:cNvSpPr>
+            <a:spLocks noGrp="1"/>
+          </p:cNvSpPr>
+          <p:nvPr>
+            <p:ph type="sldNum" sz="quarter" idx="12"/>
+          </p:nvPr>
+        </p:nvSpPr>
+        <p:spPr/>
+        <p:txBody>
+          <a:bodyPr/>
+          <a:lstStyle/>
+          <a:p>
+            <a:fld id="{8BADA5E7-275A-0142-8584-066D5199CC3B}" type="slidenum">
+              <a:rPr lang="en-US" smtClean="0"/>
+              <a:t>20</a:t>
+            </a:fld>
+            <a:endParaRPr lang="en-US"/>
           </a:p>
         </p:txBody>
       </p:sp>
@@ -6171,12 +6640,12 @@
   </p:clrMapOvr>
   <mc:AlternateContent xmlns:mc="http://schemas.openxmlformats.org/markup-compatibility/2006" xmlns:p14="http://schemas.microsoft.com/office/powerpoint/2010/main">
     <mc:Choice Requires="p14">
-      <p:transition spd="slow" p14:dur="1200">
-        <p14:prism/>
+      <p:transition spd="slow" p14:dur="2000">
+        <p14:prism isContent="1"/>
       </p:transition>
     </mc:Choice>
     <mc:Fallback xmlns="">
-      <p:transition xmlns:p14="http://schemas.microsoft.com/office/powerpoint/2010/main" spd="slow">
+      <p:transition spd="slow">
         <p:fade/>
       </p:transition>
     </mc:Fallback>
@@ -6220,7 +6689,7 @@
         <p:spPr/>
         <p:txBody>
           <a:bodyPr>
-            <a:normAutofit/>
+            <a:normAutofit fontScale="90000"/>
           </a:bodyPr>
           <a:lstStyle/>
           <a:p>
@@ -6250,7 +6719,7 @@
         <p:spPr/>
         <p:txBody>
           <a:bodyPr>
-            <a:normAutofit fontScale="62500" lnSpcReduction="20000"/>
+            <a:normAutofit fontScale="55000" lnSpcReduction="20000"/>
           </a:bodyPr>
           <a:lstStyle/>
           <a:p>
@@ -6535,6 +7004,92 @@
                 <a:schemeClr val="accent3"/>
               </a:solidFill>
             </a:endParaRPr>
+          </a:p>
+        </p:txBody>
+      </p:sp>
+      <p:sp>
+        <p:nvSpPr>
+          <p:cNvPr id="5" name="Date Placeholder 4">
+            <a:extLst>
+              <a:ext uri="{FF2B5EF4-FFF2-40B4-BE49-F238E27FC236}">
+                <a16:creationId xmlns:a16="http://schemas.microsoft.com/office/drawing/2014/main" id="{CCE16B23-7655-D7B5-8CB0-00456B710B9F}"/>
+              </a:ext>
+            </a:extLst>
+          </p:cNvPr>
+          <p:cNvSpPr>
+            <a:spLocks noGrp="1"/>
+          </p:cNvSpPr>
+          <p:nvPr>
+            <p:ph type="dt" sz="half" idx="14"/>
+          </p:nvPr>
+        </p:nvSpPr>
+        <p:spPr/>
+        <p:txBody>
+          <a:bodyPr/>
+          <a:lstStyle/>
+          <a:p>
+            <a:fld id="{C3A46827-D2EF-0942-82CF-CBC0998C85E5}" type="datetime1">
+              <a:rPr lang="en-US" smtClean="0"/>
+              <a:t>10/8/26</a:t>
+            </a:fld>
+            <a:endParaRPr lang="en-US"/>
+          </a:p>
+        </p:txBody>
+      </p:sp>
+      <p:sp>
+        <p:nvSpPr>
+          <p:cNvPr id="6" name="Footer Placeholder 5">
+            <a:extLst>
+              <a:ext uri="{FF2B5EF4-FFF2-40B4-BE49-F238E27FC236}">
+                <a16:creationId xmlns:a16="http://schemas.microsoft.com/office/drawing/2014/main" id="{42AA5874-A453-CDED-99C0-796E5795AF0F}"/>
+              </a:ext>
+            </a:extLst>
+          </p:cNvPr>
+          <p:cNvSpPr>
+            <a:spLocks noGrp="1"/>
+          </p:cNvSpPr>
+          <p:nvPr>
+            <p:ph type="ftr" sz="quarter" idx="15"/>
+          </p:nvPr>
+        </p:nvSpPr>
+        <p:spPr/>
+        <p:txBody>
+          <a:bodyPr/>
+          <a:lstStyle/>
+          <a:p>
+            <a:r>
+              <a:rPr lang="en-US"/>
+              <a:t>© Steve Beaty and others as cited</a:t>
+            </a:r>
+          </a:p>
+        </p:txBody>
+      </p:sp>
+      <p:sp>
+        <p:nvSpPr>
+          <p:cNvPr id="7" name="Slide Number Placeholder 6">
+            <a:extLst>
+              <a:ext uri="{FF2B5EF4-FFF2-40B4-BE49-F238E27FC236}">
+                <a16:creationId xmlns:a16="http://schemas.microsoft.com/office/drawing/2014/main" id="{E1409372-A24E-F47F-206B-90E5BD65AA64}"/>
+              </a:ext>
+            </a:extLst>
+          </p:cNvPr>
+          <p:cNvSpPr>
+            <a:spLocks noGrp="1"/>
+          </p:cNvSpPr>
+          <p:nvPr>
+            <p:ph type="sldNum" sz="quarter" idx="16"/>
+          </p:nvPr>
+        </p:nvSpPr>
+        <p:spPr/>
+        <p:txBody>
+          <a:bodyPr/>
+          <a:lstStyle/>
+          <a:p>
+            <a:fld id="{8BADA5E7-275A-0142-8584-066D5199CC3B}" type="slidenum">
+              <a:rPr lang="en-US" smtClean="0"/>
+              <a:t>21</a:t>
+            </a:fld>
+            <a:endParaRPr lang="en-US"/>
           </a:p>
         </p:txBody>
       </p:sp>
@@ -6608,6 +7163,92 @@
           </a:p>
         </p:txBody>
       </p:sp>
+      <p:sp>
+        <p:nvSpPr>
+          <p:cNvPr id="2" name="Date Placeholder 1">
+            <a:extLst>
+              <a:ext uri="{FF2B5EF4-FFF2-40B4-BE49-F238E27FC236}">
+                <a16:creationId xmlns:a16="http://schemas.microsoft.com/office/drawing/2014/main" id="{B2D6DC76-E4B6-6454-04C2-BD44605C097D}"/>
+              </a:ext>
+            </a:extLst>
+          </p:cNvPr>
+          <p:cNvSpPr>
+            <a:spLocks noGrp="1"/>
+          </p:cNvSpPr>
+          <p:nvPr>
+            <p:ph type="dt" sz="half" idx="10"/>
+          </p:nvPr>
+        </p:nvSpPr>
+        <p:spPr/>
+        <p:txBody>
+          <a:bodyPr/>
+          <a:lstStyle/>
+          <a:p>
+            <a:fld id="{9205AF53-41E2-F54B-A553-3E3CE88D26C0}" type="datetime1">
+              <a:rPr lang="en-US" smtClean="0"/>
+              <a:t>10/8/26</a:t>
+            </a:fld>
+            <a:endParaRPr lang="en-US"/>
+          </a:p>
+        </p:txBody>
+      </p:sp>
+      <p:sp>
+        <p:nvSpPr>
+          <p:cNvPr id="3" name="Footer Placeholder 2">
+            <a:extLst>
+              <a:ext uri="{FF2B5EF4-FFF2-40B4-BE49-F238E27FC236}">
+                <a16:creationId xmlns:a16="http://schemas.microsoft.com/office/drawing/2014/main" id="{4C4E09AA-CB24-EA40-4DCC-4BD7AEEF2336}"/>
+              </a:ext>
+            </a:extLst>
+          </p:cNvPr>
+          <p:cNvSpPr>
+            <a:spLocks noGrp="1"/>
+          </p:cNvSpPr>
+          <p:nvPr>
+            <p:ph type="ftr" sz="quarter" idx="11"/>
+          </p:nvPr>
+        </p:nvSpPr>
+        <p:spPr/>
+        <p:txBody>
+          <a:bodyPr/>
+          <a:lstStyle/>
+          <a:p>
+            <a:r>
+              <a:rPr lang="en-US"/>
+              <a:t>© Steve Beaty and others as cited</a:t>
+            </a:r>
+          </a:p>
+        </p:txBody>
+      </p:sp>
+      <p:sp>
+        <p:nvSpPr>
+          <p:cNvPr id="4" name="Slide Number Placeholder 3">
+            <a:extLst>
+              <a:ext uri="{FF2B5EF4-FFF2-40B4-BE49-F238E27FC236}">
+                <a16:creationId xmlns:a16="http://schemas.microsoft.com/office/drawing/2014/main" id="{907231FE-282B-025D-9F77-8F8DC0570A33}"/>
+              </a:ext>
+            </a:extLst>
+          </p:cNvPr>
+          <p:cNvSpPr>
+            <a:spLocks noGrp="1"/>
+          </p:cNvSpPr>
+          <p:nvPr>
+            <p:ph type="sldNum" sz="quarter" idx="12"/>
+          </p:nvPr>
+        </p:nvSpPr>
+        <p:spPr/>
+        <p:txBody>
+          <a:bodyPr/>
+          <a:lstStyle/>
+          <a:p>
+            <a:fld id="{8BADA5E7-275A-0142-8584-066D5199CC3B}" type="slidenum">
+              <a:rPr lang="en-US" smtClean="0"/>
+              <a:t>22</a:t>
+            </a:fld>
+            <a:endParaRPr lang="en-US"/>
+          </a:p>
+        </p:txBody>
+      </p:sp>
     </p:spTree>
     <p:extLst>
       <p:ext uri="{BB962C8B-B14F-4D97-AF65-F5344CB8AC3E}">
@@ -6640,6 +7281,36 @@
       </p:grpSpPr>
       <p:sp>
         <p:nvSpPr>
+          <p:cNvPr id="3" name="Title 2">
+            <a:extLst>
+              <a:ext uri="{FF2B5EF4-FFF2-40B4-BE49-F238E27FC236}">
+                <a16:creationId xmlns:a16="http://schemas.microsoft.com/office/drawing/2014/main" id="{C36A2935-2BFC-01AC-9746-9703492DF663}"/>
+              </a:ext>
+            </a:extLst>
+          </p:cNvPr>
+          <p:cNvSpPr>
+            <a:spLocks noGrp="1"/>
+          </p:cNvSpPr>
+          <p:nvPr>
+            <p:ph type="title"/>
+          </p:nvPr>
+        </p:nvSpPr>
+        <p:spPr/>
+        <p:txBody>
+          <a:bodyPr>
+            <a:normAutofit fontScale="90000"/>
+          </a:bodyPr>
+          <a:lstStyle/>
+          <a:p>
+            <a:r>
+              <a:rPr lang="en-US" dirty="0"/>
+              <a:t>The E: Encapsulation</a:t>
+            </a:r>
+          </a:p>
+        </p:txBody>
+      </p:sp>
+      <p:sp>
+        <p:nvSpPr>
           <p:cNvPr id="4" name="Content Placeholder 3">
             <a:extLst>
               <a:ext uri="{FF2B5EF4-FFF2-40B4-BE49-F238E27FC236}">
@@ -6657,7 +7328,7 @@
         <p:spPr/>
         <p:txBody>
           <a:bodyPr>
-            <a:normAutofit fontScale="92500" lnSpcReduction="20000"/>
+            <a:normAutofit fontScale="85000" lnSpcReduction="20000"/>
           </a:bodyPr>
           <a:lstStyle/>
           <a:p>
@@ -6721,31 +7392,87 @@
       </p:sp>
       <p:sp>
         <p:nvSpPr>
-          <p:cNvPr id="3" name="Title 2">
-            <a:extLst>
-              <a:ext uri="{FF2B5EF4-FFF2-40B4-BE49-F238E27FC236}">
-                <a16:creationId xmlns:a16="http://schemas.microsoft.com/office/drawing/2014/main" id="{C36A2935-2BFC-01AC-9746-9703492DF663}"/>
-              </a:ext>
-            </a:extLst>
-          </p:cNvPr>
-          <p:cNvSpPr>
-            <a:spLocks noGrp="1"/>
-          </p:cNvSpPr>
-          <p:nvPr>
-            <p:ph type="title"/>
-          </p:nvPr>
-        </p:nvSpPr>
-        <p:spPr/>
-        <p:txBody>
-          <a:bodyPr>
-            <a:normAutofit/>
-          </a:bodyPr>
-          <a:lstStyle/>
-          <a:p>
-            <a:r>
-              <a:rPr lang="en-US" dirty="0"/>
-              <a:t>The E: Encapsulation</a:t>
-            </a:r>
+          <p:cNvPr id="2" name="Date Placeholder 1">
+            <a:extLst>
+              <a:ext uri="{FF2B5EF4-FFF2-40B4-BE49-F238E27FC236}">
+                <a16:creationId xmlns:a16="http://schemas.microsoft.com/office/drawing/2014/main" id="{68A10AD6-43B9-5CE7-FF37-8CFE59E2805B}"/>
+              </a:ext>
+            </a:extLst>
+          </p:cNvPr>
+          <p:cNvSpPr>
+            <a:spLocks noGrp="1"/>
+          </p:cNvSpPr>
+          <p:nvPr>
+            <p:ph type="dt" sz="half" idx="10"/>
+          </p:nvPr>
+        </p:nvSpPr>
+        <p:spPr/>
+        <p:txBody>
+          <a:bodyPr/>
+          <a:lstStyle/>
+          <a:p>
+            <a:fld id="{46DCD93D-57BC-7444-8CC7-FBF3F7381B35}" type="datetime1">
+              <a:rPr lang="en-US" smtClean="0"/>
+              <a:t>10/8/26</a:t>
+            </a:fld>
+            <a:endParaRPr lang="en-US"/>
+          </a:p>
+        </p:txBody>
+      </p:sp>
+      <p:sp>
+        <p:nvSpPr>
+          <p:cNvPr id="5" name="Footer Placeholder 4">
+            <a:extLst>
+              <a:ext uri="{FF2B5EF4-FFF2-40B4-BE49-F238E27FC236}">
+                <a16:creationId xmlns:a16="http://schemas.microsoft.com/office/drawing/2014/main" id="{3FFF8FB1-C076-3873-B675-BE33C14CB724}"/>
+              </a:ext>
+            </a:extLst>
+          </p:cNvPr>
+          <p:cNvSpPr>
+            <a:spLocks noGrp="1"/>
+          </p:cNvSpPr>
+          <p:nvPr>
+            <p:ph type="ftr" sz="quarter" idx="11"/>
+          </p:nvPr>
+        </p:nvSpPr>
+        <p:spPr/>
+        <p:txBody>
+          <a:bodyPr/>
+          <a:lstStyle/>
+          <a:p>
+            <a:r>
+              <a:rPr lang="en-US"/>
+              <a:t>© Steve Beaty and others as cited</a:t>
+            </a:r>
+          </a:p>
+        </p:txBody>
+      </p:sp>
+      <p:sp>
+        <p:nvSpPr>
+          <p:cNvPr id="6" name="Slide Number Placeholder 5">
+            <a:extLst>
+              <a:ext uri="{FF2B5EF4-FFF2-40B4-BE49-F238E27FC236}">
+                <a16:creationId xmlns:a16="http://schemas.microsoft.com/office/drawing/2014/main" id="{4ABE605A-931E-7704-C90D-BDACEDC334E2}"/>
+              </a:ext>
+            </a:extLst>
+          </p:cNvPr>
+          <p:cNvSpPr>
+            <a:spLocks noGrp="1"/>
+          </p:cNvSpPr>
+          <p:nvPr>
+            <p:ph type="sldNum" sz="quarter" idx="12"/>
+          </p:nvPr>
+        </p:nvSpPr>
+        <p:spPr/>
+        <p:txBody>
+          <a:bodyPr/>
+          <a:lstStyle/>
+          <a:p>
+            <a:fld id="{8BADA5E7-275A-0142-8584-066D5199CC3B}" type="slidenum">
+              <a:rPr lang="en-US" smtClean="0"/>
+              <a:t>23</a:t>
+            </a:fld>
+            <a:endParaRPr lang="en-US"/>
           </a:p>
         </p:txBody>
       </p:sp>
@@ -6761,12 +7488,12 @@
   </p:clrMapOvr>
   <mc:AlternateContent xmlns:mc="http://schemas.openxmlformats.org/markup-compatibility/2006" xmlns:p14="http://schemas.microsoft.com/office/powerpoint/2010/main">
     <mc:Choice Requires="p14">
-      <p:transition spd="slow" p14:dur="1200">
-        <p14:prism/>
+      <p:transition spd="slow" p14:dur="2000">
+        <p14:prism isContent="1"/>
       </p:transition>
     </mc:Choice>
     <mc:Fallback xmlns="">
-      <p:transition xmlns:p14="http://schemas.microsoft.com/office/powerpoint/2010/main" spd="slow">
+      <p:transition spd="slow">
         <p:fade/>
       </p:transition>
     </mc:Fallback>
@@ -6793,6 +7520,36 @@
       </p:grpSpPr>
       <p:sp>
         <p:nvSpPr>
+          <p:cNvPr id="3" name="Title 2">
+            <a:extLst>
+              <a:ext uri="{FF2B5EF4-FFF2-40B4-BE49-F238E27FC236}">
+                <a16:creationId xmlns:a16="http://schemas.microsoft.com/office/drawing/2014/main" id="{B020A875-E2C3-C0BF-30CF-619B2791AF4E}"/>
+              </a:ext>
+            </a:extLst>
+          </p:cNvPr>
+          <p:cNvSpPr>
+            <a:spLocks noGrp="1"/>
+          </p:cNvSpPr>
+          <p:nvPr>
+            <p:ph type="title"/>
+          </p:nvPr>
+        </p:nvSpPr>
+        <p:spPr/>
+        <p:txBody>
+          <a:bodyPr>
+            <a:normAutofit fontScale="90000"/>
+          </a:bodyPr>
+          <a:lstStyle/>
+          <a:p>
+            <a:r>
+              <a:rPr lang="en-US" dirty="0"/>
+              <a:t>Why Encapsulate?</a:t>
+            </a:r>
+          </a:p>
+        </p:txBody>
+      </p:sp>
+      <p:sp>
+        <p:nvSpPr>
           <p:cNvPr id="2" name="Content Placeholder 1">
             <a:extLst>
               <a:ext uri="{FF2B5EF4-FFF2-40B4-BE49-F238E27FC236}">
@@ -6810,7 +7567,7 @@
         <p:spPr/>
         <p:txBody>
           <a:bodyPr>
-            <a:normAutofit fontScale="92500" lnSpcReduction="10000"/>
+            <a:normAutofit fontScale="85000" lnSpcReduction="10000"/>
           </a:bodyPr>
           <a:lstStyle/>
           <a:p>
@@ -6867,31 +7624,87 @@
       </p:sp>
       <p:sp>
         <p:nvSpPr>
-          <p:cNvPr id="3" name="Title 2">
-            <a:extLst>
-              <a:ext uri="{FF2B5EF4-FFF2-40B4-BE49-F238E27FC236}">
-                <a16:creationId xmlns:a16="http://schemas.microsoft.com/office/drawing/2014/main" id="{B020A875-E2C3-C0BF-30CF-619B2791AF4E}"/>
-              </a:ext>
-            </a:extLst>
-          </p:cNvPr>
-          <p:cNvSpPr>
-            <a:spLocks noGrp="1"/>
-          </p:cNvSpPr>
-          <p:nvPr>
-            <p:ph type="title"/>
-          </p:nvPr>
-        </p:nvSpPr>
-        <p:spPr/>
-        <p:txBody>
-          <a:bodyPr>
-            <a:normAutofit/>
-          </a:bodyPr>
-          <a:lstStyle/>
-          <a:p>
-            <a:r>
-              <a:rPr lang="en-US" dirty="0"/>
-              <a:t>Why Encapsulate?</a:t>
-            </a:r>
+          <p:cNvPr id="4" name="Date Placeholder 3">
+            <a:extLst>
+              <a:ext uri="{FF2B5EF4-FFF2-40B4-BE49-F238E27FC236}">
+                <a16:creationId xmlns:a16="http://schemas.microsoft.com/office/drawing/2014/main" id="{7EFE5628-D1D9-2440-FAB5-284950F3870C}"/>
+              </a:ext>
+            </a:extLst>
+          </p:cNvPr>
+          <p:cNvSpPr>
+            <a:spLocks noGrp="1"/>
+          </p:cNvSpPr>
+          <p:nvPr>
+            <p:ph type="dt" sz="half" idx="10"/>
+          </p:nvPr>
+        </p:nvSpPr>
+        <p:spPr/>
+        <p:txBody>
+          <a:bodyPr/>
+          <a:lstStyle/>
+          <a:p>
+            <a:fld id="{4D8BB9C5-B2F6-BC44-B52E-FD95C94F59F4}" type="datetime1">
+              <a:rPr lang="en-US" smtClean="0"/>
+              <a:t>10/8/26</a:t>
+            </a:fld>
+            <a:endParaRPr lang="en-US"/>
+          </a:p>
+        </p:txBody>
+      </p:sp>
+      <p:sp>
+        <p:nvSpPr>
+          <p:cNvPr id="5" name="Footer Placeholder 4">
+            <a:extLst>
+              <a:ext uri="{FF2B5EF4-FFF2-40B4-BE49-F238E27FC236}">
+                <a16:creationId xmlns:a16="http://schemas.microsoft.com/office/drawing/2014/main" id="{C77969E1-7BFC-263B-09FE-C1480DED0417}"/>
+              </a:ext>
+            </a:extLst>
+          </p:cNvPr>
+          <p:cNvSpPr>
+            <a:spLocks noGrp="1"/>
+          </p:cNvSpPr>
+          <p:nvPr>
+            <p:ph type="ftr" sz="quarter" idx="11"/>
+          </p:nvPr>
+        </p:nvSpPr>
+        <p:spPr/>
+        <p:txBody>
+          <a:bodyPr/>
+          <a:lstStyle/>
+          <a:p>
+            <a:r>
+              <a:rPr lang="en-US"/>
+              <a:t>© Steve Beaty and others as cited</a:t>
+            </a:r>
+          </a:p>
+        </p:txBody>
+      </p:sp>
+      <p:sp>
+        <p:nvSpPr>
+          <p:cNvPr id="6" name="Slide Number Placeholder 5">
+            <a:extLst>
+              <a:ext uri="{FF2B5EF4-FFF2-40B4-BE49-F238E27FC236}">
+                <a16:creationId xmlns:a16="http://schemas.microsoft.com/office/drawing/2014/main" id="{3E6716A1-F457-98B8-8F80-67AED1023F23}"/>
+              </a:ext>
+            </a:extLst>
+          </p:cNvPr>
+          <p:cNvSpPr>
+            <a:spLocks noGrp="1"/>
+          </p:cNvSpPr>
+          <p:nvPr>
+            <p:ph type="sldNum" sz="quarter" idx="12"/>
+          </p:nvPr>
+        </p:nvSpPr>
+        <p:spPr/>
+        <p:txBody>
+          <a:bodyPr/>
+          <a:lstStyle/>
+          <a:p>
+            <a:fld id="{8BADA5E7-275A-0142-8584-066D5199CC3B}" type="slidenum">
+              <a:rPr lang="en-US" smtClean="0"/>
+              <a:t>24</a:t>
+            </a:fld>
+            <a:endParaRPr lang="en-US"/>
           </a:p>
         </p:txBody>
       </p:sp>
@@ -6907,12 +7720,12 @@
   </p:clrMapOvr>
   <mc:AlternateContent xmlns:mc="http://schemas.openxmlformats.org/markup-compatibility/2006" xmlns:p14="http://schemas.microsoft.com/office/powerpoint/2010/main">
     <mc:Choice Requires="p14">
-      <p:transition spd="slow" p14:dur="1200">
-        <p14:prism/>
+      <p:transition spd="slow" p14:dur="2000">
+        <p14:prism isContent="1"/>
       </p:transition>
     </mc:Choice>
     <mc:Fallback xmlns="">
-      <p:transition xmlns:p14="http://schemas.microsoft.com/office/powerpoint/2010/main" spd="slow">
+      <p:transition spd="slow">
         <p:fade/>
       </p:transition>
     </mc:Fallback>
@@ -6939,6 +7752,36 @@
       </p:grpSpPr>
       <p:sp>
         <p:nvSpPr>
+          <p:cNvPr id="3" name="Title 2">
+            <a:extLst>
+              <a:ext uri="{FF2B5EF4-FFF2-40B4-BE49-F238E27FC236}">
+                <a16:creationId xmlns:a16="http://schemas.microsoft.com/office/drawing/2014/main" id="{371DA4D2-36AC-11FC-50A4-4B04DA2342A1}"/>
+              </a:ext>
+            </a:extLst>
+          </p:cNvPr>
+          <p:cNvSpPr>
+            <a:spLocks noGrp="1"/>
+          </p:cNvSpPr>
+          <p:nvPr>
+            <p:ph type="title"/>
+          </p:nvPr>
+        </p:nvSpPr>
+        <p:spPr/>
+        <p:txBody>
+          <a:bodyPr>
+            <a:normAutofit fontScale="90000"/>
+          </a:bodyPr>
+          <a:lstStyle/>
+          <a:p>
+            <a:r>
+              <a:rPr lang="en-US" dirty="0"/>
+              <a:t>Encapsulation Guidelines</a:t>
+            </a:r>
+          </a:p>
+        </p:txBody>
+      </p:sp>
+      <p:sp>
+        <p:nvSpPr>
           <p:cNvPr id="2" name="Content Placeholder 1">
             <a:extLst>
               <a:ext uri="{FF2B5EF4-FFF2-40B4-BE49-F238E27FC236}">
@@ -6956,7 +7799,7 @@
         <p:spPr/>
         <p:txBody>
           <a:bodyPr>
-            <a:normAutofit fontScale="92500" lnSpcReduction="10000"/>
+            <a:normAutofit fontScale="92500" lnSpcReduction="20000"/>
           </a:bodyPr>
           <a:lstStyle/>
           <a:p>
@@ -7006,31 +7849,87 @@
       </p:sp>
       <p:sp>
         <p:nvSpPr>
-          <p:cNvPr id="3" name="Title 2">
-            <a:extLst>
-              <a:ext uri="{FF2B5EF4-FFF2-40B4-BE49-F238E27FC236}">
-                <a16:creationId xmlns:a16="http://schemas.microsoft.com/office/drawing/2014/main" id="{371DA4D2-36AC-11FC-50A4-4B04DA2342A1}"/>
-              </a:ext>
-            </a:extLst>
-          </p:cNvPr>
-          <p:cNvSpPr>
-            <a:spLocks noGrp="1"/>
-          </p:cNvSpPr>
-          <p:nvPr>
-            <p:ph type="title"/>
-          </p:nvPr>
-        </p:nvSpPr>
-        <p:spPr/>
-        <p:txBody>
-          <a:bodyPr>
-            <a:normAutofit/>
-          </a:bodyPr>
-          <a:lstStyle/>
-          <a:p>
-            <a:r>
-              <a:rPr lang="en-US" dirty="0"/>
-              <a:t>Encapsulation Guidelines</a:t>
-            </a:r>
+          <p:cNvPr id="4" name="Date Placeholder 3">
+            <a:extLst>
+              <a:ext uri="{FF2B5EF4-FFF2-40B4-BE49-F238E27FC236}">
+                <a16:creationId xmlns:a16="http://schemas.microsoft.com/office/drawing/2014/main" id="{2738F582-AF09-D876-5C04-DD2979758D04}"/>
+              </a:ext>
+            </a:extLst>
+          </p:cNvPr>
+          <p:cNvSpPr>
+            <a:spLocks noGrp="1"/>
+          </p:cNvSpPr>
+          <p:nvPr>
+            <p:ph type="dt" sz="half" idx="10"/>
+          </p:nvPr>
+        </p:nvSpPr>
+        <p:spPr/>
+        <p:txBody>
+          <a:bodyPr/>
+          <a:lstStyle/>
+          <a:p>
+            <a:fld id="{5C515F7E-EA99-8F4C-91D7-E7730CD2B797}" type="datetime1">
+              <a:rPr lang="en-US" smtClean="0"/>
+              <a:t>10/8/26</a:t>
+            </a:fld>
+            <a:endParaRPr lang="en-US"/>
+          </a:p>
+        </p:txBody>
+      </p:sp>
+      <p:sp>
+        <p:nvSpPr>
+          <p:cNvPr id="5" name="Footer Placeholder 4">
+            <a:extLst>
+              <a:ext uri="{FF2B5EF4-FFF2-40B4-BE49-F238E27FC236}">
+                <a16:creationId xmlns:a16="http://schemas.microsoft.com/office/drawing/2014/main" id="{9AB6874C-8D09-A393-40A3-3B1CDA350177}"/>
+              </a:ext>
+            </a:extLst>
+          </p:cNvPr>
+          <p:cNvSpPr>
+            <a:spLocks noGrp="1"/>
+          </p:cNvSpPr>
+          <p:nvPr>
+            <p:ph type="ftr" sz="quarter" idx="11"/>
+          </p:nvPr>
+        </p:nvSpPr>
+        <p:spPr/>
+        <p:txBody>
+          <a:bodyPr/>
+          <a:lstStyle/>
+          <a:p>
+            <a:r>
+              <a:rPr lang="en-US"/>
+              <a:t>© Steve Beaty and others as cited</a:t>
+            </a:r>
+          </a:p>
+        </p:txBody>
+      </p:sp>
+      <p:sp>
+        <p:nvSpPr>
+          <p:cNvPr id="6" name="Slide Number Placeholder 5">
+            <a:extLst>
+              <a:ext uri="{FF2B5EF4-FFF2-40B4-BE49-F238E27FC236}">
+                <a16:creationId xmlns:a16="http://schemas.microsoft.com/office/drawing/2014/main" id="{E4083EBA-7954-703E-76D6-55FE73B8CF69}"/>
+              </a:ext>
+            </a:extLst>
+          </p:cNvPr>
+          <p:cNvSpPr>
+            <a:spLocks noGrp="1"/>
+          </p:cNvSpPr>
+          <p:nvPr>
+            <p:ph type="sldNum" sz="quarter" idx="12"/>
+          </p:nvPr>
+        </p:nvSpPr>
+        <p:spPr/>
+        <p:txBody>
+          <a:bodyPr/>
+          <a:lstStyle/>
+          <a:p>
+            <a:fld id="{8BADA5E7-275A-0142-8584-066D5199CC3B}" type="slidenum">
+              <a:rPr lang="en-US" smtClean="0"/>
+              <a:t>25</a:t>
+            </a:fld>
+            <a:endParaRPr lang="en-US"/>
           </a:p>
         </p:txBody>
       </p:sp>
@@ -7046,12 +7945,12 @@
   </p:clrMapOvr>
   <mc:AlternateContent xmlns:mc="http://schemas.openxmlformats.org/markup-compatibility/2006" xmlns:p14="http://schemas.microsoft.com/office/powerpoint/2010/main">
     <mc:Choice Requires="p14">
-      <p:transition spd="slow" p14:dur="1200">
-        <p14:prism/>
+      <p:transition spd="slow" p14:dur="2000">
+        <p14:prism isContent="1"/>
       </p:transition>
     </mc:Choice>
     <mc:Fallback xmlns="">
-      <p:transition xmlns:p14="http://schemas.microsoft.com/office/powerpoint/2010/main" spd="slow">
+      <p:transition spd="slow">
         <p:fade/>
       </p:transition>
     </mc:Fallback>
@@ -7078,6 +7977,36 @@
       </p:grpSpPr>
       <p:sp>
         <p:nvSpPr>
+          <p:cNvPr id="3" name="Title 2">
+            <a:extLst>
+              <a:ext uri="{FF2B5EF4-FFF2-40B4-BE49-F238E27FC236}">
+                <a16:creationId xmlns:a16="http://schemas.microsoft.com/office/drawing/2014/main" id="{6D1DC102-C9AE-7465-6D73-9B223B6516B3}"/>
+              </a:ext>
+            </a:extLst>
+          </p:cNvPr>
+          <p:cNvSpPr>
+            <a:spLocks noGrp="1"/>
+          </p:cNvSpPr>
+          <p:nvPr>
+            <p:ph type="title"/>
+          </p:nvPr>
+        </p:nvSpPr>
+        <p:spPr/>
+        <p:txBody>
+          <a:bodyPr>
+            <a:normAutofit fontScale="90000"/>
+          </a:bodyPr>
+          <a:lstStyle/>
+          <a:p>
+            <a:r>
+              <a:rPr lang="en-US" dirty="0"/>
+              <a:t>Sigils</a:t>
+            </a:r>
+          </a:p>
+        </p:txBody>
+      </p:sp>
+      <p:sp>
+        <p:nvSpPr>
           <p:cNvPr id="2" name="Content Placeholder 1">
             <a:extLst>
               <a:ext uri="{FF2B5EF4-FFF2-40B4-BE49-F238E27FC236}">
@@ -7129,29 +8058,87 @@
       </p:sp>
       <p:sp>
         <p:nvSpPr>
-          <p:cNvPr id="3" name="Title 2">
-            <a:extLst>
-              <a:ext uri="{FF2B5EF4-FFF2-40B4-BE49-F238E27FC236}">
-                <a16:creationId xmlns:a16="http://schemas.microsoft.com/office/drawing/2014/main" id="{6D1DC102-C9AE-7465-6D73-9B223B6516B3}"/>
-              </a:ext>
-            </a:extLst>
-          </p:cNvPr>
-          <p:cNvSpPr>
-            <a:spLocks noGrp="1"/>
-          </p:cNvSpPr>
-          <p:nvPr>
-            <p:ph type="title"/>
-          </p:nvPr>
-        </p:nvSpPr>
-        <p:spPr/>
-        <p:txBody>
-          <a:bodyPr/>
-          <a:lstStyle/>
-          <a:p>
-            <a:r>
-              <a:rPr lang="en-US" dirty="0"/>
-              <a:t>Sigils</a:t>
-            </a:r>
+          <p:cNvPr id="4" name="Date Placeholder 3">
+            <a:extLst>
+              <a:ext uri="{FF2B5EF4-FFF2-40B4-BE49-F238E27FC236}">
+                <a16:creationId xmlns:a16="http://schemas.microsoft.com/office/drawing/2014/main" id="{BB1874A2-D229-7075-EF2B-195571BABCE4}"/>
+              </a:ext>
+            </a:extLst>
+          </p:cNvPr>
+          <p:cNvSpPr>
+            <a:spLocks noGrp="1"/>
+          </p:cNvSpPr>
+          <p:nvPr>
+            <p:ph type="dt" sz="half" idx="10"/>
+          </p:nvPr>
+        </p:nvSpPr>
+        <p:spPr/>
+        <p:txBody>
+          <a:bodyPr/>
+          <a:lstStyle/>
+          <a:p>
+            <a:fld id="{000E7A31-8FF2-254F-9619-98E3746E278C}" type="datetime1">
+              <a:rPr lang="en-US" smtClean="0"/>
+              <a:t>10/8/26</a:t>
+            </a:fld>
+            <a:endParaRPr lang="en-US"/>
+          </a:p>
+        </p:txBody>
+      </p:sp>
+      <p:sp>
+        <p:nvSpPr>
+          <p:cNvPr id="5" name="Footer Placeholder 4">
+            <a:extLst>
+              <a:ext uri="{FF2B5EF4-FFF2-40B4-BE49-F238E27FC236}">
+                <a16:creationId xmlns:a16="http://schemas.microsoft.com/office/drawing/2014/main" id="{F1D9962C-ABF0-8DB1-3E74-AEE056A82340}"/>
+              </a:ext>
+            </a:extLst>
+          </p:cNvPr>
+          <p:cNvSpPr>
+            <a:spLocks noGrp="1"/>
+          </p:cNvSpPr>
+          <p:nvPr>
+            <p:ph type="ftr" sz="quarter" idx="11"/>
+          </p:nvPr>
+        </p:nvSpPr>
+        <p:spPr/>
+        <p:txBody>
+          <a:bodyPr/>
+          <a:lstStyle/>
+          <a:p>
+            <a:r>
+              <a:rPr lang="en-US"/>
+              <a:t>© Steve Beaty and others as cited</a:t>
+            </a:r>
+          </a:p>
+        </p:txBody>
+      </p:sp>
+      <p:sp>
+        <p:nvSpPr>
+          <p:cNvPr id="6" name="Slide Number Placeholder 5">
+            <a:extLst>
+              <a:ext uri="{FF2B5EF4-FFF2-40B4-BE49-F238E27FC236}">
+                <a16:creationId xmlns:a16="http://schemas.microsoft.com/office/drawing/2014/main" id="{70CE6D0B-90B7-8CBB-80E3-D017F9B32103}"/>
+              </a:ext>
+            </a:extLst>
+          </p:cNvPr>
+          <p:cNvSpPr>
+            <a:spLocks noGrp="1"/>
+          </p:cNvSpPr>
+          <p:nvPr>
+            <p:ph type="sldNum" sz="quarter" idx="12"/>
+          </p:nvPr>
+        </p:nvSpPr>
+        <p:spPr/>
+        <p:txBody>
+          <a:bodyPr/>
+          <a:lstStyle/>
+          <a:p>
+            <a:fld id="{8BADA5E7-275A-0142-8584-066D5199CC3B}" type="slidenum">
+              <a:rPr lang="en-US" smtClean="0"/>
+              <a:t>26</a:t>
+            </a:fld>
+            <a:endParaRPr lang="en-US"/>
           </a:p>
         </p:txBody>
       </p:sp>
@@ -7167,12 +8154,12 @@
   </p:clrMapOvr>
   <mc:AlternateContent xmlns:mc="http://schemas.openxmlformats.org/markup-compatibility/2006" xmlns:p14="http://schemas.microsoft.com/office/powerpoint/2010/main">
     <mc:Choice Requires="p14">
-      <p:transition spd="slow" p14:dur="1200">
-        <p14:prism/>
+      <p:transition spd="slow" p14:dur="2000">
+        <p14:prism isContent="1"/>
       </p:transition>
     </mc:Choice>
     <mc:Fallback xmlns="">
-      <p:transition xmlns:p14="http://schemas.microsoft.com/office/powerpoint/2010/main" spd="slow">
+      <p:transition spd="slow">
         <p:fade/>
       </p:transition>
     </mc:Fallback>
@@ -7278,6 +8265,92 @@
           </a:extLst>
         </p:spPr>
       </p:pic>
+      <p:sp>
+        <p:nvSpPr>
+          <p:cNvPr id="2" name="Date Placeholder 1">
+            <a:extLst>
+              <a:ext uri="{FF2B5EF4-FFF2-40B4-BE49-F238E27FC236}">
+                <a16:creationId xmlns:a16="http://schemas.microsoft.com/office/drawing/2014/main" id="{1D9C6BA2-580A-319D-FBC5-CD666ACAF3FB}"/>
+              </a:ext>
+            </a:extLst>
+          </p:cNvPr>
+          <p:cNvSpPr>
+            <a:spLocks noGrp="1"/>
+          </p:cNvSpPr>
+          <p:nvPr>
+            <p:ph type="dt" sz="half" idx="10"/>
+          </p:nvPr>
+        </p:nvSpPr>
+        <p:spPr/>
+        <p:txBody>
+          <a:bodyPr/>
+          <a:lstStyle/>
+          <a:p>
+            <a:fld id="{B5C184C3-25F8-9C4B-B6C1-97937543A17A}" type="datetime1">
+              <a:rPr lang="en-US" smtClean="0"/>
+              <a:t>10/8/26</a:t>
+            </a:fld>
+            <a:endParaRPr lang="en-US"/>
+          </a:p>
+        </p:txBody>
+      </p:sp>
+      <p:sp>
+        <p:nvSpPr>
+          <p:cNvPr id="3" name="Footer Placeholder 2">
+            <a:extLst>
+              <a:ext uri="{FF2B5EF4-FFF2-40B4-BE49-F238E27FC236}">
+                <a16:creationId xmlns:a16="http://schemas.microsoft.com/office/drawing/2014/main" id="{35B8A498-11AC-C62F-72EC-3F32F49E75ED}"/>
+              </a:ext>
+            </a:extLst>
+          </p:cNvPr>
+          <p:cNvSpPr>
+            <a:spLocks noGrp="1"/>
+          </p:cNvSpPr>
+          <p:nvPr>
+            <p:ph type="ftr" sz="quarter" idx="11"/>
+          </p:nvPr>
+        </p:nvSpPr>
+        <p:spPr/>
+        <p:txBody>
+          <a:bodyPr/>
+          <a:lstStyle/>
+          <a:p>
+            <a:r>
+              <a:rPr lang="en-US"/>
+              <a:t>© Steve Beaty and others as cited</a:t>
+            </a:r>
+          </a:p>
+        </p:txBody>
+      </p:sp>
+      <p:sp>
+        <p:nvSpPr>
+          <p:cNvPr id="5" name="Slide Number Placeholder 4">
+            <a:extLst>
+              <a:ext uri="{FF2B5EF4-FFF2-40B4-BE49-F238E27FC236}">
+                <a16:creationId xmlns:a16="http://schemas.microsoft.com/office/drawing/2014/main" id="{8AD5A531-BA3E-62AF-249A-AF50119B88B5}"/>
+              </a:ext>
+            </a:extLst>
+          </p:cNvPr>
+          <p:cNvSpPr>
+            <a:spLocks noGrp="1"/>
+          </p:cNvSpPr>
+          <p:nvPr>
+            <p:ph type="sldNum" sz="quarter" idx="12"/>
+          </p:nvPr>
+        </p:nvSpPr>
+        <p:spPr/>
+        <p:txBody>
+          <a:bodyPr/>
+          <a:lstStyle/>
+          <a:p>
+            <a:fld id="{8BADA5E7-275A-0142-8584-066D5199CC3B}" type="slidenum">
+              <a:rPr lang="en-US" smtClean="0"/>
+              <a:t>27</a:t>
+            </a:fld>
+            <a:endParaRPr lang="en-US"/>
+          </a:p>
+        </p:txBody>
+      </p:sp>
     </p:spTree>
     <p:extLst>
       <p:ext uri="{BB962C8B-B14F-4D97-AF65-F5344CB8AC3E}">
@@ -7290,12 +8363,12 @@
   </p:clrMapOvr>
   <mc:AlternateContent xmlns:mc="http://schemas.openxmlformats.org/markup-compatibility/2006" xmlns:p14="http://schemas.microsoft.com/office/powerpoint/2010/main">
     <mc:Choice Requires="p14">
-      <p:transition spd="slow" p14:dur="1200">
-        <p14:prism/>
+      <p:transition spd="slow" p14:dur="2000">
+        <p14:prism isContent="1"/>
       </p:transition>
     </mc:Choice>
     <mc:Fallback xmlns="">
-      <p:transition xmlns:p14="http://schemas.microsoft.com/office/powerpoint/2010/main" spd="slow">
+      <p:transition spd="slow">
         <p:fade/>
       </p:transition>
     </mc:Fallback>
@@ -7322,6 +8395,36 @@
       </p:grpSpPr>
       <p:sp>
         <p:nvSpPr>
+          <p:cNvPr id="3" name="Title 2">
+            <a:extLst>
+              <a:ext uri="{FF2B5EF4-FFF2-40B4-BE49-F238E27FC236}">
+                <a16:creationId xmlns:a16="http://schemas.microsoft.com/office/drawing/2014/main" id="{03EF9137-BE2F-963C-81D6-4C5F1B110980}"/>
+              </a:ext>
+            </a:extLst>
+          </p:cNvPr>
+          <p:cNvSpPr>
+            <a:spLocks noGrp="1"/>
+          </p:cNvSpPr>
+          <p:nvPr>
+            <p:ph type="title"/>
+          </p:nvPr>
+        </p:nvSpPr>
+        <p:spPr/>
+        <p:txBody>
+          <a:bodyPr>
+            <a:normAutofit fontScale="90000"/>
+          </a:bodyPr>
+          <a:lstStyle/>
+          <a:p>
+            <a:r>
+              <a:rPr lang="en-US" dirty="0"/>
+              <a:t>Scopes and Sigils</a:t>
+            </a:r>
+          </a:p>
+        </p:txBody>
+      </p:sp>
+      <p:sp>
+        <p:nvSpPr>
           <p:cNvPr id="2" name="Content Placeholder 1">
             <a:extLst>
               <a:ext uri="{FF2B5EF4-FFF2-40B4-BE49-F238E27FC236}">
@@ -7339,7 +8442,7 @@
         <p:spPr/>
         <p:txBody>
           <a:bodyPr>
-            <a:normAutofit fontScale="85000" lnSpcReduction="20000"/>
+            <a:normAutofit fontScale="77500" lnSpcReduction="20000"/>
           </a:bodyPr>
           <a:lstStyle/>
           <a:p>
@@ -7399,31 +8502,87 @@
       </p:sp>
       <p:sp>
         <p:nvSpPr>
-          <p:cNvPr id="3" name="Title 2">
-            <a:extLst>
-              <a:ext uri="{FF2B5EF4-FFF2-40B4-BE49-F238E27FC236}">
-                <a16:creationId xmlns:a16="http://schemas.microsoft.com/office/drawing/2014/main" id="{03EF9137-BE2F-963C-81D6-4C5F1B110980}"/>
-              </a:ext>
-            </a:extLst>
-          </p:cNvPr>
-          <p:cNvSpPr>
-            <a:spLocks noGrp="1"/>
-          </p:cNvSpPr>
-          <p:nvPr>
-            <p:ph type="title"/>
-          </p:nvPr>
-        </p:nvSpPr>
-        <p:spPr/>
-        <p:txBody>
-          <a:bodyPr>
-            <a:normAutofit/>
-          </a:bodyPr>
-          <a:lstStyle/>
-          <a:p>
-            <a:r>
-              <a:rPr lang="en-US" dirty="0"/>
-              <a:t>Scopes and Sigils</a:t>
-            </a:r>
+          <p:cNvPr id="4" name="Date Placeholder 3">
+            <a:extLst>
+              <a:ext uri="{FF2B5EF4-FFF2-40B4-BE49-F238E27FC236}">
+                <a16:creationId xmlns:a16="http://schemas.microsoft.com/office/drawing/2014/main" id="{8AFCB546-F76C-2990-FC1E-FDF2F5952C5C}"/>
+              </a:ext>
+            </a:extLst>
+          </p:cNvPr>
+          <p:cNvSpPr>
+            <a:spLocks noGrp="1"/>
+          </p:cNvSpPr>
+          <p:nvPr>
+            <p:ph type="dt" sz="half" idx="10"/>
+          </p:nvPr>
+        </p:nvSpPr>
+        <p:spPr/>
+        <p:txBody>
+          <a:bodyPr/>
+          <a:lstStyle/>
+          <a:p>
+            <a:fld id="{D6F86987-8A39-F34D-A86D-1956C92208EC}" type="datetime1">
+              <a:rPr lang="en-US" smtClean="0"/>
+              <a:t>10/8/26</a:t>
+            </a:fld>
+            <a:endParaRPr lang="en-US"/>
+          </a:p>
+        </p:txBody>
+      </p:sp>
+      <p:sp>
+        <p:nvSpPr>
+          <p:cNvPr id="5" name="Footer Placeholder 4">
+            <a:extLst>
+              <a:ext uri="{FF2B5EF4-FFF2-40B4-BE49-F238E27FC236}">
+                <a16:creationId xmlns:a16="http://schemas.microsoft.com/office/drawing/2014/main" id="{E1A04F8F-5E09-CB4D-4F66-252A76B8B7A3}"/>
+              </a:ext>
+            </a:extLst>
+          </p:cNvPr>
+          <p:cNvSpPr>
+            <a:spLocks noGrp="1"/>
+          </p:cNvSpPr>
+          <p:nvPr>
+            <p:ph type="ftr" sz="quarter" idx="11"/>
+          </p:nvPr>
+        </p:nvSpPr>
+        <p:spPr/>
+        <p:txBody>
+          <a:bodyPr/>
+          <a:lstStyle/>
+          <a:p>
+            <a:r>
+              <a:rPr lang="en-US"/>
+              <a:t>© Steve Beaty and others as cited</a:t>
+            </a:r>
+          </a:p>
+        </p:txBody>
+      </p:sp>
+      <p:sp>
+        <p:nvSpPr>
+          <p:cNvPr id="6" name="Slide Number Placeholder 5">
+            <a:extLst>
+              <a:ext uri="{FF2B5EF4-FFF2-40B4-BE49-F238E27FC236}">
+                <a16:creationId xmlns:a16="http://schemas.microsoft.com/office/drawing/2014/main" id="{0B21B9E8-AFC6-6A96-F5BF-3257FD7B4CBC}"/>
+              </a:ext>
+            </a:extLst>
+          </p:cNvPr>
+          <p:cNvSpPr>
+            <a:spLocks noGrp="1"/>
+          </p:cNvSpPr>
+          <p:nvPr>
+            <p:ph type="sldNum" sz="quarter" idx="12"/>
+          </p:nvPr>
+        </p:nvSpPr>
+        <p:spPr/>
+        <p:txBody>
+          <a:bodyPr/>
+          <a:lstStyle/>
+          <a:p>
+            <a:fld id="{8BADA5E7-275A-0142-8584-066D5199CC3B}" type="slidenum">
+              <a:rPr lang="en-US" smtClean="0"/>
+              <a:t>28</a:t>
+            </a:fld>
+            <a:endParaRPr lang="en-US"/>
           </a:p>
         </p:txBody>
       </p:sp>
@@ -7439,12 +8598,12 @@
   </p:clrMapOvr>
   <mc:AlternateContent xmlns:mc="http://schemas.openxmlformats.org/markup-compatibility/2006" xmlns:p14="http://schemas.microsoft.com/office/powerpoint/2010/main">
     <mc:Choice Requires="p14">
-      <p:transition spd="slow" p14:dur="1200">
-        <p14:prism/>
+      <p:transition spd="slow" p14:dur="2000">
+        <p14:prism isContent="1"/>
       </p:transition>
     </mc:Choice>
     <mc:Fallback xmlns="">
-      <p:transition xmlns:p14="http://schemas.microsoft.com/office/powerpoint/2010/main" spd="slow">
+      <p:transition spd="slow">
         <p:fade/>
       </p:transition>
     </mc:Fallback>
@@ -7471,6 +8630,36 @@
       </p:grpSpPr>
       <p:sp>
         <p:nvSpPr>
+          <p:cNvPr id="3" name="Title 2">
+            <a:extLst>
+              <a:ext uri="{FF2B5EF4-FFF2-40B4-BE49-F238E27FC236}">
+                <a16:creationId xmlns:a16="http://schemas.microsoft.com/office/drawing/2014/main" id="{BD61B309-CB42-17E8-131C-86D2D5DF1CF8}"/>
+              </a:ext>
+            </a:extLst>
+          </p:cNvPr>
+          <p:cNvSpPr>
+            <a:spLocks noGrp="1"/>
+          </p:cNvSpPr>
+          <p:nvPr>
+            <p:ph type="title"/>
+          </p:nvPr>
+        </p:nvSpPr>
+        <p:spPr/>
+        <p:txBody>
+          <a:bodyPr>
+            <a:normAutofit fontScale="90000"/>
+          </a:bodyPr>
+          <a:lstStyle/>
+          <a:p>
+            <a:r>
+              <a:rPr lang="en-US" dirty="0"/>
+              <a:t>Visibility Modifiers</a:t>
+            </a:r>
+          </a:p>
+        </p:txBody>
+      </p:sp>
+      <p:sp>
+        <p:nvSpPr>
           <p:cNvPr id="2" name="Content Placeholder 1">
             <a:extLst>
               <a:ext uri="{FF2B5EF4-FFF2-40B4-BE49-F238E27FC236}">
@@ -7485,15 +8674,10 @@
             <p:ph idx="1"/>
           </p:nvPr>
         </p:nvSpPr>
-        <p:spPr>
-          <a:xfrm>
-            <a:off x="609600" y="1600201"/>
-            <a:ext cx="10972800" cy="4525963"/>
-          </a:xfrm>
-        </p:spPr>
+        <p:spPr/>
         <p:txBody>
           <a:bodyPr>
-            <a:normAutofit fontScale="92500" lnSpcReduction="20000"/>
+            <a:normAutofit fontScale="85000" lnSpcReduction="20000"/>
           </a:bodyPr>
           <a:lstStyle/>
           <a:p>
@@ -7569,31 +8753,87 @@
       </p:sp>
       <p:sp>
         <p:nvSpPr>
-          <p:cNvPr id="3" name="Title 2">
-            <a:extLst>
-              <a:ext uri="{FF2B5EF4-FFF2-40B4-BE49-F238E27FC236}">
-                <a16:creationId xmlns:a16="http://schemas.microsoft.com/office/drawing/2014/main" id="{BD61B309-CB42-17E8-131C-86D2D5DF1CF8}"/>
-              </a:ext>
-            </a:extLst>
-          </p:cNvPr>
-          <p:cNvSpPr>
-            <a:spLocks noGrp="1"/>
-          </p:cNvSpPr>
-          <p:nvPr>
-            <p:ph type="title"/>
-          </p:nvPr>
-        </p:nvSpPr>
-        <p:spPr/>
-        <p:txBody>
-          <a:bodyPr>
-            <a:normAutofit/>
-          </a:bodyPr>
-          <a:lstStyle/>
-          <a:p>
-            <a:r>
-              <a:rPr lang="en-US" dirty="0"/>
-              <a:t>Visibility Modifiers</a:t>
-            </a:r>
+          <p:cNvPr id="4" name="Date Placeholder 3">
+            <a:extLst>
+              <a:ext uri="{FF2B5EF4-FFF2-40B4-BE49-F238E27FC236}">
+                <a16:creationId xmlns:a16="http://schemas.microsoft.com/office/drawing/2014/main" id="{D6F69348-7CD5-33A1-D574-F9F1ED1A7048}"/>
+              </a:ext>
+            </a:extLst>
+          </p:cNvPr>
+          <p:cNvSpPr>
+            <a:spLocks noGrp="1"/>
+          </p:cNvSpPr>
+          <p:nvPr>
+            <p:ph type="dt" sz="half" idx="10"/>
+          </p:nvPr>
+        </p:nvSpPr>
+        <p:spPr/>
+        <p:txBody>
+          <a:bodyPr/>
+          <a:lstStyle/>
+          <a:p>
+            <a:fld id="{A8E55B5A-2866-E44B-9204-CF9DA9CDDC2E}" type="datetime1">
+              <a:rPr lang="en-US" smtClean="0"/>
+              <a:t>10/8/26</a:t>
+            </a:fld>
+            <a:endParaRPr lang="en-US"/>
+          </a:p>
+        </p:txBody>
+      </p:sp>
+      <p:sp>
+        <p:nvSpPr>
+          <p:cNvPr id="5" name="Footer Placeholder 4">
+            <a:extLst>
+              <a:ext uri="{FF2B5EF4-FFF2-40B4-BE49-F238E27FC236}">
+                <a16:creationId xmlns:a16="http://schemas.microsoft.com/office/drawing/2014/main" id="{F963C254-726F-F00F-495B-4895194D238A}"/>
+              </a:ext>
+            </a:extLst>
+          </p:cNvPr>
+          <p:cNvSpPr>
+            <a:spLocks noGrp="1"/>
+          </p:cNvSpPr>
+          <p:nvPr>
+            <p:ph type="ftr" sz="quarter" idx="11"/>
+          </p:nvPr>
+        </p:nvSpPr>
+        <p:spPr/>
+        <p:txBody>
+          <a:bodyPr/>
+          <a:lstStyle/>
+          <a:p>
+            <a:r>
+              <a:rPr lang="en-US"/>
+              <a:t>© Steve Beaty and others as cited</a:t>
+            </a:r>
+          </a:p>
+        </p:txBody>
+      </p:sp>
+      <p:sp>
+        <p:nvSpPr>
+          <p:cNvPr id="6" name="Slide Number Placeholder 5">
+            <a:extLst>
+              <a:ext uri="{FF2B5EF4-FFF2-40B4-BE49-F238E27FC236}">
+                <a16:creationId xmlns:a16="http://schemas.microsoft.com/office/drawing/2014/main" id="{3CAF8AA5-74CD-1806-387E-28C311100ADB}"/>
+              </a:ext>
+            </a:extLst>
+          </p:cNvPr>
+          <p:cNvSpPr>
+            <a:spLocks noGrp="1"/>
+          </p:cNvSpPr>
+          <p:nvPr>
+            <p:ph type="sldNum" sz="quarter" idx="12"/>
+          </p:nvPr>
+        </p:nvSpPr>
+        <p:spPr/>
+        <p:txBody>
+          <a:bodyPr/>
+          <a:lstStyle/>
+          <a:p>
+            <a:fld id="{8BADA5E7-275A-0142-8584-066D5199CC3B}" type="slidenum">
+              <a:rPr lang="en-US" smtClean="0"/>
+              <a:t>29</a:t>
+            </a:fld>
+            <a:endParaRPr lang="en-US"/>
           </a:p>
         </p:txBody>
       </p:sp>
@@ -7609,12 +8849,12 @@
   </p:clrMapOvr>
   <mc:AlternateContent xmlns:mc="http://schemas.openxmlformats.org/markup-compatibility/2006" xmlns:p14="http://schemas.microsoft.com/office/powerpoint/2010/main">
     <mc:Choice Requires="p14">
-      <p:transition spd="slow" p14:dur="1200">
-        <p14:prism/>
+      <p:transition spd="slow" p14:dur="2000">
+        <p14:prism isContent="1"/>
       </p:transition>
     </mc:Choice>
     <mc:Fallback xmlns="">
-      <p:transition xmlns:p14="http://schemas.microsoft.com/office/powerpoint/2010/main" spd="slow">
+      <p:transition spd="slow">
         <p:fade/>
       </p:transition>
     </mc:Fallback>
@@ -7641,6 +8881,36 @@
       </p:grpSpPr>
       <p:sp>
         <p:nvSpPr>
+          <p:cNvPr id="3" name="Title 2">
+            <a:extLst>
+              <a:ext uri="{FF2B5EF4-FFF2-40B4-BE49-F238E27FC236}">
+                <a16:creationId xmlns:a16="http://schemas.microsoft.com/office/drawing/2014/main" id="{31145782-09D2-FC32-35A5-5D03126833DB}"/>
+              </a:ext>
+            </a:extLst>
+          </p:cNvPr>
+          <p:cNvSpPr>
+            <a:spLocks noGrp="1"/>
+          </p:cNvSpPr>
+          <p:nvPr>
+            <p:ph type="title"/>
+          </p:nvPr>
+        </p:nvSpPr>
+        <p:spPr/>
+        <p:txBody>
+          <a:bodyPr>
+            <a:normAutofit fontScale="90000"/>
+          </a:bodyPr>
+          <a:lstStyle/>
+          <a:p>
+            <a:r>
+              <a:rPr lang="en-US" dirty="0"/>
+              <a:t>Why Ruby?</a:t>
+            </a:r>
+          </a:p>
+        </p:txBody>
+      </p:sp>
+      <p:sp>
+        <p:nvSpPr>
           <p:cNvPr id="2" name="Content Placeholder 1">
             <a:extLst>
               <a:ext uri="{FF2B5EF4-FFF2-40B4-BE49-F238E27FC236}">
@@ -7658,7 +8928,7 @@
         <p:spPr/>
         <p:txBody>
           <a:bodyPr>
-            <a:normAutofit/>
+            <a:normAutofit lnSpcReduction="10000"/>
           </a:bodyPr>
           <a:lstStyle/>
           <a:p>
@@ -7708,31 +8978,87 @@
       </p:sp>
       <p:sp>
         <p:nvSpPr>
-          <p:cNvPr id="3" name="Title 2">
-            <a:extLst>
-              <a:ext uri="{FF2B5EF4-FFF2-40B4-BE49-F238E27FC236}">
-                <a16:creationId xmlns:a16="http://schemas.microsoft.com/office/drawing/2014/main" id="{31145782-09D2-FC32-35A5-5D03126833DB}"/>
-              </a:ext>
-            </a:extLst>
-          </p:cNvPr>
-          <p:cNvSpPr>
-            <a:spLocks noGrp="1"/>
-          </p:cNvSpPr>
-          <p:nvPr>
-            <p:ph type="title"/>
-          </p:nvPr>
-        </p:nvSpPr>
-        <p:spPr/>
-        <p:txBody>
-          <a:bodyPr>
-            <a:normAutofit/>
-          </a:bodyPr>
-          <a:lstStyle/>
-          <a:p>
-            <a:r>
-              <a:rPr lang="en-US" dirty="0"/>
-              <a:t>Why Ruby?</a:t>
-            </a:r>
+          <p:cNvPr id="4" name="Date Placeholder 3">
+            <a:extLst>
+              <a:ext uri="{FF2B5EF4-FFF2-40B4-BE49-F238E27FC236}">
+                <a16:creationId xmlns:a16="http://schemas.microsoft.com/office/drawing/2014/main" id="{8477F615-FDD3-E09B-AAB8-1793C170F8A5}"/>
+              </a:ext>
+            </a:extLst>
+          </p:cNvPr>
+          <p:cNvSpPr>
+            <a:spLocks noGrp="1"/>
+          </p:cNvSpPr>
+          <p:nvPr>
+            <p:ph type="dt" sz="half" idx="10"/>
+          </p:nvPr>
+        </p:nvSpPr>
+        <p:spPr/>
+        <p:txBody>
+          <a:bodyPr/>
+          <a:lstStyle/>
+          <a:p>
+            <a:fld id="{EF51E927-B9AC-CD4D-84D7-0615264A608E}" type="datetime1">
+              <a:rPr lang="en-US" smtClean="0"/>
+              <a:t>10/8/26</a:t>
+            </a:fld>
+            <a:endParaRPr lang="en-US"/>
+          </a:p>
+        </p:txBody>
+      </p:sp>
+      <p:sp>
+        <p:nvSpPr>
+          <p:cNvPr id="5" name="Footer Placeholder 4">
+            <a:extLst>
+              <a:ext uri="{FF2B5EF4-FFF2-40B4-BE49-F238E27FC236}">
+                <a16:creationId xmlns:a16="http://schemas.microsoft.com/office/drawing/2014/main" id="{C24E28F6-0DB6-4A36-4231-F6984A54B369}"/>
+              </a:ext>
+            </a:extLst>
+          </p:cNvPr>
+          <p:cNvSpPr>
+            <a:spLocks noGrp="1"/>
+          </p:cNvSpPr>
+          <p:nvPr>
+            <p:ph type="ftr" sz="quarter" idx="11"/>
+          </p:nvPr>
+        </p:nvSpPr>
+        <p:spPr/>
+        <p:txBody>
+          <a:bodyPr/>
+          <a:lstStyle/>
+          <a:p>
+            <a:r>
+              <a:rPr lang="en-US"/>
+              <a:t>© Steve Beaty and others as cited</a:t>
+            </a:r>
+          </a:p>
+        </p:txBody>
+      </p:sp>
+      <p:sp>
+        <p:nvSpPr>
+          <p:cNvPr id="6" name="Slide Number Placeholder 5">
+            <a:extLst>
+              <a:ext uri="{FF2B5EF4-FFF2-40B4-BE49-F238E27FC236}">
+                <a16:creationId xmlns:a16="http://schemas.microsoft.com/office/drawing/2014/main" id="{99E4E42F-A09B-11A1-D7C4-D01275E46275}"/>
+              </a:ext>
+            </a:extLst>
+          </p:cNvPr>
+          <p:cNvSpPr>
+            <a:spLocks noGrp="1"/>
+          </p:cNvSpPr>
+          <p:nvPr>
+            <p:ph type="sldNum" sz="quarter" idx="12"/>
+          </p:nvPr>
+        </p:nvSpPr>
+        <p:spPr/>
+        <p:txBody>
+          <a:bodyPr/>
+          <a:lstStyle/>
+          <a:p>
+            <a:fld id="{8BADA5E7-275A-0142-8584-066D5199CC3B}" type="slidenum">
+              <a:rPr lang="en-US" smtClean="0"/>
+              <a:t>3</a:t>
+            </a:fld>
+            <a:endParaRPr lang="en-US"/>
           </a:p>
         </p:txBody>
       </p:sp>
@@ -7748,12 +9074,12 @@
   </p:clrMapOvr>
   <mc:AlternateContent xmlns:mc="http://schemas.openxmlformats.org/markup-compatibility/2006" xmlns:p14="http://schemas.microsoft.com/office/powerpoint/2010/main">
     <mc:Choice Requires="p14">
-      <p:transition spd="slow" p14:dur="1200">
-        <p14:prism/>
+      <p:transition spd="slow" p14:dur="2000">
+        <p14:prism isContent="1"/>
       </p:transition>
     </mc:Choice>
     <mc:Fallback xmlns="">
-      <p:transition xmlns:p14="http://schemas.microsoft.com/office/powerpoint/2010/main" spd="slow">
+      <p:transition spd="slow">
         <p:fade/>
       </p:transition>
     </mc:Fallback>
@@ -7797,7 +9123,7 @@
         <p:spPr/>
         <p:txBody>
           <a:bodyPr>
-            <a:normAutofit/>
+            <a:normAutofit fontScale="90000"/>
           </a:bodyPr>
           <a:lstStyle/>
           <a:p>
@@ -7827,7 +9153,7 @@
         <p:spPr/>
         <p:txBody>
           <a:bodyPr>
-            <a:normAutofit fontScale="85000" lnSpcReduction="20000"/>
+            <a:normAutofit fontScale="77500" lnSpcReduction="20000"/>
           </a:bodyPr>
           <a:lstStyle/>
           <a:p>
@@ -8079,6 +9405,92 @@
                 <a:schemeClr val="accent3"/>
               </a:solidFill>
             </a:endParaRPr>
+          </a:p>
+        </p:txBody>
+      </p:sp>
+      <p:sp>
+        <p:nvSpPr>
+          <p:cNvPr id="2" name="Date Placeholder 1">
+            <a:extLst>
+              <a:ext uri="{FF2B5EF4-FFF2-40B4-BE49-F238E27FC236}">
+                <a16:creationId xmlns:a16="http://schemas.microsoft.com/office/drawing/2014/main" id="{5C54830F-8E6C-4E5A-F36C-83DE78AB6165}"/>
+              </a:ext>
+            </a:extLst>
+          </p:cNvPr>
+          <p:cNvSpPr>
+            <a:spLocks noGrp="1"/>
+          </p:cNvSpPr>
+          <p:nvPr>
+            <p:ph type="dt" sz="half" idx="14"/>
+          </p:nvPr>
+        </p:nvSpPr>
+        <p:spPr/>
+        <p:txBody>
+          <a:bodyPr/>
+          <a:lstStyle/>
+          <a:p>
+            <a:fld id="{20834318-FD62-554C-9B24-8146E0CD9072}" type="datetime1">
+              <a:rPr lang="en-US" smtClean="0"/>
+              <a:t>10/8/26</a:t>
+            </a:fld>
+            <a:endParaRPr lang="en-US"/>
+          </a:p>
+        </p:txBody>
+      </p:sp>
+      <p:sp>
+        <p:nvSpPr>
+          <p:cNvPr id="3" name="Footer Placeholder 2">
+            <a:extLst>
+              <a:ext uri="{FF2B5EF4-FFF2-40B4-BE49-F238E27FC236}">
+                <a16:creationId xmlns:a16="http://schemas.microsoft.com/office/drawing/2014/main" id="{3D444FD3-114B-47F1-C63F-94764156AC32}"/>
+              </a:ext>
+            </a:extLst>
+          </p:cNvPr>
+          <p:cNvSpPr>
+            <a:spLocks noGrp="1"/>
+          </p:cNvSpPr>
+          <p:nvPr>
+            <p:ph type="ftr" sz="quarter" idx="15"/>
+          </p:nvPr>
+        </p:nvSpPr>
+        <p:spPr/>
+        <p:txBody>
+          <a:bodyPr/>
+          <a:lstStyle/>
+          <a:p>
+            <a:r>
+              <a:rPr lang="en-US"/>
+              <a:t>© Steve Beaty and others as cited</a:t>
+            </a:r>
+          </a:p>
+        </p:txBody>
+      </p:sp>
+      <p:sp>
+        <p:nvSpPr>
+          <p:cNvPr id="7" name="Slide Number Placeholder 6">
+            <a:extLst>
+              <a:ext uri="{FF2B5EF4-FFF2-40B4-BE49-F238E27FC236}">
+                <a16:creationId xmlns:a16="http://schemas.microsoft.com/office/drawing/2014/main" id="{6FA9A888-71A5-4224-9A57-76D7D0B99EF2}"/>
+              </a:ext>
+            </a:extLst>
+          </p:cNvPr>
+          <p:cNvSpPr>
+            <a:spLocks noGrp="1"/>
+          </p:cNvSpPr>
+          <p:nvPr>
+            <p:ph type="sldNum" sz="quarter" idx="16"/>
+          </p:nvPr>
+        </p:nvSpPr>
+        <p:spPr/>
+        <p:txBody>
+          <a:bodyPr/>
+          <a:lstStyle/>
+          <a:p>
+            <a:fld id="{8BADA5E7-275A-0142-8584-066D5199CC3B}" type="slidenum">
+              <a:rPr lang="en-US" smtClean="0"/>
+              <a:t>30</a:t>
+            </a:fld>
+            <a:endParaRPr lang="en-US"/>
           </a:p>
         </p:txBody>
       </p:sp>
@@ -8152,6 +9564,92 @@
           </a:p>
         </p:txBody>
       </p:sp>
+      <p:sp>
+        <p:nvSpPr>
+          <p:cNvPr id="2" name="Date Placeholder 1">
+            <a:extLst>
+              <a:ext uri="{FF2B5EF4-FFF2-40B4-BE49-F238E27FC236}">
+                <a16:creationId xmlns:a16="http://schemas.microsoft.com/office/drawing/2014/main" id="{A430FE4B-2AA8-9AEB-5107-1B810C752F54}"/>
+              </a:ext>
+            </a:extLst>
+          </p:cNvPr>
+          <p:cNvSpPr>
+            <a:spLocks noGrp="1"/>
+          </p:cNvSpPr>
+          <p:nvPr>
+            <p:ph type="dt" sz="half" idx="10"/>
+          </p:nvPr>
+        </p:nvSpPr>
+        <p:spPr/>
+        <p:txBody>
+          <a:bodyPr/>
+          <a:lstStyle/>
+          <a:p>
+            <a:fld id="{E4A37579-AFF8-DB48-B903-6C826799BFFF}" type="datetime1">
+              <a:rPr lang="en-US" smtClean="0"/>
+              <a:t>10/8/26</a:t>
+            </a:fld>
+            <a:endParaRPr lang="en-US"/>
+          </a:p>
+        </p:txBody>
+      </p:sp>
+      <p:sp>
+        <p:nvSpPr>
+          <p:cNvPr id="3" name="Footer Placeholder 2">
+            <a:extLst>
+              <a:ext uri="{FF2B5EF4-FFF2-40B4-BE49-F238E27FC236}">
+                <a16:creationId xmlns:a16="http://schemas.microsoft.com/office/drawing/2014/main" id="{F84FF3EA-3A8A-3A0C-DA7E-C8E06596C24A}"/>
+              </a:ext>
+            </a:extLst>
+          </p:cNvPr>
+          <p:cNvSpPr>
+            <a:spLocks noGrp="1"/>
+          </p:cNvSpPr>
+          <p:nvPr>
+            <p:ph type="ftr" sz="quarter" idx="11"/>
+          </p:nvPr>
+        </p:nvSpPr>
+        <p:spPr/>
+        <p:txBody>
+          <a:bodyPr/>
+          <a:lstStyle/>
+          <a:p>
+            <a:r>
+              <a:rPr lang="en-US"/>
+              <a:t>© Steve Beaty and others as cited</a:t>
+            </a:r>
+          </a:p>
+        </p:txBody>
+      </p:sp>
+      <p:sp>
+        <p:nvSpPr>
+          <p:cNvPr id="4" name="Slide Number Placeholder 3">
+            <a:extLst>
+              <a:ext uri="{FF2B5EF4-FFF2-40B4-BE49-F238E27FC236}">
+                <a16:creationId xmlns:a16="http://schemas.microsoft.com/office/drawing/2014/main" id="{9750BBF8-8A89-AC7E-6782-E15F0D622A19}"/>
+              </a:ext>
+            </a:extLst>
+          </p:cNvPr>
+          <p:cNvSpPr>
+            <a:spLocks noGrp="1"/>
+          </p:cNvSpPr>
+          <p:nvPr>
+            <p:ph type="sldNum" sz="quarter" idx="12"/>
+          </p:nvPr>
+        </p:nvSpPr>
+        <p:spPr/>
+        <p:txBody>
+          <a:bodyPr/>
+          <a:lstStyle/>
+          <a:p>
+            <a:fld id="{8BADA5E7-275A-0142-8584-066D5199CC3B}" type="slidenum">
+              <a:rPr lang="en-US" smtClean="0"/>
+              <a:t>31</a:t>
+            </a:fld>
+            <a:endParaRPr lang="en-US"/>
+          </a:p>
+        </p:txBody>
+      </p:sp>
     </p:spTree>
     <p:extLst>
       <p:ext uri="{BB962C8B-B14F-4D97-AF65-F5344CB8AC3E}">
@@ -8184,6 +9682,36 @@
       </p:grpSpPr>
       <p:sp>
         <p:nvSpPr>
+          <p:cNvPr id="3" name="Title 2">
+            <a:extLst>
+              <a:ext uri="{FF2B5EF4-FFF2-40B4-BE49-F238E27FC236}">
+                <a16:creationId xmlns:a16="http://schemas.microsoft.com/office/drawing/2014/main" id="{7FCF6568-7B8A-3D0E-2979-73E50AAC0D4E}"/>
+              </a:ext>
+            </a:extLst>
+          </p:cNvPr>
+          <p:cNvSpPr>
+            <a:spLocks noGrp="1"/>
+          </p:cNvSpPr>
+          <p:nvPr>
+            <p:ph type="title"/>
+          </p:nvPr>
+        </p:nvSpPr>
+        <p:spPr/>
+        <p:txBody>
+          <a:bodyPr>
+            <a:normAutofit fontScale="90000"/>
+          </a:bodyPr>
+          <a:lstStyle/>
+          <a:p>
+            <a:r>
+              <a:rPr lang="en-US" dirty="0"/>
+              <a:t>The I: Inheritance</a:t>
+            </a:r>
+          </a:p>
+        </p:txBody>
+      </p:sp>
+      <p:sp>
+        <p:nvSpPr>
           <p:cNvPr id="4" name="Content Placeholder 3">
             <a:extLst>
               <a:ext uri="{FF2B5EF4-FFF2-40B4-BE49-F238E27FC236}">
@@ -8201,7 +9729,7 @@
         <p:spPr/>
         <p:txBody>
           <a:bodyPr>
-            <a:normAutofit fontScale="85000" lnSpcReduction="10000"/>
+            <a:normAutofit fontScale="77500" lnSpcReduction="20000"/>
           </a:bodyPr>
           <a:lstStyle/>
           <a:p>
@@ -8268,31 +9796,87 @@
       </p:sp>
       <p:sp>
         <p:nvSpPr>
-          <p:cNvPr id="3" name="Title 2">
-            <a:extLst>
-              <a:ext uri="{FF2B5EF4-FFF2-40B4-BE49-F238E27FC236}">
-                <a16:creationId xmlns:a16="http://schemas.microsoft.com/office/drawing/2014/main" id="{7FCF6568-7B8A-3D0E-2979-73E50AAC0D4E}"/>
-              </a:ext>
-            </a:extLst>
-          </p:cNvPr>
-          <p:cNvSpPr>
-            <a:spLocks noGrp="1"/>
-          </p:cNvSpPr>
-          <p:nvPr>
-            <p:ph type="title"/>
-          </p:nvPr>
-        </p:nvSpPr>
-        <p:spPr/>
-        <p:txBody>
-          <a:bodyPr>
-            <a:normAutofit/>
-          </a:bodyPr>
-          <a:lstStyle/>
-          <a:p>
-            <a:r>
-              <a:rPr lang="en-US" dirty="0"/>
-              <a:t>The I: Inheritance</a:t>
-            </a:r>
+          <p:cNvPr id="2" name="Date Placeholder 1">
+            <a:extLst>
+              <a:ext uri="{FF2B5EF4-FFF2-40B4-BE49-F238E27FC236}">
+                <a16:creationId xmlns:a16="http://schemas.microsoft.com/office/drawing/2014/main" id="{B4D2B03F-3C13-ACD6-4F37-C4E61C877239}"/>
+              </a:ext>
+            </a:extLst>
+          </p:cNvPr>
+          <p:cNvSpPr>
+            <a:spLocks noGrp="1"/>
+          </p:cNvSpPr>
+          <p:nvPr>
+            <p:ph type="dt" sz="half" idx="10"/>
+          </p:nvPr>
+        </p:nvSpPr>
+        <p:spPr/>
+        <p:txBody>
+          <a:bodyPr/>
+          <a:lstStyle/>
+          <a:p>
+            <a:fld id="{B242879A-54A8-5045-B371-C336D639F16F}" type="datetime1">
+              <a:rPr lang="en-US" smtClean="0"/>
+              <a:t>10/8/26</a:t>
+            </a:fld>
+            <a:endParaRPr lang="en-US"/>
+          </a:p>
+        </p:txBody>
+      </p:sp>
+      <p:sp>
+        <p:nvSpPr>
+          <p:cNvPr id="5" name="Footer Placeholder 4">
+            <a:extLst>
+              <a:ext uri="{FF2B5EF4-FFF2-40B4-BE49-F238E27FC236}">
+                <a16:creationId xmlns:a16="http://schemas.microsoft.com/office/drawing/2014/main" id="{2359D8CB-CB23-5B3A-97E5-1C6D1A94CF95}"/>
+              </a:ext>
+            </a:extLst>
+          </p:cNvPr>
+          <p:cNvSpPr>
+            <a:spLocks noGrp="1"/>
+          </p:cNvSpPr>
+          <p:nvPr>
+            <p:ph type="ftr" sz="quarter" idx="11"/>
+          </p:nvPr>
+        </p:nvSpPr>
+        <p:spPr/>
+        <p:txBody>
+          <a:bodyPr/>
+          <a:lstStyle/>
+          <a:p>
+            <a:r>
+              <a:rPr lang="en-US"/>
+              <a:t>© Steve Beaty and others as cited</a:t>
+            </a:r>
+          </a:p>
+        </p:txBody>
+      </p:sp>
+      <p:sp>
+        <p:nvSpPr>
+          <p:cNvPr id="6" name="Slide Number Placeholder 5">
+            <a:extLst>
+              <a:ext uri="{FF2B5EF4-FFF2-40B4-BE49-F238E27FC236}">
+                <a16:creationId xmlns:a16="http://schemas.microsoft.com/office/drawing/2014/main" id="{6010EB43-B605-CCB5-C8A0-0F58A8A8B4F5}"/>
+              </a:ext>
+            </a:extLst>
+          </p:cNvPr>
+          <p:cNvSpPr>
+            <a:spLocks noGrp="1"/>
+          </p:cNvSpPr>
+          <p:nvPr>
+            <p:ph type="sldNum" sz="quarter" idx="12"/>
+          </p:nvPr>
+        </p:nvSpPr>
+        <p:spPr/>
+        <p:txBody>
+          <a:bodyPr/>
+          <a:lstStyle/>
+          <a:p>
+            <a:fld id="{8BADA5E7-275A-0142-8584-066D5199CC3B}" type="slidenum">
+              <a:rPr lang="en-US" smtClean="0"/>
+              <a:t>32</a:t>
+            </a:fld>
+            <a:endParaRPr lang="en-US"/>
           </a:p>
         </p:txBody>
       </p:sp>
@@ -8308,12 +9892,12 @@
   </p:clrMapOvr>
   <mc:AlternateContent xmlns:mc="http://schemas.openxmlformats.org/markup-compatibility/2006" xmlns:p14="http://schemas.microsoft.com/office/powerpoint/2010/main">
     <mc:Choice Requires="p14">
-      <p:transition spd="slow" p14:dur="1200">
-        <p14:prism/>
+      <p:transition spd="slow" p14:dur="2000">
+        <p14:prism isContent="1"/>
       </p:transition>
     </mc:Choice>
     <mc:Fallback xmlns="">
-      <p:transition xmlns:p14="http://schemas.microsoft.com/office/powerpoint/2010/main" spd="slow">
+      <p:transition spd="slow">
         <p:fade/>
       </p:transition>
     </mc:Fallback>
@@ -8340,6 +9924,36 @@
       </p:grpSpPr>
       <p:sp>
         <p:nvSpPr>
+          <p:cNvPr id="3" name="Title 2">
+            <a:extLst>
+              <a:ext uri="{FF2B5EF4-FFF2-40B4-BE49-F238E27FC236}">
+                <a16:creationId xmlns:a16="http://schemas.microsoft.com/office/drawing/2014/main" id="{426A27FB-241B-DF55-F2B7-E72C5F96088C}"/>
+              </a:ext>
+            </a:extLst>
+          </p:cNvPr>
+          <p:cNvSpPr>
+            <a:spLocks noGrp="1"/>
+          </p:cNvSpPr>
+          <p:nvPr>
+            <p:ph type="title"/>
+          </p:nvPr>
+        </p:nvSpPr>
+        <p:spPr/>
+        <p:txBody>
+          <a:bodyPr>
+            <a:normAutofit fontScale="90000"/>
+          </a:bodyPr>
+          <a:lstStyle/>
+          <a:p>
+            <a:r>
+              <a:rPr lang="en-US" dirty="0"/>
+              <a:t>Ruby's Approach</a:t>
+            </a:r>
+          </a:p>
+        </p:txBody>
+      </p:sp>
+      <p:sp>
+        <p:nvSpPr>
           <p:cNvPr id="2" name="Content Placeholder 1">
             <a:extLst>
               <a:ext uri="{FF2B5EF4-FFF2-40B4-BE49-F238E27FC236}">
@@ -8357,7 +9971,7 @@
         <p:spPr/>
         <p:txBody>
           <a:bodyPr>
-            <a:normAutofit fontScale="70000" lnSpcReduction="20000"/>
+            <a:normAutofit fontScale="62500" lnSpcReduction="20000"/>
           </a:bodyPr>
           <a:lstStyle/>
           <a:p>
@@ -8446,31 +10060,87 @@
       </p:sp>
       <p:sp>
         <p:nvSpPr>
-          <p:cNvPr id="3" name="Title 2">
-            <a:extLst>
-              <a:ext uri="{FF2B5EF4-FFF2-40B4-BE49-F238E27FC236}">
-                <a16:creationId xmlns:a16="http://schemas.microsoft.com/office/drawing/2014/main" id="{426A27FB-241B-DF55-F2B7-E72C5F96088C}"/>
-              </a:ext>
-            </a:extLst>
-          </p:cNvPr>
-          <p:cNvSpPr>
-            <a:spLocks noGrp="1"/>
-          </p:cNvSpPr>
-          <p:nvPr>
-            <p:ph type="title"/>
-          </p:nvPr>
-        </p:nvSpPr>
-        <p:spPr/>
-        <p:txBody>
-          <a:bodyPr>
-            <a:normAutofit/>
-          </a:bodyPr>
-          <a:lstStyle/>
-          <a:p>
-            <a:r>
-              <a:rPr lang="en-US" dirty="0"/>
-              <a:t>Ruby's Approach</a:t>
-            </a:r>
+          <p:cNvPr id="4" name="Date Placeholder 3">
+            <a:extLst>
+              <a:ext uri="{FF2B5EF4-FFF2-40B4-BE49-F238E27FC236}">
+                <a16:creationId xmlns:a16="http://schemas.microsoft.com/office/drawing/2014/main" id="{A4077119-7C6D-0604-39CF-FD732D73BEBA}"/>
+              </a:ext>
+            </a:extLst>
+          </p:cNvPr>
+          <p:cNvSpPr>
+            <a:spLocks noGrp="1"/>
+          </p:cNvSpPr>
+          <p:nvPr>
+            <p:ph type="dt" sz="half" idx="10"/>
+          </p:nvPr>
+        </p:nvSpPr>
+        <p:spPr/>
+        <p:txBody>
+          <a:bodyPr/>
+          <a:lstStyle/>
+          <a:p>
+            <a:fld id="{72F5F771-184B-6A48-A525-519D61CB7520}" type="datetime1">
+              <a:rPr lang="en-US" smtClean="0"/>
+              <a:t>10/8/26</a:t>
+            </a:fld>
+            <a:endParaRPr lang="en-US"/>
+          </a:p>
+        </p:txBody>
+      </p:sp>
+      <p:sp>
+        <p:nvSpPr>
+          <p:cNvPr id="5" name="Footer Placeholder 4">
+            <a:extLst>
+              <a:ext uri="{FF2B5EF4-FFF2-40B4-BE49-F238E27FC236}">
+                <a16:creationId xmlns:a16="http://schemas.microsoft.com/office/drawing/2014/main" id="{44784123-0A42-3CF6-D806-DCED3D5E3B0B}"/>
+              </a:ext>
+            </a:extLst>
+          </p:cNvPr>
+          <p:cNvSpPr>
+            <a:spLocks noGrp="1"/>
+          </p:cNvSpPr>
+          <p:nvPr>
+            <p:ph type="ftr" sz="quarter" idx="11"/>
+          </p:nvPr>
+        </p:nvSpPr>
+        <p:spPr/>
+        <p:txBody>
+          <a:bodyPr/>
+          <a:lstStyle/>
+          <a:p>
+            <a:r>
+              <a:rPr lang="en-US"/>
+              <a:t>© Steve Beaty and others as cited</a:t>
+            </a:r>
+          </a:p>
+        </p:txBody>
+      </p:sp>
+      <p:sp>
+        <p:nvSpPr>
+          <p:cNvPr id="6" name="Slide Number Placeholder 5">
+            <a:extLst>
+              <a:ext uri="{FF2B5EF4-FFF2-40B4-BE49-F238E27FC236}">
+                <a16:creationId xmlns:a16="http://schemas.microsoft.com/office/drawing/2014/main" id="{BDFA2AB3-23F1-83C5-5141-97A822EA3176}"/>
+              </a:ext>
+            </a:extLst>
+          </p:cNvPr>
+          <p:cNvSpPr>
+            <a:spLocks noGrp="1"/>
+          </p:cNvSpPr>
+          <p:nvPr>
+            <p:ph type="sldNum" sz="quarter" idx="12"/>
+          </p:nvPr>
+        </p:nvSpPr>
+        <p:spPr/>
+        <p:txBody>
+          <a:bodyPr/>
+          <a:lstStyle/>
+          <a:p>
+            <a:fld id="{8BADA5E7-275A-0142-8584-066D5199CC3B}" type="slidenum">
+              <a:rPr lang="en-US" smtClean="0"/>
+              <a:t>33</a:t>
+            </a:fld>
+            <a:endParaRPr lang="en-US"/>
           </a:p>
         </p:txBody>
       </p:sp>
@@ -8486,12 +10156,12 @@
   </p:clrMapOvr>
   <mc:AlternateContent xmlns:mc="http://schemas.openxmlformats.org/markup-compatibility/2006" xmlns:p14="http://schemas.microsoft.com/office/powerpoint/2010/main">
     <mc:Choice Requires="p14">
-      <p:transition spd="slow" p14:dur="1200">
-        <p14:prism/>
+      <p:transition spd="slow" p14:dur="2000">
+        <p14:prism isContent="1"/>
       </p:transition>
     </mc:Choice>
     <mc:Fallback xmlns="">
-      <p:transition xmlns:p14="http://schemas.microsoft.com/office/powerpoint/2010/main" spd="slow">
+      <p:transition spd="slow">
         <p:fade/>
       </p:transition>
     </mc:Fallback>
@@ -8534,7 +10204,9 @@
         </p:nvSpPr>
         <p:spPr/>
         <p:txBody>
-          <a:bodyPr/>
+          <a:bodyPr>
+            <a:normAutofit fontScale="90000"/>
+          </a:bodyPr>
           <a:lstStyle/>
           <a:p>
             <a:r>
@@ -8694,6 +10366,92 @@
                 <a:schemeClr val="accent3"/>
               </a:solidFill>
             </a:endParaRPr>
+          </a:p>
+        </p:txBody>
+      </p:sp>
+      <p:sp>
+        <p:nvSpPr>
+          <p:cNvPr id="2" name="Date Placeholder 1">
+            <a:extLst>
+              <a:ext uri="{FF2B5EF4-FFF2-40B4-BE49-F238E27FC236}">
+                <a16:creationId xmlns:a16="http://schemas.microsoft.com/office/drawing/2014/main" id="{9858BAEB-4A55-2FE8-4416-0D64DD7C519B}"/>
+              </a:ext>
+            </a:extLst>
+          </p:cNvPr>
+          <p:cNvSpPr>
+            <a:spLocks noGrp="1"/>
+          </p:cNvSpPr>
+          <p:nvPr>
+            <p:ph type="dt" sz="half" idx="10"/>
+          </p:nvPr>
+        </p:nvSpPr>
+        <p:spPr/>
+        <p:txBody>
+          <a:bodyPr/>
+          <a:lstStyle/>
+          <a:p>
+            <a:fld id="{068DBBEA-CC14-7745-AFA8-ED7C93CAFDF7}" type="datetime1">
+              <a:rPr lang="en-US" smtClean="0"/>
+              <a:t>10/8/26</a:t>
+            </a:fld>
+            <a:endParaRPr lang="en-US"/>
+          </a:p>
+        </p:txBody>
+      </p:sp>
+      <p:sp>
+        <p:nvSpPr>
+          <p:cNvPr id="3" name="Footer Placeholder 2">
+            <a:extLst>
+              <a:ext uri="{FF2B5EF4-FFF2-40B4-BE49-F238E27FC236}">
+                <a16:creationId xmlns:a16="http://schemas.microsoft.com/office/drawing/2014/main" id="{5E51BC56-E17B-9EFE-7646-E6DEC47AFF6F}"/>
+              </a:ext>
+            </a:extLst>
+          </p:cNvPr>
+          <p:cNvSpPr>
+            <a:spLocks noGrp="1"/>
+          </p:cNvSpPr>
+          <p:nvPr>
+            <p:ph type="ftr" sz="quarter" idx="11"/>
+          </p:nvPr>
+        </p:nvSpPr>
+        <p:spPr/>
+        <p:txBody>
+          <a:bodyPr/>
+          <a:lstStyle/>
+          <a:p>
+            <a:r>
+              <a:rPr lang="en-US"/>
+              <a:t>© Steve Beaty and others as cited</a:t>
+            </a:r>
+          </a:p>
+        </p:txBody>
+      </p:sp>
+      <p:sp>
+        <p:nvSpPr>
+          <p:cNvPr id="6" name="Slide Number Placeholder 5">
+            <a:extLst>
+              <a:ext uri="{FF2B5EF4-FFF2-40B4-BE49-F238E27FC236}">
+                <a16:creationId xmlns:a16="http://schemas.microsoft.com/office/drawing/2014/main" id="{61BBB745-32F8-ED28-C536-46CA8E3AAEA2}"/>
+              </a:ext>
+            </a:extLst>
+          </p:cNvPr>
+          <p:cNvSpPr>
+            <a:spLocks noGrp="1"/>
+          </p:cNvSpPr>
+          <p:nvPr>
+            <p:ph type="sldNum" sz="quarter" idx="12"/>
+          </p:nvPr>
+        </p:nvSpPr>
+        <p:spPr/>
+        <p:txBody>
+          <a:bodyPr/>
+          <a:lstStyle/>
+          <a:p>
+            <a:fld id="{8BADA5E7-275A-0142-8584-066D5199CC3B}" type="slidenum">
+              <a:rPr lang="en-US" smtClean="0"/>
+              <a:t>34</a:t>
+            </a:fld>
+            <a:endParaRPr lang="en-US"/>
           </a:p>
         </p:txBody>
       </p:sp>
@@ -8757,7 +10515,9 @@
         </p:nvSpPr>
         <p:spPr/>
         <p:txBody>
-          <a:bodyPr/>
+          <a:bodyPr>
+            <a:normAutofit fontScale="90000"/>
+          </a:bodyPr>
           <a:lstStyle/>
           <a:p>
             <a:r>
@@ -8786,7 +10546,7 @@
         <p:spPr/>
         <p:txBody>
           <a:bodyPr>
-            <a:normAutofit fontScale="92500" lnSpcReduction="20000"/>
+            <a:normAutofit fontScale="85000" lnSpcReduction="20000"/>
           </a:bodyPr>
           <a:lstStyle/>
           <a:p>
@@ -9006,6 +10766,92 @@
                 </a:schemeClr>
               </a:solidFill>
             </a:endParaRPr>
+          </a:p>
+        </p:txBody>
+      </p:sp>
+      <p:sp>
+        <p:nvSpPr>
+          <p:cNvPr id="4" name="Date Placeholder 3">
+            <a:extLst>
+              <a:ext uri="{FF2B5EF4-FFF2-40B4-BE49-F238E27FC236}">
+                <a16:creationId xmlns:a16="http://schemas.microsoft.com/office/drawing/2014/main" id="{F8BE1721-2AE0-E8A7-9411-F1D8DD121962}"/>
+              </a:ext>
+            </a:extLst>
+          </p:cNvPr>
+          <p:cNvSpPr>
+            <a:spLocks noGrp="1"/>
+          </p:cNvSpPr>
+          <p:nvPr>
+            <p:ph type="dt" sz="half" idx="10"/>
+          </p:nvPr>
+        </p:nvSpPr>
+        <p:spPr/>
+        <p:txBody>
+          <a:bodyPr/>
+          <a:lstStyle/>
+          <a:p>
+            <a:fld id="{521FC58E-A026-7642-AB5B-C112C4E76510}" type="datetime1">
+              <a:rPr lang="en-US" smtClean="0"/>
+              <a:t>10/8/26</a:t>
+            </a:fld>
+            <a:endParaRPr lang="en-US"/>
+          </a:p>
+        </p:txBody>
+      </p:sp>
+      <p:sp>
+        <p:nvSpPr>
+          <p:cNvPr id="5" name="Footer Placeholder 4">
+            <a:extLst>
+              <a:ext uri="{FF2B5EF4-FFF2-40B4-BE49-F238E27FC236}">
+                <a16:creationId xmlns:a16="http://schemas.microsoft.com/office/drawing/2014/main" id="{34BBA0E4-B133-335C-09BB-3A449D0C16FA}"/>
+              </a:ext>
+            </a:extLst>
+          </p:cNvPr>
+          <p:cNvSpPr>
+            <a:spLocks noGrp="1"/>
+          </p:cNvSpPr>
+          <p:nvPr>
+            <p:ph type="ftr" sz="quarter" idx="11"/>
+          </p:nvPr>
+        </p:nvSpPr>
+        <p:spPr/>
+        <p:txBody>
+          <a:bodyPr/>
+          <a:lstStyle/>
+          <a:p>
+            <a:r>
+              <a:rPr lang="en-US"/>
+              <a:t>© Steve Beaty and others as cited</a:t>
+            </a:r>
+          </a:p>
+        </p:txBody>
+      </p:sp>
+      <p:sp>
+        <p:nvSpPr>
+          <p:cNvPr id="6" name="Slide Number Placeholder 5">
+            <a:extLst>
+              <a:ext uri="{FF2B5EF4-FFF2-40B4-BE49-F238E27FC236}">
+                <a16:creationId xmlns:a16="http://schemas.microsoft.com/office/drawing/2014/main" id="{D4275029-C660-3EDB-A751-221E51CB2300}"/>
+              </a:ext>
+            </a:extLst>
+          </p:cNvPr>
+          <p:cNvSpPr>
+            <a:spLocks noGrp="1"/>
+          </p:cNvSpPr>
+          <p:nvPr>
+            <p:ph type="sldNum" sz="quarter" idx="12"/>
+          </p:nvPr>
+        </p:nvSpPr>
+        <p:spPr/>
+        <p:txBody>
+          <a:bodyPr/>
+          <a:lstStyle/>
+          <a:p>
+            <a:fld id="{8BADA5E7-275A-0142-8584-066D5199CC3B}" type="slidenum">
+              <a:rPr lang="en-US" smtClean="0"/>
+              <a:t>35</a:t>
+            </a:fld>
+            <a:endParaRPr lang="en-US"/>
           </a:p>
         </p:txBody>
       </p:sp>
@@ -9019,6 +10865,18 @@
   <p:clrMapOvr>
     <a:masterClrMapping/>
   </p:clrMapOvr>
+  <mc:AlternateContent xmlns:mc="http://schemas.openxmlformats.org/markup-compatibility/2006" xmlns:p14="http://schemas.microsoft.com/office/powerpoint/2010/main">
+    <mc:Choice Requires="p14">
+      <p:transition spd="slow" p14:dur="2000">
+        <p14:prism isContent="1"/>
+      </p:transition>
+    </mc:Choice>
+    <mc:Fallback xmlns="">
+      <p:transition spd="slow">
+        <p:fade/>
+      </p:transition>
+    </mc:Fallback>
+  </mc:AlternateContent>
 </p:sld>
 </file>
 
@@ -9057,7 +10915,9 @@
         </p:nvSpPr>
         <p:spPr/>
         <p:txBody>
-          <a:bodyPr/>
+          <a:bodyPr>
+            <a:normAutofit fontScale="90000"/>
+          </a:bodyPr>
           <a:lstStyle/>
           <a:p>
             <a:r>
@@ -9086,7 +10946,7 @@
         <p:spPr/>
         <p:txBody>
           <a:bodyPr>
-            <a:normAutofit fontScale="92500" lnSpcReduction="20000"/>
+            <a:normAutofit fontScale="85000" lnSpcReduction="20000"/>
           </a:bodyPr>
           <a:lstStyle/>
           <a:p>
@@ -9282,6 +11142,92 @@
                 <a:schemeClr val="accent3"/>
               </a:solidFill>
             </a:endParaRPr>
+          </a:p>
+        </p:txBody>
+      </p:sp>
+      <p:sp>
+        <p:nvSpPr>
+          <p:cNvPr id="4" name="Date Placeholder 3">
+            <a:extLst>
+              <a:ext uri="{FF2B5EF4-FFF2-40B4-BE49-F238E27FC236}">
+                <a16:creationId xmlns:a16="http://schemas.microsoft.com/office/drawing/2014/main" id="{02738981-6155-FCAD-E46B-B548EB458980}"/>
+              </a:ext>
+            </a:extLst>
+          </p:cNvPr>
+          <p:cNvSpPr>
+            <a:spLocks noGrp="1"/>
+          </p:cNvSpPr>
+          <p:nvPr>
+            <p:ph type="dt" sz="half" idx="10"/>
+          </p:nvPr>
+        </p:nvSpPr>
+        <p:spPr/>
+        <p:txBody>
+          <a:bodyPr/>
+          <a:lstStyle/>
+          <a:p>
+            <a:fld id="{C059E369-7D2A-E74D-B54C-1039275B1A17}" type="datetime1">
+              <a:rPr lang="en-US" smtClean="0"/>
+              <a:t>10/8/26</a:t>
+            </a:fld>
+            <a:endParaRPr lang="en-US"/>
+          </a:p>
+        </p:txBody>
+      </p:sp>
+      <p:sp>
+        <p:nvSpPr>
+          <p:cNvPr id="5" name="Footer Placeholder 4">
+            <a:extLst>
+              <a:ext uri="{FF2B5EF4-FFF2-40B4-BE49-F238E27FC236}">
+                <a16:creationId xmlns:a16="http://schemas.microsoft.com/office/drawing/2014/main" id="{259533B6-9A72-C9E3-2A99-84672FF053CD}"/>
+              </a:ext>
+            </a:extLst>
+          </p:cNvPr>
+          <p:cNvSpPr>
+            <a:spLocks noGrp="1"/>
+          </p:cNvSpPr>
+          <p:nvPr>
+            <p:ph type="ftr" sz="quarter" idx="11"/>
+          </p:nvPr>
+        </p:nvSpPr>
+        <p:spPr/>
+        <p:txBody>
+          <a:bodyPr/>
+          <a:lstStyle/>
+          <a:p>
+            <a:r>
+              <a:rPr lang="en-US"/>
+              <a:t>© Steve Beaty and others as cited</a:t>
+            </a:r>
+          </a:p>
+        </p:txBody>
+      </p:sp>
+      <p:sp>
+        <p:nvSpPr>
+          <p:cNvPr id="6" name="Slide Number Placeholder 5">
+            <a:extLst>
+              <a:ext uri="{FF2B5EF4-FFF2-40B4-BE49-F238E27FC236}">
+                <a16:creationId xmlns:a16="http://schemas.microsoft.com/office/drawing/2014/main" id="{EA7625C1-6107-06E5-1C02-36731D05CDE3}"/>
+              </a:ext>
+            </a:extLst>
+          </p:cNvPr>
+          <p:cNvSpPr>
+            <a:spLocks noGrp="1"/>
+          </p:cNvSpPr>
+          <p:nvPr>
+            <p:ph type="sldNum" sz="quarter" idx="12"/>
+          </p:nvPr>
+        </p:nvSpPr>
+        <p:spPr/>
+        <p:txBody>
+          <a:bodyPr/>
+          <a:lstStyle/>
+          <a:p>
+            <a:fld id="{8BADA5E7-275A-0142-8584-066D5199CC3B}" type="slidenum">
+              <a:rPr lang="en-US" smtClean="0"/>
+              <a:t>36</a:t>
+            </a:fld>
+            <a:endParaRPr lang="en-US"/>
           </a:p>
         </p:txBody>
       </p:sp>
@@ -9295,6 +11241,18 @@
   <p:clrMapOvr>
     <a:masterClrMapping/>
   </p:clrMapOvr>
+  <mc:AlternateContent xmlns:mc="http://schemas.openxmlformats.org/markup-compatibility/2006" xmlns:p14="http://schemas.microsoft.com/office/powerpoint/2010/main">
+    <mc:Choice Requires="p14">
+      <p:transition spd="slow" p14:dur="2000">
+        <p14:prism isContent="1"/>
+      </p:transition>
+    </mc:Choice>
+    <mc:Fallback xmlns="">
+      <p:transition spd="slow">
+        <p:fade/>
+      </p:transition>
+    </mc:Fallback>
+  </mc:AlternateContent>
 </p:sld>
 </file>
 
@@ -9333,7 +11291,9 @@
         </p:nvSpPr>
         <p:spPr/>
         <p:txBody>
-          <a:bodyPr/>
+          <a:bodyPr>
+            <a:normAutofit fontScale="90000"/>
+          </a:bodyPr>
           <a:lstStyle/>
           <a:p>
             <a:r>
@@ -9370,7 +11330,7 @@
         <p:spPr/>
         <p:txBody>
           <a:bodyPr>
-            <a:normAutofit fontScale="85000" lnSpcReduction="20000"/>
+            <a:normAutofit fontScale="77500" lnSpcReduction="20000"/>
           </a:bodyPr>
           <a:lstStyle/>
           <a:p>
@@ -9666,6 +11626,92 @@
               </a:rPr>
               <a:t>p c2f(100)  # =&gt; 212.0</a:t>
             </a:r>
+          </a:p>
+        </p:txBody>
+      </p:sp>
+      <p:sp>
+        <p:nvSpPr>
+          <p:cNvPr id="2" name="Date Placeholder 1">
+            <a:extLst>
+              <a:ext uri="{FF2B5EF4-FFF2-40B4-BE49-F238E27FC236}">
+                <a16:creationId xmlns:a16="http://schemas.microsoft.com/office/drawing/2014/main" id="{D5646EF0-BAF4-D0C9-93C8-28A5AA2F89E2}"/>
+              </a:ext>
+            </a:extLst>
+          </p:cNvPr>
+          <p:cNvSpPr>
+            <a:spLocks noGrp="1"/>
+          </p:cNvSpPr>
+          <p:nvPr>
+            <p:ph type="dt" sz="half" idx="14"/>
+          </p:nvPr>
+        </p:nvSpPr>
+        <p:spPr/>
+        <p:txBody>
+          <a:bodyPr/>
+          <a:lstStyle/>
+          <a:p>
+            <a:fld id="{A61CB4D3-572E-C049-AC95-329274B2EEE1}" type="datetime1">
+              <a:rPr lang="en-US" smtClean="0"/>
+              <a:t>10/8/26</a:t>
+            </a:fld>
+            <a:endParaRPr lang="en-US"/>
+          </a:p>
+        </p:txBody>
+      </p:sp>
+      <p:sp>
+        <p:nvSpPr>
+          <p:cNvPr id="3" name="Footer Placeholder 2">
+            <a:extLst>
+              <a:ext uri="{FF2B5EF4-FFF2-40B4-BE49-F238E27FC236}">
+                <a16:creationId xmlns:a16="http://schemas.microsoft.com/office/drawing/2014/main" id="{342ECC3B-31E1-B342-D0C9-6DE030787079}"/>
+              </a:ext>
+            </a:extLst>
+          </p:cNvPr>
+          <p:cNvSpPr>
+            <a:spLocks noGrp="1"/>
+          </p:cNvSpPr>
+          <p:nvPr>
+            <p:ph type="ftr" sz="quarter" idx="15"/>
+          </p:nvPr>
+        </p:nvSpPr>
+        <p:spPr/>
+        <p:txBody>
+          <a:bodyPr/>
+          <a:lstStyle/>
+          <a:p>
+            <a:r>
+              <a:rPr lang="en-US"/>
+              <a:t>© Steve Beaty and others as cited</a:t>
+            </a:r>
+          </a:p>
+        </p:txBody>
+      </p:sp>
+      <p:sp>
+        <p:nvSpPr>
+          <p:cNvPr id="5" name="Slide Number Placeholder 4">
+            <a:extLst>
+              <a:ext uri="{FF2B5EF4-FFF2-40B4-BE49-F238E27FC236}">
+                <a16:creationId xmlns:a16="http://schemas.microsoft.com/office/drawing/2014/main" id="{7B47712D-E0AD-8C78-6837-48CED3B40F38}"/>
+              </a:ext>
+            </a:extLst>
+          </p:cNvPr>
+          <p:cNvSpPr>
+            <a:spLocks noGrp="1"/>
+          </p:cNvSpPr>
+          <p:nvPr>
+            <p:ph type="sldNum" sz="quarter" idx="16"/>
+          </p:nvPr>
+        </p:nvSpPr>
+        <p:spPr/>
+        <p:txBody>
+          <a:bodyPr/>
+          <a:lstStyle/>
+          <a:p>
+            <a:fld id="{8BADA5E7-275A-0142-8584-066D5199CC3B}" type="slidenum">
+              <a:rPr lang="en-US" smtClean="0"/>
+              <a:t>37</a:t>
+            </a:fld>
+            <a:endParaRPr lang="en-US"/>
           </a:p>
         </p:txBody>
       </p:sp>
@@ -9739,6 +11785,92 @@
           </a:p>
         </p:txBody>
       </p:sp>
+      <p:sp>
+        <p:nvSpPr>
+          <p:cNvPr id="2" name="Date Placeholder 1">
+            <a:extLst>
+              <a:ext uri="{FF2B5EF4-FFF2-40B4-BE49-F238E27FC236}">
+                <a16:creationId xmlns:a16="http://schemas.microsoft.com/office/drawing/2014/main" id="{9AF4262B-6EAA-293A-5409-33CF978A398B}"/>
+              </a:ext>
+            </a:extLst>
+          </p:cNvPr>
+          <p:cNvSpPr>
+            <a:spLocks noGrp="1"/>
+          </p:cNvSpPr>
+          <p:nvPr>
+            <p:ph type="dt" sz="half" idx="10"/>
+          </p:nvPr>
+        </p:nvSpPr>
+        <p:spPr/>
+        <p:txBody>
+          <a:bodyPr/>
+          <a:lstStyle/>
+          <a:p>
+            <a:fld id="{5D56BAD6-08A0-0945-90DF-24F121E75CCA}" type="datetime1">
+              <a:rPr lang="en-US" smtClean="0"/>
+              <a:t>10/8/26</a:t>
+            </a:fld>
+            <a:endParaRPr lang="en-US"/>
+          </a:p>
+        </p:txBody>
+      </p:sp>
+      <p:sp>
+        <p:nvSpPr>
+          <p:cNvPr id="3" name="Footer Placeholder 2">
+            <a:extLst>
+              <a:ext uri="{FF2B5EF4-FFF2-40B4-BE49-F238E27FC236}">
+                <a16:creationId xmlns:a16="http://schemas.microsoft.com/office/drawing/2014/main" id="{35068758-EECF-5D6B-837A-64878FA9EC59}"/>
+              </a:ext>
+            </a:extLst>
+          </p:cNvPr>
+          <p:cNvSpPr>
+            <a:spLocks noGrp="1"/>
+          </p:cNvSpPr>
+          <p:nvPr>
+            <p:ph type="ftr" sz="quarter" idx="11"/>
+          </p:nvPr>
+        </p:nvSpPr>
+        <p:spPr/>
+        <p:txBody>
+          <a:bodyPr/>
+          <a:lstStyle/>
+          <a:p>
+            <a:r>
+              <a:rPr lang="en-US"/>
+              <a:t>© Steve Beaty and others as cited</a:t>
+            </a:r>
+          </a:p>
+        </p:txBody>
+      </p:sp>
+      <p:sp>
+        <p:nvSpPr>
+          <p:cNvPr id="4" name="Slide Number Placeholder 3">
+            <a:extLst>
+              <a:ext uri="{FF2B5EF4-FFF2-40B4-BE49-F238E27FC236}">
+                <a16:creationId xmlns:a16="http://schemas.microsoft.com/office/drawing/2014/main" id="{B81E0A26-24A0-0A84-B131-B4A4A714BE5F}"/>
+              </a:ext>
+            </a:extLst>
+          </p:cNvPr>
+          <p:cNvSpPr>
+            <a:spLocks noGrp="1"/>
+          </p:cNvSpPr>
+          <p:nvPr>
+            <p:ph type="sldNum" sz="quarter" idx="12"/>
+          </p:nvPr>
+        </p:nvSpPr>
+        <p:spPr/>
+        <p:txBody>
+          <a:bodyPr/>
+          <a:lstStyle/>
+          <a:p>
+            <a:fld id="{8BADA5E7-275A-0142-8584-066D5199CC3B}" type="slidenum">
+              <a:rPr lang="en-US" smtClean="0"/>
+              <a:t>38</a:t>
+            </a:fld>
+            <a:endParaRPr lang="en-US"/>
+          </a:p>
+        </p:txBody>
+      </p:sp>
     </p:spTree>
     <p:extLst>
       <p:ext uri="{BB962C8B-B14F-4D97-AF65-F5344CB8AC3E}">
@@ -9771,6 +11903,36 @@
       </p:grpSpPr>
       <p:sp>
         <p:nvSpPr>
+          <p:cNvPr id="3" name="Title 2">
+            <a:extLst>
+              <a:ext uri="{FF2B5EF4-FFF2-40B4-BE49-F238E27FC236}">
+                <a16:creationId xmlns:a16="http://schemas.microsoft.com/office/drawing/2014/main" id="{F4C42922-4EEB-DE81-F4DF-C6D397A53448}"/>
+              </a:ext>
+            </a:extLst>
+          </p:cNvPr>
+          <p:cNvSpPr>
+            <a:spLocks noGrp="1"/>
+          </p:cNvSpPr>
+          <p:nvPr>
+            <p:ph type="title"/>
+          </p:nvPr>
+        </p:nvSpPr>
+        <p:spPr/>
+        <p:txBody>
+          <a:bodyPr>
+            <a:normAutofit fontScale="90000"/>
+          </a:bodyPr>
+          <a:lstStyle/>
+          <a:p>
+            <a:r>
+              <a:rPr lang="en-US" dirty="0"/>
+              <a:t>The O+1 (P): Polymorphism</a:t>
+            </a:r>
+          </a:p>
+        </p:txBody>
+      </p:sp>
+      <p:sp>
+        <p:nvSpPr>
           <p:cNvPr id="4" name="Content Placeholder 3">
             <a:extLst>
               <a:ext uri="{FF2B5EF4-FFF2-40B4-BE49-F238E27FC236}">
@@ -9805,31 +11967,87 @@
       </p:sp>
       <p:sp>
         <p:nvSpPr>
-          <p:cNvPr id="3" name="Title 2">
-            <a:extLst>
-              <a:ext uri="{FF2B5EF4-FFF2-40B4-BE49-F238E27FC236}">
-                <a16:creationId xmlns:a16="http://schemas.microsoft.com/office/drawing/2014/main" id="{F4C42922-4EEB-DE81-F4DF-C6D397A53448}"/>
-              </a:ext>
-            </a:extLst>
-          </p:cNvPr>
-          <p:cNvSpPr>
-            <a:spLocks noGrp="1"/>
-          </p:cNvSpPr>
-          <p:nvPr>
-            <p:ph type="title"/>
-          </p:nvPr>
-        </p:nvSpPr>
-        <p:spPr/>
-        <p:txBody>
-          <a:bodyPr>
-            <a:normAutofit/>
-          </a:bodyPr>
-          <a:lstStyle/>
-          <a:p>
-            <a:r>
-              <a:rPr lang="en-US" dirty="0"/>
-              <a:t>The O+1 (P): Polymorphism</a:t>
-            </a:r>
+          <p:cNvPr id="2" name="Date Placeholder 1">
+            <a:extLst>
+              <a:ext uri="{FF2B5EF4-FFF2-40B4-BE49-F238E27FC236}">
+                <a16:creationId xmlns:a16="http://schemas.microsoft.com/office/drawing/2014/main" id="{804B693F-64D7-362F-7314-4ECFD426627F}"/>
+              </a:ext>
+            </a:extLst>
+          </p:cNvPr>
+          <p:cNvSpPr>
+            <a:spLocks noGrp="1"/>
+          </p:cNvSpPr>
+          <p:nvPr>
+            <p:ph type="dt" sz="half" idx="10"/>
+          </p:nvPr>
+        </p:nvSpPr>
+        <p:spPr/>
+        <p:txBody>
+          <a:bodyPr/>
+          <a:lstStyle/>
+          <a:p>
+            <a:fld id="{4806EA6F-75C9-894C-819B-83D31812426F}" type="datetime1">
+              <a:rPr lang="en-US" smtClean="0"/>
+              <a:t>10/8/26</a:t>
+            </a:fld>
+            <a:endParaRPr lang="en-US"/>
+          </a:p>
+        </p:txBody>
+      </p:sp>
+      <p:sp>
+        <p:nvSpPr>
+          <p:cNvPr id="5" name="Footer Placeholder 4">
+            <a:extLst>
+              <a:ext uri="{FF2B5EF4-FFF2-40B4-BE49-F238E27FC236}">
+                <a16:creationId xmlns:a16="http://schemas.microsoft.com/office/drawing/2014/main" id="{E5D6621E-01F4-FEA5-4B53-B49B5BC0C5ED}"/>
+              </a:ext>
+            </a:extLst>
+          </p:cNvPr>
+          <p:cNvSpPr>
+            <a:spLocks noGrp="1"/>
+          </p:cNvSpPr>
+          <p:nvPr>
+            <p:ph type="ftr" sz="quarter" idx="11"/>
+          </p:nvPr>
+        </p:nvSpPr>
+        <p:spPr/>
+        <p:txBody>
+          <a:bodyPr/>
+          <a:lstStyle/>
+          <a:p>
+            <a:r>
+              <a:rPr lang="en-US"/>
+              <a:t>© Steve Beaty and others as cited</a:t>
+            </a:r>
+          </a:p>
+        </p:txBody>
+      </p:sp>
+      <p:sp>
+        <p:nvSpPr>
+          <p:cNvPr id="6" name="Slide Number Placeholder 5">
+            <a:extLst>
+              <a:ext uri="{FF2B5EF4-FFF2-40B4-BE49-F238E27FC236}">
+                <a16:creationId xmlns:a16="http://schemas.microsoft.com/office/drawing/2014/main" id="{A0CF9770-2474-7D79-EE2D-7BCDB49FB949}"/>
+              </a:ext>
+            </a:extLst>
+          </p:cNvPr>
+          <p:cNvSpPr>
+            <a:spLocks noGrp="1"/>
+          </p:cNvSpPr>
+          <p:nvPr>
+            <p:ph type="sldNum" sz="quarter" idx="12"/>
+          </p:nvPr>
+        </p:nvSpPr>
+        <p:spPr/>
+        <p:txBody>
+          <a:bodyPr/>
+          <a:lstStyle/>
+          <a:p>
+            <a:fld id="{8BADA5E7-275A-0142-8584-066D5199CC3B}" type="slidenum">
+              <a:rPr lang="en-US" smtClean="0"/>
+              <a:t>39</a:t>
+            </a:fld>
+            <a:endParaRPr lang="en-US"/>
           </a:p>
         </p:txBody>
       </p:sp>
@@ -9845,12 +12063,12 @@
   </p:clrMapOvr>
   <mc:AlternateContent xmlns:mc="http://schemas.openxmlformats.org/markup-compatibility/2006" xmlns:p14="http://schemas.microsoft.com/office/powerpoint/2010/main">
     <mc:Choice Requires="p14">
-      <p:transition spd="slow" p14:dur="1200">
-        <p14:prism/>
+      <p:transition spd="slow" p14:dur="2000">
+        <p14:prism isContent="1"/>
       </p:transition>
     </mc:Choice>
     <mc:Fallback xmlns="">
-      <p:transition xmlns:p14="http://schemas.microsoft.com/office/powerpoint/2010/main" spd="slow">
+      <p:transition spd="slow">
         <p:fade/>
       </p:transition>
     </mc:Fallback>
@@ -9877,6 +12095,36 @@
       </p:grpSpPr>
       <p:sp>
         <p:nvSpPr>
+          <p:cNvPr id="3" name="Title 2">
+            <a:extLst>
+              <a:ext uri="{FF2B5EF4-FFF2-40B4-BE49-F238E27FC236}">
+                <a16:creationId xmlns:a16="http://schemas.microsoft.com/office/drawing/2014/main" id="{11E8B7F2-DE01-FB05-41E2-90E168EA6C35}"/>
+              </a:ext>
+            </a:extLst>
+          </p:cNvPr>
+          <p:cNvSpPr>
+            <a:spLocks noGrp="1"/>
+          </p:cNvSpPr>
+          <p:nvPr>
+            <p:ph type="title"/>
+          </p:nvPr>
+        </p:nvSpPr>
+        <p:spPr/>
+        <p:txBody>
+          <a:bodyPr>
+            <a:normAutofit fontScale="90000"/>
+          </a:bodyPr>
+          <a:lstStyle/>
+          <a:p>
+            <a:r>
+              <a:rPr lang="en-US" dirty="0"/>
+              <a:t>Learning Outcomes</a:t>
+            </a:r>
+          </a:p>
+        </p:txBody>
+      </p:sp>
+      <p:sp>
+        <p:nvSpPr>
           <p:cNvPr id="2" name="Content Placeholder 1">
             <a:extLst>
               <a:ext uri="{FF2B5EF4-FFF2-40B4-BE49-F238E27FC236}">
@@ -9894,7 +12142,7 @@
         <p:spPr/>
         <p:txBody>
           <a:bodyPr>
-            <a:normAutofit fontScale="85000" lnSpcReduction="10000"/>
+            <a:normAutofit fontScale="85000" lnSpcReduction="20000"/>
           </a:bodyPr>
           <a:lstStyle/>
           <a:p>
@@ -9947,31 +12195,87 @@
       </p:sp>
       <p:sp>
         <p:nvSpPr>
-          <p:cNvPr id="3" name="Title 2">
-            <a:extLst>
-              <a:ext uri="{FF2B5EF4-FFF2-40B4-BE49-F238E27FC236}">
-                <a16:creationId xmlns:a16="http://schemas.microsoft.com/office/drawing/2014/main" id="{11E8B7F2-DE01-FB05-41E2-90E168EA6C35}"/>
-              </a:ext>
-            </a:extLst>
-          </p:cNvPr>
-          <p:cNvSpPr>
-            <a:spLocks noGrp="1"/>
-          </p:cNvSpPr>
-          <p:nvPr>
-            <p:ph type="title"/>
-          </p:nvPr>
-        </p:nvSpPr>
-        <p:spPr/>
-        <p:txBody>
-          <a:bodyPr>
-            <a:normAutofit/>
-          </a:bodyPr>
-          <a:lstStyle/>
-          <a:p>
-            <a:r>
-              <a:rPr lang="en-US" dirty="0"/>
-              <a:t>Learning Outcomes</a:t>
-            </a:r>
+          <p:cNvPr id="4" name="Date Placeholder 3">
+            <a:extLst>
+              <a:ext uri="{FF2B5EF4-FFF2-40B4-BE49-F238E27FC236}">
+                <a16:creationId xmlns:a16="http://schemas.microsoft.com/office/drawing/2014/main" id="{35B9309D-5D8F-8DC6-2802-F4EA536D49B3}"/>
+              </a:ext>
+            </a:extLst>
+          </p:cNvPr>
+          <p:cNvSpPr>
+            <a:spLocks noGrp="1"/>
+          </p:cNvSpPr>
+          <p:nvPr>
+            <p:ph type="dt" sz="half" idx="10"/>
+          </p:nvPr>
+        </p:nvSpPr>
+        <p:spPr/>
+        <p:txBody>
+          <a:bodyPr/>
+          <a:lstStyle/>
+          <a:p>
+            <a:fld id="{9319E87E-7FD4-7C40-97B7-4078D69332D7}" type="datetime1">
+              <a:rPr lang="en-US" smtClean="0"/>
+              <a:t>10/8/26</a:t>
+            </a:fld>
+            <a:endParaRPr lang="en-US"/>
+          </a:p>
+        </p:txBody>
+      </p:sp>
+      <p:sp>
+        <p:nvSpPr>
+          <p:cNvPr id="5" name="Footer Placeholder 4">
+            <a:extLst>
+              <a:ext uri="{FF2B5EF4-FFF2-40B4-BE49-F238E27FC236}">
+                <a16:creationId xmlns:a16="http://schemas.microsoft.com/office/drawing/2014/main" id="{D5546344-63B6-085B-C1DB-80B7B9A88A31}"/>
+              </a:ext>
+            </a:extLst>
+          </p:cNvPr>
+          <p:cNvSpPr>
+            <a:spLocks noGrp="1"/>
+          </p:cNvSpPr>
+          <p:nvPr>
+            <p:ph type="ftr" sz="quarter" idx="11"/>
+          </p:nvPr>
+        </p:nvSpPr>
+        <p:spPr/>
+        <p:txBody>
+          <a:bodyPr/>
+          <a:lstStyle/>
+          <a:p>
+            <a:r>
+              <a:rPr lang="en-US"/>
+              <a:t>© Steve Beaty and others as cited</a:t>
+            </a:r>
+          </a:p>
+        </p:txBody>
+      </p:sp>
+      <p:sp>
+        <p:nvSpPr>
+          <p:cNvPr id="6" name="Slide Number Placeholder 5">
+            <a:extLst>
+              <a:ext uri="{FF2B5EF4-FFF2-40B4-BE49-F238E27FC236}">
+                <a16:creationId xmlns:a16="http://schemas.microsoft.com/office/drawing/2014/main" id="{14FD1AC1-A09B-F02E-3DF7-05EDF2080ACC}"/>
+              </a:ext>
+            </a:extLst>
+          </p:cNvPr>
+          <p:cNvSpPr>
+            <a:spLocks noGrp="1"/>
+          </p:cNvSpPr>
+          <p:nvPr>
+            <p:ph type="sldNum" sz="quarter" idx="12"/>
+          </p:nvPr>
+        </p:nvSpPr>
+        <p:spPr/>
+        <p:txBody>
+          <a:bodyPr/>
+          <a:lstStyle/>
+          <a:p>
+            <a:fld id="{8BADA5E7-275A-0142-8584-066D5199CC3B}" type="slidenum">
+              <a:rPr lang="en-US" smtClean="0"/>
+              <a:t>4</a:t>
+            </a:fld>
+            <a:endParaRPr lang="en-US"/>
           </a:p>
         </p:txBody>
       </p:sp>
@@ -9987,12 +12291,12 @@
   </p:clrMapOvr>
   <mc:AlternateContent xmlns:mc="http://schemas.openxmlformats.org/markup-compatibility/2006" xmlns:p14="http://schemas.microsoft.com/office/powerpoint/2010/main">
     <mc:Choice Requires="p14">
-      <p:transition spd="slow" p14:dur="1200">
-        <p14:prism/>
+      <p:transition spd="slow" p14:dur="2000">
+        <p14:prism isContent="1"/>
       </p:transition>
     </mc:Choice>
     <mc:Fallback xmlns="">
-      <p:transition xmlns:p14="http://schemas.microsoft.com/office/powerpoint/2010/main" spd="slow">
+      <p:transition spd="slow">
         <p:fade/>
       </p:transition>
     </mc:Fallback>
@@ -10036,7 +12340,7 @@
         <p:spPr/>
         <p:txBody>
           <a:bodyPr>
-            <a:normAutofit/>
+            <a:normAutofit fontScale="90000"/>
           </a:bodyPr>
           <a:lstStyle/>
           <a:p>
@@ -10066,7 +12370,7 @@
         <p:spPr/>
         <p:txBody>
           <a:bodyPr>
-            <a:normAutofit fontScale="92500" lnSpcReduction="20000"/>
+            <a:normAutofit fontScale="85000" lnSpcReduction="20000"/>
           </a:bodyPr>
           <a:lstStyle/>
           <a:p>
@@ -10176,6 +12480,92 @@
           </a:p>
           <a:p>
             <a:endParaRPr lang="en-US" dirty="0"/>
+          </a:p>
+        </p:txBody>
+      </p:sp>
+      <p:sp>
+        <p:nvSpPr>
+          <p:cNvPr id="4" name="Date Placeholder 3">
+            <a:extLst>
+              <a:ext uri="{FF2B5EF4-FFF2-40B4-BE49-F238E27FC236}">
+                <a16:creationId xmlns:a16="http://schemas.microsoft.com/office/drawing/2014/main" id="{C1FA8C09-E312-6AE1-8B36-9D0718878341}"/>
+              </a:ext>
+            </a:extLst>
+          </p:cNvPr>
+          <p:cNvSpPr>
+            <a:spLocks noGrp="1"/>
+          </p:cNvSpPr>
+          <p:nvPr>
+            <p:ph type="dt" sz="half" idx="10"/>
+          </p:nvPr>
+        </p:nvSpPr>
+        <p:spPr/>
+        <p:txBody>
+          <a:bodyPr/>
+          <a:lstStyle/>
+          <a:p>
+            <a:fld id="{E52C9A1E-BF40-FA4D-8301-3341A4CD6720}" type="datetime1">
+              <a:rPr lang="en-US" smtClean="0"/>
+              <a:t>10/8/26</a:t>
+            </a:fld>
+            <a:endParaRPr lang="en-US"/>
+          </a:p>
+        </p:txBody>
+      </p:sp>
+      <p:sp>
+        <p:nvSpPr>
+          <p:cNvPr id="5" name="Footer Placeholder 4">
+            <a:extLst>
+              <a:ext uri="{FF2B5EF4-FFF2-40B4-BE49-F238E27FC236}">
+                <a16:creationId xmlns:a16="http://schemas.microsoft.com/office/drawing/2014/main" id="{685FBB14-80DF-C685-D60E-861BD50CCE45}"/>
+              </a:ext>
+            </a:extLst>
+          </p:cNvPr>
+          <p:cNvSpPr>
+            <a:spLocks noGrp="1"/>
+          </p:cNvSpPr>
+          <p:nvPr>
+            <p:ph type="ftr" sz="quarter" idx="11"/>
+          </p:nvPr>
+        </p:nvSpPr>
+        <p:spPr/>
+        <p:txBody>
+          <a:bodyPr/>
+          <a:lstStyle/>
+          <a:p>
+            <a:r>
+              <a:rPr lang="en-US"/>
+              <a:t>© Steve Beaty and others as cited</a:t>
+            </a:r>
+          </a:p>
+        </p:txBody>
+      </p:sp>
+      <p:sp>
+        <p:nvSpPr>
+          <p:cNvPr id="6" name="Slide Number Placeholder 5">
+            <a:extLst>
+              <a:ext uri="{FF2B5EF4-FFF2-40B4-BE49-F238E27FC236}">
+                <a16:creationId xmlns:a16="http://schemas.microsoft.com/office/drawing/2014/main" id="{FB79A118-876D-1FF2-FA75-45D34B927E7F}"/>
+              </a:ext>
+            </a:extLst>
+          </p:cNvPr>
+          <p:cNvSpPr>
+            <a:spLocks noGrp="1"/>
+          </p:cNvSpPr>
+          <p:nvPr>
+            <p:ph type="sldNum" sz="quarter" idx="12"/>
+          </p:nvPr>
+        </p:nvSpPr>
+        <p:spPr/>
+        <p:txBody>
+          <a:bodyPr/>
+          <a:lstStyle/>
+          <a:p>
+            <a:fld id="{8BADA5E7-275A-0142-8584-066D5199CC3B}" type="slidenum">
+              <a:rPr lang="en-US" smtClean="0"/>
+              <a:t>40</a:t>
+            </a:fld>
+            <a:endParaRPr lang="en-US"/>
           </a:p>
         </p:txBody>
       </p:sp>
@@ -10249,6 +12639,92 @@
           </a:p>
         </p:txBody>
       </p:sp>
+      <p:sp>
+        <p:nvSpPr>
+          <p:cNvPr id="2" name="Date Placeholder 1">
+            <a:extLst>
+              <a:ext uri="{FF2B5EF4-FFF2-40B4-BE49-F238E27FC236}">
+                <a16:creationId xmlns:a16="http://schemas.microsoft.com/office/drawing/2014/main" id="{2383D547-A242-FB93-C2EB-F38DD32F3A78}"/>
+              </a:ext>
+            </a:extLst>
+          </p:cNvPr>
+          <p:cNvSpPr>
+            <a:spLocks noGrp="1"/>
+          </p:cNvSpPr>
+          <p:nvPr>
+            <p:ph type="dt" sz="half" idx="10"/>
+          </p:nvPr>
+        </p:nvSpPr>
+        <p:spPr/>
+        <p:txBody>
+          <a:bodyPr/>
+          <a:lstStyle/>
+          <a:p>
+            <a:fld id="{415B38A2-7678-FD47-82BB-06080A8D4722}" type="datetime1">
+              <a:rPr lang="en-US" smtClean="0"/>
+              <a:t>10/8/26</a:t>
+            </a:fld>
+            <a:endParaRPr lang="en-US"/>
+          </a:p>
+        </p:txBody>
+      </p:sp>
+      <p:sp>
+        <p:nvSpPr>
+          <p:cNvPr id="3" name="Footer Placeholder 2">
+            <a:extLst>
+              <a:ext uri="{FF2B5EF4-FFF2-40B4-BE49-F238E27FC236}">
+                <a16:creationId xmlns:a16="http://schemas.microsoft.com/office/drawing/2014/main" id="{A3EFB366-555E-2787-9D97-14FE29A5D6D6}"/>
+              </a:ext>
+            </a:extLst>
+          </p:cNvPr>
+          <p:cNvSpPr>
+            <a:spLocks noGrp="1"/>
+          </p:cNvSpPr>
+          <p:nvPr>
+            <p:ph type="ftr" sz="quarter" idx="11"/>
+          </p:nvPr>
+        </p:nvSpPr>
+        <p:spPr/>
+        <p:txBody>
+          <a:bodyPr/>
+          <a:lstStyle/>
+          <a:p>
+            <a:r>
+              <a:rPr lang="en-US"/>
+              <a:t>© Steve Beaty and others as cited</a:t>
+            </a:r>
+          </a:p>
+        </p:txBody>
+      </p:sp>
+      <p:sp>
+        <p:nvSpPr>
+          <p:cNvPr id="5" name="Slide Number Placeholder 4">
+            <a:extLst>
+              <a:ext uri="{FF2B5EF4-FFF2-40B4-BE49-F238E27FC236}">
+                <a16:creationId xmlns:a16="http://schemas.microsoft.com/office/drawing/2014/main" id="{A91E2076-7384-1B8A-1545-97DF66C4575D}"/>
+              </a:ext>
+            </a:extLst>
+          </p:cNvPr>
+          <p:cNvSpPr>
+            <a:spLocks noGrp="1"/>
+          </p:cNvSpPr>
+          <p:nvPr>
+            <p:ph type="sldNum" sz="quarter" idx="12"/>
+          </p:nvPr>
+        </p:nvSpPr>
+        <p:spPr/>
+        <p:txBody>
+          <a:bodyPr/>
+          <a:lstStyle/>
+          <a:p>
+            <a:fld id="{8BADA5E7-275A-0142-8584-066D5199CC3B}" type="slidenum">
+              <a:rPr lang="en-US" smtClean="0"/>
+              <a:t>41</a:t>
+            </a:fld>
+            <a:endParaRPr lang="en-US"/>
+          </a:p>
+        </p:txBody>
+      </p:sp>
     </p:spTree>
     <p:extLst>
       <p:ext uri="{BB962C8B-B14F-4D97-AF65-F5344CB8AC3E}">
@@ -10281,6 +12757,36 @@
       </p:grpSpPr>
       <p:sp>
         <p:nvSpPr>
+          <p:cNvPr id="3" name="Title 2">
+            <a:extLst>
+              <a:ext uri="{FF2B5EF4-FFF2-40B4-BE49-F238E27FC236}">
+                <a16:creationId xmlns:a16="http://schemas.microsoft.com/office/drawing/2014/main" id="{A5D39663-4D0B-C4DA-5FED-00E3033823C4}"/>
+              </a:ext>
+            </a:extLst>
+          </p:cNvPr>
+          <p:cNvSpPr>
+            <a:spLocks noGrp="1"/>
+          </p:cNvSpPr>
+          <p:nvPr>
+            <p:ph type="title"/>
+          </p:nvPr>
+        </p:nvSpPr>
+        <p:spPr/>
+        <p:txBody>
+          <a:bodyPr>
+            <a:normAutofit fontScale="90000"/>
+          </a:bodyPr>
+          <a:lstStyle/>
+          <a:p>
+            <a:r>
+              <a:rPr lang="en-US" dirty="0"/>
+              <a:t>Rails Debugging</a:t>
+            </a:r>
+          </a:p>
+        </p:txBody>
+      </p:sp>
+      <p:sp>
+        <p:nvSpPr>
           <p:cNvPr id="4" name="Content Placeholder 3">
             <a:extLst>
               <a:ext uri="{FF2B5EF4-FFF2-40B4-BE49-F238E27FC236}">
@@ -10298,7 +12804,7 @@
         <p:spPr/>
         <p:txBody>
           <a:bodyPr>
-            <a:normAutofit fontScale="77500" lnSpcReduction="20000"/>
+            <a:normAutofit fontScale="70000" lnSpcReduction="20000"/>
           </a:bodyPr>
           <a:lstStyle/>
           <a:p>
@@ -10396,31 +12902,87 @@
       </p:sp>
       <p:sp>
         <p:nvSpPr>
-          <p:cNvPr id="3" name="Title 2">
-            <a:extLst>
-              <a:ext uri="{FF2B5EF4-FFF2-40B4-BE49-F238E27FC236}">
-                <a16:creationId xmlns:a16="http://schemas.microsoft.com/office/drawing/2014/main" id="{A5D39663-4D0B-C4DA-5FED-00E3033823C4}"/>
-              </a:ext>
-            </a:extLst>
-          </p:cNvPr>
-          <p:cNvSpPr>
-            <a:spLocks noGrp="1"/>
-          </p:cNvSpPr>
-          <p:nvPr>
-            <p:ph type="title"/>
-          </p:nvPr>
-        </p:nvSpPr>
-        <p:spPr/>
-        <p:txBody>
-          <a:bodyPr>
-            <a:normAutofit/>
-          </a:bodyPr>
-          <a:lstStyle/>
-          <a:p>
-            <a:r>
-              <a:rPr lang="en-US" dirty="0"/>
-              <a:t>Rails Debugging</a:t>
-            </a:r>
+          <p:cNvPr id="2" name="Date Placeholder 1">
+            <a:extLst>
+              <a:ext uri="{FF2B5EF4-FFF2-40B4-BE49-F238E27FC236}">
+                <a16:creationId xmlns:a16="http://schemas.microsoft.com/office/drawing/2014/main" id="{51973F9E-2B5F-7959-FA0C-0BD64732665C}"/>
+              </a:ext>
+            </a:extLst>
+          </p:cNvPr>
+          <p:cNvSpPr>
+            <a:spLocks noGrp="1"/>
+          </p:cNvSpPr>
+          <p:nvPr>
+            <p:ph type="dt" sz="half" idx="10"/>
+          </p:nvPr>
+        </p:nvSpPr>
+        <p:spPr/>
+        <p:txBody>
+          <a:bodyPr/>
+          <a:lstStyle/>
+          <a:p>
+            <a:fld id="{0C0E7905-3043-0545-98D5-68A8EB1460CA}" type="datetime1">
+              <a:rPr lang="en-US" smtClean="0"/>
+              <a:t>10/8/26</a:t>
+            </a:fld>
+            <a:endParaRPr lang="en-US"/>
+          </a:p>
+        </p:txBody>
+      </p:sp>
+      <p:sp>
+        <p:nvSpPr>
+          <p:cNvPr id="5" name="Footer Placeholder 4">
+            <a:extLst>
+              <a:ext uri="{FF2B5EF4-FFF2-40B4-BE49-F238E27FC236}">
+                <a16:creationId xmlns:a16="http://schemas.microsoft.com/office/drawing/2014/main" id="{3DCD51CB-5D4E-D988-7355-993CC4ED36E0}"/>
+              </a:ext>
+            </a:extLst>
+          </p:cNvPr>
+          <p:cNvSpPr>
+            <a:spLocks noGrp="1"/>
+          </p:cNvSpPr>
+          <p:nvPr>
+            <p:ph type="ftr" sz="quarter" idx="11"/>
+          </p:nvPr>
+        </p:nvSpPr>
+        <p:spPr/>
+        <p:txBody>
+          <a:bodyPr/>
+          <a:lstStyle/>
+          <a:p>
+            <a:r>
+              <a:rPr lang="en-US"/>
+              <a:t>© Steve Beaty and others as cited</a:t>
+            </a:r>
+          </a:p>
+        </p:txBody>
+      </p:sp>
+      <p:sp>
+        <p:nvSpPr>
+          <p:cNvPr id="6" name="Slide Number Placeholder 5">
+            <a:extLst>
+              <a:ext uri="{FF2B5EF4-FFF2-40B4-BE49-F238E27FC236}">
+                <a16:creationId xmlns:a16="http://schemas.microsoft.com/office/drawing/2014/main" id="{8ABC4BCF-724C-6ECB-7112-1D5FB374CE99}"/>
+              </a:ext>
+            </a:extLst>
+          </p:cNvPr>
+          <p:cNvSpPr>
+            <a:spLocks noGrp="1"/>
+          </p:cNvSpPr>
+          <p:nvPr>
+            <p:ph type="sldNum" sz="quarter" idx="12"/>
+          </p:nvPr>
+        </p:nvSpPr>
+        <p:spPr/>
+        <p:txBody>
+          <a:bodyPr/>
+          <a:lstStyle/>
+          <a:p>
+            <a:fld id="{8BADA5E7-275A-0142-8584-066D5199CC3B}" type="slidenum">
+              <a:rPr lang="en-US" smtClean="0"/>
+              <a:t>42</a:t>
+            </a:fld>
+            <a:endParaRPr lang="en-US"/>
           </a:p>
         </p:txBody>
       </p:sp>
@@ -10436,12 +12998,12 @@
   </p:clrMapOvr>
   <mc:AlternateContent xmlns:mc="http://schemas.openxmlformats.org/markup-compatibility/2006" xmlns:p14="http://schemas.microsoft.com/office/powerpoint/2010/main">
     <mc:Choice Requires="p14">
-      <p:transition spd="slow" p14:dur="1200">
-        <p14:prism/>
+      <p:transition spd="slow" p14:dur="2000">
+        <p14:prism isContent="1"/>
       </p:transition>
     </mc:Choice>
     <mc:Fallback xmlns="">
-      <p:transition xmlns:p14="http://schemas.microsoft.com/office/powerpoint/2010/main" spd="slow">
+      <p:transition spd="slow">
         <p:fade/>
       </p:transition>
     </mc:Fallback>
@@ -10468,6 +13030,36 @@
       </p:grpSpPr>
       <p:sp>
         <p:nvSpPr>
+          <p:cNvPr id="3" name="Title 2">
+            <a:extLst>
+              <a:ext uri="{FF2B5EF4-FFF2-40B4-BE49-F238E27FC236}">
+                <a16:creationId xmlns:a16="http://schemas.microsoft.com/office/drawing/2014/main" id="{5BC5A48E-9342-A7E9-E1E1-CB5387DE49AA}"/>
+              </a:ext>
+            </a:extLst>
+          </p:cNvPr>
+          <p:cNvSpPr>
+            <a:spLocks noGrp="1"/>
+          </p:cNvSpPr>
+          <p:nvPr>
+            <p:ph type="title"/>
+          </p:nvPr>
+        </p:nvSpPr>
+        <p:spPr/>
+        <p:txBody>
+          <a:bodyPr>
+            <a:normAutofit fontScale="90000"/>
+          </a:bodyPr>
+          <a:lstStyle/>
+          <a:p>
+            <a:r>
+              <a:rPr lang="en-US" dirty="0"/>
+              <a:t>Debug Commands</a:t>
+            </a:r>
+          </a:p>
+        </p:txBody>
+      </p:sp>
+      <p:sp>
+        <p:nvSpPr>
           <p:cNvPr id="2" name="Content Placeholder 1">
             <a:extLst>
               <a:ext uri="{FF2B5EF4-FFF2-40B4-BE49-F238E27FC236}">
@@ -10485,7 +13077,7 @@
         <p:spPr/>
         <p:txBody>
           <a:bodyPr>
-            <a:normAutofit fontScale="77500" lnSpcReduction="20000"/>
+            <a:normAutofit fontScale="70000" lnSpcReduction="20000"/>
           </a:bodyPr>
           <a:lstStyle/>
           <a:p>
@@ -10552,31 +13144,87 @@
       </p:sp>
       <p:sp>
         <p:nvSpPr>
-          <p:cNvPr id="3" name="Title 2">
-            <a:extLst>
-              <a:ext uri="{FF2B5EF4-FFF2-40B4-BE49-F238E27FC236}">
-                <a16:creationId xmlns:a16="http://schemas.microsoft.com/office/drawing/2014/main" id="{5BC5A48E-9342-A7E9-E1E1-CB5387DE49AA}"/>
-              </a:ext>
-            </a:extLst>
-          </p:cNvPr>
-          <p:cNvSpPr>
-            <a:spLocks noGrp="1"/>
-          </p:cNvSpPr>
-          <p:nvPr>
-            <p:ph type="title"/>
-          </p:nvPr>
-        </p:nvSpPr>
-        <p:spPr/>
-        <p:txBody>
-          <a:bodyPr>
-            <a:normAutofit/>
-          </a:bodyPr>
-          <a:lstStyle/>
-          <a:p>
-            <a:r>
-              <a:rPr lang="en-US" dirty="0"/>
-              <a:t>Debug Commands</a:t>
-            </a:r>
+          <p:cNvPr id="4" name="Date Placeholder 3">
+            <a:extLst>
+              <a:ext uri="{FF2B5EF4-FFF2-40B4-BE49-F238E27FC236}">
+                <a16:creationId xmlns:a16="http://schemas.microsoft.com/office/drawing/2014/main" id="{5AB3EA65-996D-97B9-4399-92F79BC12CFA}"/>
+              </a:ext>
+            </a:extLst>
+          </p:cNvPr>
+          <p:cNvSpPr>
+            <a:spLocks noGrp="1"/>
+          </p:cNvSpPr>
+          <p:nvPr>
+            <p:ph type="dt" sz="half" idx="10"/>
+          </p:nvPr>
+        </p:nvSpPr>
+        <p:spPr/>
+        <p:txBody>
+          <a:bodyPr/>
+          <a:lstStyle/>
+          <a:p>
+            <a:fld id="{CCA6F9CC-5CEB-274F-9A4A-41C17E8F821C}" type="datetime1">
+              <a:rPr lang="en-US" smtClean="0"/>
+              <a:t>10/8/26</a:t>
+            </a:fld>
+            <a:endParaRPr lang="en-US"/>
+          </a:p>
+        </p:txBody>
+      </p:sp>
+      <p:sp>
+        <p:nvSpPr>
+          <p:cNvPr id="5" name="Footer Placeholder 4">
+            <a:extLst>
+              <a:ext uri="{FF2B5EF4-FFF2-40B4-BE49-F238E27FC236}">
+                <a16:creationId xmlns:a16="http://schemas.microsoft.com/office/drawing/2014/main" id="{DC8BA904-8A7F-B746-4F59-C63B2523FEDB}"/>
+              </a:ext>
+            </a:extLst>
+          </p:cNvPr>
+          <p:cNvSpPr>
+            <a:spLocks noGrp="1"/>
+          </p:cNvSpPr>
+          <p:nvPr>
+            <p:ph type="ftr" sz="quarter" idx="11"/>
+          </p:nvPr>
+        </p:nvSpPr>
+        <p:spPr/>
+        <p:txBody>
+          <a:bodyPr/>
+          <a:lstStyle/>
+          <a:p>
+            <a:r>
+              <a:rPr lang="en-US"/>
+              <a:t>© Steve Beaty and others as cited</a:t>
+            </a:r>
+          </a:p>
+        </p:txBody>
+      </p:sp>
+      <p:sp>
+        <p:nvSpPr>
+          <p:cNvPr id="6" name="Slide Number Placeholder 5">
+            <a:extLst>
+              <a:ext uri="{FF2B5EF4-FFF2-40B4-BE49-F238E27FC236}">
+                <a16:creationId xmlns:a16="http://schemas.microsoft.com/office/drawing/2014/main" id="{7AC65C92-E7E4-A2CF-6C31-4278AEC9B14E}"/>
+              </a:ext>
+            </a:extLst>
+          </p:cNvPr>
+          <p:cNvSpPr>
+            <a:spLocks noGrp="1"/>
+          </p:cNvSpPr>
+          <p:nvPr>
+            <p:ph type="sldNum" sz="quarter" idx="12"/>
+          </p:nvPr>
+        </p:nvSpPr>
+        <p:spPr/>
+        <p:txBody>
+          <a:bodyPr/>
+          <a:lstStyle/>
+          <a:p>
+            <a:fld id="{8BADA5E7-275A-0142-8584-066D5199CC3B}" type="slidenum">
+              <a:rPr lang="en-US" smtClean="0"/>
+              <a:t>43</a:t>
+            </a:fld>
+            <a:endParaRPr lang="en-US"/>
           </a:p>
         </p:txBody>
       </p:sp>
@@ -10592,12 +13240,12 @@
   </p:clrMapOvr>
   <mc:AlternateContent xmlns:mc="http://schemas.openxmlformats.org/markup-compatibility/2006" xmlns:p14="http://schemas.microsoft.com/office/powerpoint/2010/main">
     <mc:Choice Requires="p14">
-      <p:transition spd="slow" p14:dur="1200">
-        <p14:prism/>
+      <p:transition spd="slow" p14:dur="2000">
+        <p14:prism isContent="1"/>
       </p:transition>
     </mc:Choice>
     <mc:Fallback xmlns="">
-      <p:transition xmlns:p14="http://schemas.microsoft.com/office/powerpoint/2010/main" spd="slow">
+      <p:transition spd="slow">
         <p:fade/>
       </p:transition>
     </mc:Fallback>
@@ -10640,7 +13288,9 @@
         </p:nvSpPr>
         <p:spPr/>
         <p:txBody>
-          <a:bodyPr/>
+          <a:bodyPr>
+            <a:normAutofit fontScale="90000"/>
+          </a:bodyPr>
           <a:lstStyle/>
           <a:p>
             <a:r>
@@ -10669,7 +13319,7 @@
         <p:spPr/>
         <p:txBody>
           <a:bodyPr>
-            <a:normAutofit fontScale="77500" lnSpcReduction="20000"/>
+            <a:normAutofit fontScale="70000" lnSpcReduction="20000"/>
           </a:bodyPr>
           <a:lstStyle/>
           <a:p>
@@ -10802,6 +13452,92 @@
               <a:rPr lang="en-US" dirty="0"/>
               <a:t>) c</a:t>
             </a:r>
+          </a:p>
+        </p:txBody>
+      </p:sp>
+      <p:sp>
+        <p:nvSpPr>
+          <p:cNvPr id="4" name="Date Placeholder 3">
+            <a:extLst>
+              <a:ext uri="{FF2B5EF4-FFF2-40B4-BE49-F238E27FC236}">
+                <a16:creationId xmlns:a16="http://schemas.microsoft.com/office/drawing/2014/main" id="{6E5F38D9-7D38-1741-2664-2E546E344019}"/>
+              </a:ext>
+            </a:extLst>
+          </p:cNvPr>
+          <p:cNvSpPr>
+            <a:spLocks noGrp="1"/>
+          </p:cNvSpPr>
+          <p:nvPr>
+            <p:ph type="dt" sz="half" idx="10"/>
+          </p:nvPr>
+        </p:nvSpPr>
+        <p:spPr/>
+        <p:txBody>
+          <a:bodyPr/>
+          <a:lstStyle/>
+          <a:p>
+            <a:fld id="{2C8DC867-39DA-F94C-B44F-1C90B6F38697}" type="datetime1">
+              <a:rPr lang="en-US" smtClean="0"/>
+              <a:t>10/8/26</a:t>
+            </a:fld>
+            <a:endParaRPr lang="en-US"/>
+          </a:p>
+        </p:txBody>
+      </p:sp>
+      <p:sp>
+        <p:nvSpPr>
+          <p:cNvPr id="5" name="Footer Placeholder 4">
+            <a:extLst>
+              <a:ext uri="{FF2B5EF4-FFF2-40B4-BE49-F238E27FC236}">
+                <a16:creationId xmlns:a16="http://schemas.microsoft.com/office/drawing/2014/main" id="{F773CEC9-ABEA-CB44-CB76-ACF3D7B82F51}"/>
+              </a:ext>
+            </a:extLst>
+          </p:cNvPr>
+          <p:cNvSpPr>
+            <a:spLocks noGrp="1"/>
+          </p:cNvSpPr>
+          <p:nvPr>
+            <p:ph type="ftr" sz="quarter" idx="11"/>
+          </p:nvPr>
+        </p:nvSpPr>
+        <p:spPr/>
+        <p:txBody>
+          <a:bodyPr/>
+          <a:lstStyle/>
+          <a:p>
+            <a:r>
+              <a:rPr lang="en-US"/>
+              <a:t>© Steve Beaty and others as cited</a:t>
+            </a:r>
+          </a:p>
+        </p:txBody>
+      </p:sp>
+      <p:sp>
+        <p:nvSpPr>
+          <p:cNvPr id="6" name="Slide Number Placeholder 5">
+            <a:extLst>
+              <a:ext uri="{FF2B5EF4-FFF2-40B4-BE49-F238E27FC236}">
+                <a16:creationId xmlns:a16="http://schemas.microsoft.com/office/drawing/2014/main" id="{F06D47BA-27FC-F519-A06D-328E74160C26}"/>
+              </a:ext>
+            </a:extLst>
+          </p:cNvPr>
+          <p:cNvSpPr>
+            <a:spLocks noGrp="1"/>
+          </p:cNvSpPr>
+          <p:nvPr>
+            <p:ph type="sldNum" sz="quarter" idx="12"/>
+          </p:nvPr>
+        </p:nvSpPr>
+        <p:spPr/>
+        <p:txBody>
+          <a:bodyPr/>
+          <a:lstStyle/>
+          <a:p>
+            <a:fld id="{8BADA5E7-275A-0142-8584-066D5199CC3B}" type="slidenum">
+              <a:rPr lang="en-US" smtClean="0"/>
+              <a:t>44</a:t>
+            </a:fld>
+            <a:endParaRPr lang="en-US"/>
           </a:p>
         </p:txBody>
       </p:sp>
@@ -10875,6 +13611,92 @@
           </a:p>
         </p:txBody>
       </p:sp>
+      <p:sp>
+        <p:nvSpPr>
+          <p:cNvPr id="2" name="Date Placeholder 1">
+            <a:extLst>
+              <a:ext uri="{FF2B5EF4-FFF2-40B4-BE49-F238E27FC236}">
+                <a16:creationId xmlns:a16="http://schemas.microsoft.com/office/drawing/2014/main" id="{97F7DCBF-9696-34F7-B6E2-78F9BE56DE6B}"/>
+              </a:ext>
+            </a:extLst>
+          </p:cNvPr>
+          <p:cNvSpPr>
+            <a:spLocks noGrp="1"/>
+          </p:cNvSpPr>
+          <p:nvPr>
+            <p:ph type="dt" sz="half" idx="10"/>
+          </p:nvPr>
+        </p:nvSpPr>
+        <p:spPr/>
+        <p:txBody>
+          <a:bodyPr/>
+          <a:lstStyle/>
+          <a:p>
+            <a:fld id="{FD5B5858-DEBE-7248-A6F2-026D46D64802}" type="datetime1">
+              <a:rPr lang="en-US" smtClean="0"/>
+              <a:t>10/8/26</a:t>
+            </a:fld>
+            <a:endParaRPr lang="en-US"/>
+          </a:p>
+        </p:txBody>
+      </p:sp>
+      <p:sp>
+        <p:nvSpPr>
+          <p:cNvPr id="3" name="Footer Placeholder 2">
+            <a:extLst>
+              <a:ext uri="{FF2B5EF4-FFF2-40B4-BE49-F238E27FC236}">
+                <a16:creationId xmlns:a16="http://schemas.microsoft.com/office/drawing/2014/main" id="{E31ED5F1-497B-8595-1CCE-E9FCC90288AD}"/>
+              </a:ext>
+            </a:extLst>
+          </p:cNvPr>
+          <p:cNvSpPr>
+            <a:spLocks noGrp="1"/>
+          </p:cNvSpPr>
+          <p:nvPr>
+            <p:ph type="ftr" sz="quarter" idx="11"/>
+          </p:nvPr>
+        </p:nvSpPr>
+        <p:spPr/>
+        <p:txBody>
+          <a:bodyPr/>
+          <a:lstStyle/>
+          <a:p>
+            <a:r>
+              <a:rPr lang="en-US"/>
+              <a:t>© Steve Beaty and others as cited</a:t>
+            </a:r>
+          </a:p>
+        </p:txBody>
+      </p:sp>
+      <p:sp>
+        <p:nvSpPr>
+          <p:cNvPr id="5" name="Slide Number Placeholder 4">
+            <a:extLst>
+              <a:ext uri="{FF2B5EF4-FFF2-40B4-BE49-F238E27FC236}">
+                <a16:creationId xmlns:a16="http://schemas.microsoft.com/office/drawing/2014/main" id="{8CB2C068-9FD3-899E-F22F-1269F8F68FF4}"/>
+              </a:ext>
+            </a:extLst>
+          </p:cNvPr>
+          <p:cNvSpPr>
+            <a:spLocks noGrp="1"/>
+          </p:cNvSpPr>
+          <p:nvPr>
+            <p:ph type="sldNum" sz="quarter" idx="12"/>
+          </p:nvPr>
+        </p:nvSpPr>
+        <p:spPr/>
+        <p:txBody>
+          <a:bodyPr/>
+          <a:lstStyle/>
+          <a:p>
+            <a:fld id="{8BADA5E7-275A-0142-8584-066D5199CC3B}" type="slidenum">
+              <a:rPr lang="en-US" smtClean="0"/>
+              <a:t>45</a:t>
+            </a:fld>
+            <a:endParaRPr lang="en-US"/>
+          </a:p>
+        </p:txBody>
+      </p:sp>
     </p:spTree>
     <p:extLst>
       <p:ext uri="{BB962C8B-B14F-4D97-AF65-F5344CB8AC3E}">
@@ -10907,6 +13729,36 @@
       </p:grpSpPr>
       <p:sp>
         <p:nvSpPr>
+          <p:cNvPr id="3" name="Title 2">
+            <a:extLst>
+              <a:ext uri="{FF2B5EF4-FFF2-40B4-BE49-F238E27FC236}">
+                <a16:creationId xmlns:a16="http://schemas.microsoft.com/office/drawing/2014/main" id="{FA2F8FB2-72AD-1E36-1579-D9C76F691036}"/>
+              </a:ext>
+            </a:extLst>
+          </p:cNvPr>
+          <p:cNvSpPr>
+            <a:spLocks noGrp="1"/>
+          </p:cNvSpPr>
+          <p:nvPr>
+            <p:ph type="title"/>
+          </p:nvPr>
+        </p:nvSpPr>
+        <p:spPr/>
+        <p:txBody>
+          <a:bodyPr>
+            <a:normAutofit fontScale="90000"/>
+          </a:bodyPr>
+          <a:lstStyle/>
+          <a:p>
+            <a:r>
+              <a:rPr lang="en-US" dirty="0"/>
+              <a:t>What We Learned</a:t>
+            </a:r>
+          </a:p>
+        </p:txBody>
+      </p:sp>
+      <p:sp>
+        <p:nvSpPr>
           <p:cNvPr id="4" name="Content Placeholder 3">
             <a:extLst>
               <a:ext uri="{FF2B5EF4-FFF2-40B4-BE49-F238E27FC236}">
@@ -10924,7 +13776,7 @@
         <p:spPr/>
         <p:txBody>
           <a:bodyPr>
-            <a:normAutofit fontScale="92500" lnSpcReduction="10000"/>
+            <a:normAutofit fontScale="85000" lnSpcReduction="20000"/>
           </a:bodyPr>
           <a:lstStyle/>
           <a:p>
@@ -10967,29 +13819,87 @@
       </p:sp>
       <p:sp>
         <p:nvSpPr>
-          <p:cNvPr id="3" name="Title 2">
-            <a:extLst>
-              <a:ext uri="{FF2B5EF4-FFF2-40B4-BE49-F238E27FC236}">
-                <a16:creationId xmlns:a16="http://schemas.microsoft.com/office/drawing/2014/main" id="{FA2F8FB2-72AD-1E36-1579-D9C76F691036}"/>
-              </a:ext>
-            </a:extLst>
-          </p:cNvPr>
-          <p:cNvSpPr>
-            <a:spLocks noGrp="1"/>
-          </p:cNvSpPr>
-          <p:nvPr>
-            <p:ph type="title"/>
-          </p:nvPr>
-        </p:nvSpPr>
-        <p:spPr/>
-        <p:txBody>
-          <a:bodyPr/>
-          <a:lstStyle/>
-          <a:p>
-            <a:r>
-              <a:rPr lang="en-US" dirty="0"/>
-              <a:t>What We Learned</a:t>
-            </a:r>
+          <p:cNvPr id="2" name="Date Placeholder 1">
+            <a:extLst>
+              <a:ext uri="{FF2B5EF4-FFF2-40B4-BE49-F238E27FC236}">
+                <a16:creationId xmlns:a16="http://schemas.microsoft.com/office/drawing/2014/main" id="{79D47B40-74C1-FB4C-46D3-69CFF30B7373}"/>
+              </a:ext>
+            </a:extLst>
+          </p:cNvPr>
+          <p:cNvSpPr>
+            <a:spLocks noGrp="1"/>
+          </p:cNvSpPr>
+          <p:nvPr>
+            <p:ph type="dt" sz="half" idx="10"/>
+          </p:nvPr>
+        </p:nvSpPr>
+        <p:spPr/>
+        <p:txBody>
+          <a:bodyPr/>
+          <a:lstStyle/>
+          <a:p>
+            <a:fld id="{27C3BABC-2983-F948-AB3A-96D197CFCDEF}" type="datetime1">
+              <a:rPr lang="en-US" smtClean="0"/>
+              <a:t>10/8/26</a:t>
+            </a:fld>
+            <a:endParaRPr lang="en-US"/>
+          </a:p>
+        </p:txBody>
+      </p:sp>
+      <p:sp>
+        <p:nvSpPr>
+          <p:cNvPr id="5" name="Footer Placeholder 4">
+            <a:extLst>
+              <a:ext uri="{FF2B5EF4-FFF2-40B4-BE49-F238E27FC236}">
+                <a16:creationId xmlns:a16="http://schemas.microsoft.com/office/drawing/2014/main" id="{C3E9A65E-D54C-DA14-DCC5-F63D79FF287F}"/>
+              </a:ext>
+            </a:extLst>
+          </p:cNvPr>
+          <p:cNvSpPr>
+            <a:spLocks noGrp="1"/>
+          </p:cNvSpPr>
+          <p:nvPr>
+            <p:ph type="ftr" sz="quarter" idx="11"/>
+          </p:nvPr>
+        </p:nvSpPr>
+        <p:spPr/>
+        <p:txBody>
+          <a:bodyPr/>
+          <a:lstStyle/>
+          <a:p>
+            <a:r>
+              <a:rPr lang="en-US"/>
+              <a:t>© Steve Beaty and others as cited</a:t>
+            </a:r>
+          </a:p>
+        </p:txBody>
+      </p:sp>
+      <p:sp>
+        <p:nvSpPr>
+          <p:cNvPr id="6" name="Slide Number Placeholder 5">
+            <a:extLst>
+              <a:ext uri="{FF2B5EF4-FFF2-40B4-BE49-F238E27FC236}">
+                <a16:creationId xmlns:a16="http://schemas.microsoft.com/office/drawing/2014/main" id="{BAFF19DE-7321-E951-63F6-19B8F027DA33}"/>
+              </a:ext>
+            </a:extLst>
+          </p:cNvPr>
+          <p:cNvSpPr>
+            <a:spLocks noGrp="1"/>
+          </p:cNvSpPr>
+          <p:nvPr>
+            <p:ph type="sldNum" sz="quarter" idx="12"/>
+          </p:nvPr>
+        </p:nvSpPr>
+        <p:spPr/>
+        <p:txBody>
+          <a:bodyPr/>
+          <a:lstStyle/>
+          <a:p>
+            <a:fld id="{8BADA5E7-275A-0142-8584-066D5199CC3B}" type="slidenum">
+              <a:rPr lang="en-US" smtClean="0"/>
+              <a:t>46</a:t>
+            </a:fld>
+            <a:endParaRPr lang="en-US"/>
           </a:p>
         </p:txBody>
       </p:sp>
@@ -11005,12 +13915,12 @@
   </p:clrMapOvr>
   <mc:AlternateContent xmlns:mc="http://schemas.openxmlformats.org/markup-compatibility/2006" xmlns:p14="http://schemas.microsoft.com/office/powerpoint/2010/main">
     <mc:Choice Requires="p14">
-      <p:transition spd="slow" p14:dur="1200">
-        <p14:prism/>
+      <p:transition spd="slow" p14:dur="2000">
+        <p14:prism isContent="1"/>
       </p:transition>
     </mc:Choice>
     <mc:Fallback xmlns="">
-      <p:transition xmlns:p14="http://schemas.microsoft.com/office/powerpoint/2010/main" spd="slow">
+      <p:transition spd="slow">
         <p:fade/>
       </p:transition>
     </mc:Fallback>
@@ -11037,6 +13947,36 @@
       </p:grpSpPr>
       <p:sp>
         <p:nvSpPr>
+          <p:cNvPr id="3" name="Title 2">
+            <a:extLst>
+              <a:ext uri="{FF2B5EF4-FFF2-40B4-BE49-F238E27FC236}">
+                <a16:creationId xmlns:a16="http://schemas.microsoft.com/office/drawing/2014/main" id="{96014593-83A8-91DF-1CAE-1F53D1B73DB8}"/>
+              </a:ext>
+            </a:extLst>
+          </p:cNvPr>
+          <p:cNvSpPr>
+            <a:spLocks noGrp="1"/>
+          </p:cNvSpPr>
+          <p:nvPr>
+            <p:ph type="title"/>
+          </p:nvPr>
+        </p:nvSpPr>
+        <p:spPr/>
+        <p:txBody>
+          <a:bodyPr>
+            <a:normAutofit fontScale="90000"/>
+          </a:bodyPr>
+          <a:lstStyle/>
+          <a:p>
+            <a:r>
+              <a:rPr lang="en-US" dirty="0"/>
+              <a:t>Key Terms</a:t>
+            </a:r>
+          </a:p>
+        </p:txBody>
+      </p:sp>
+      <p:sp>
+        <p:nvSpPr>
           <p:cNvPr id="2" name="Content Placeholder 1">
             <a:extLst>
               <a:ext uri="{FF2B5EF4-FFF2-40B4-BE49-F238E27FC236}">
@@ -11054,7 +13994,7 @@
         <p:spPr/>
         <p:txBody>
           <a:bodyPr>
-            <a:normAutofit fontScale="85000" lnSpcReduction="20000"/>
+            <a:normAutofit fontScale="77500" lnSpcReduction="20000"/>
           </a:bodyPr>
           <a:lstStyle/>
           <a:p>
@@ -11112,31 +14052,87 @@
       </p:sp>
       <p:sp>
         <p:nvSpPr>
-          <p:cNvPr id="3" name="Title 2">
-            <a:extLst>
-              <a:ext uri="{FF2B5EF4-FFF2-40B4-BE49-F238E27FC236}">
-                <a16:creationId xmlns:a16="http://schemas.microsoft.com/office/drawing/2014/main" id="{96014593-83A8-91DF-1CAE-1F53D1B73DB8}"/>
-              </a:ext>
-            </a:extLst>
-          </p:cNvPr>
-          <p:cNvSpPr>
-            <a:spLocks noGrp="1"/>
-          </p:cNvSpPr>
-          <p:nvPr>
-            <p:ph type="title"/>
-          </p:nvPr>
-        </p:nvSpPr>
-        <p:spPr/>
-        <p:txBody>
-          <a:bodyPr>
-            <a:normAutofit/>
-          </a:bodyPr>
-          <a:lstStyle/>
-          <a:p>
-            <a:r>
-              <a:rPr lang="en-US" dirty="0"/>
-              <a:t>Key Terms</a:t>
-            </a:r>
+          <p:cNvPr id="4" name="Date Placeholder 3">
+            <a:extLst>
+              <a:ext uri="{FF2B5EF4-FFF2-40B4-BE49-F238E27FC236}">
+                <a16:creationId xmlns:a16="http://schemas.microsoft.com/office/drawing/2014/main" id="{4B28F220-6EAC-3F51-AD6A-55338B673B12}"/>
+              </a:ext>
+            </a:extLst>
+          </p:cNvPr>
+          <p:cNvSpPr>
+            <a:spLocks noGrp="1"/>
+          </p:cNvSpPr>
+          <p:nvPr>
+            <p:ph type="dt" sz="half" idx="10"/>
+          </p:nvPr>
+        </p:nvSpPr>
+        <p:spPr/>
+        <p:txBody>
+          <a:bodyPr/>
+          <a:lstStyle/>
+          <a:p>
+            <a:fld id="{BCF40E2E-D5D0-754C-807C-09F71F6F8809}" type="datetime1">
+              <a:rPr lang="en-US" smtClean="0"/>
+              <a:t>10/8/26</a:t>
+            </a:fld>
+            <a:endParaRPr lang="en-US"/>
+          </a:p>
+        </p:txBody>
+      </p:sp>
+      <p:sp>
+        <p:nvSpPr>
+          <p:cNvPr id="5" name="Footer Placeholder 4">
+            <a:extLst>
+              <a:ext uri="{FF2B5EF4-FFF2-40B4-BE49-F238E27FC236}">
+                <a16:creationId xmlns:a16="http://schemas.microsoft.com/office/drawing/2014/main" id="{313B9826-9463-20D3-4B6A-9F2CD5CC4651}"/>
+              </a:ext>
+            </a:extLst>
+          </p:cNvPr>
+          <p:cNvSpPr>
+            <a:spLocks noGrp="1"/>
+          </p:cNvSpPr>
+          <p:nvPr>
+            <p:ph type="ftr" sz="quarter" idx="11"/>
+          </p:nvPr>
+        </p:nvSpPr>
+        <p:spPr/>
+        <p:txBody>
+          <a:bodyPr/>
+          <a:lstStyle/>
+          <a:p>
+            <a:r>
+              <a:rPr lang="en-US"/>
+              <a:t>© Steve Beaty and others as cited</a:t>
+            </a:r>
+          </a:p>
+        </p:txBody>
+      </p:sp>
+      <p:sp>
+        <p:nvSpPr>
+          <p:cNvPr id="6" name="Slide Number Placeholder 5">
+            <a:extLst>
+              <a:ext uri="{FF2B5EF4-FFF2-40B4-BE49-F238E27FC236}">
+                <a16:creationId xmlns:a16="http://schemas.microsoft.com/office/drawing/2014/main" id="{8806D182-59CC-E628-CA11-94DB2DE6F7AE}"/>
+              </a:ext>
+            </a:extLst>
+          </p:cNvPr>
+          <p:cNvSpPr>
+            <a:spLocks noGrp="1"/>
+          </p:cNvSpPr>
+          <p:nvPr>
+            <p:ph type="sldNum" sz="quarter" idx="12"/>
+          </p:nvPr>
+        </p:nvSpPr>
+        <p:spPr/>
+        <p:txBody>
+          <a:bodyPr/>
+          <a:lstStyle/>
+          <a:p>
+            <a:fld id="{8BADA5E7-275A-0142-8584-066D5199CC3B}" type="slidenum">
+              <a:rPr lang="en-US" smtClean="0"/>
+              <a:t>5</a:t>
+            </a:fld>
+            <a:endParaRPr lang="en-US"/>
           </a:p>
         </p:txBody>
       </p:sp>
@@ -11152,12 +14148,12 @@
   </p:clrMapOvr>
   <mc:AlternateContent xmlns:mc="http://schemas.openxmlformats.org/markup-compatibility/2006" xmlns:p14="http://schemas.microsoft.com/office/powerpoint/2010/main">
     <mc:Choice Requires="p14">
-      <p:transition spd="slow" p14:dur="1200">
-        <p14:prism/>
+      <p:transition spd="slow" p14:dur="2000">
+        <p14:prism isContent="1"/>
       </p:transition>
     </mc:Choice>
     <mc:Fallback xmlns="">
-      <p:transition xmlns:p14="http://schemas.microsoft.com/office/powerpoint/2010/main" spd="slow">
+      <p:transition spd="slow">
         <p:fade/>
       </p:transition>
     </mc:Fallback>
@@ -11212,6 +14208,92 @@
               <a:rPr lang="en-US" dirty="0"/>
               <a:t>Object Oriented Programming</a:t>
             </a:r>
+          </a:p>
+        </p:txBody>
+      </p:sp>
+      <p:sp>
+        <p:nvSpPr>
+          <p:cNvPr id="2" name="Date Placeholder 1">
+            <a:extLst>
+              <a:ext uri="{FF2B5EF4-FFF2-40B4-BE49-F238E27FC236}">
+                <a16:creationId xmlns:a16="http://schemas.microsoft.com/office/drawing/2014/main" id="{EDD49BC8-F5ED-4FC1-33E6-1825F1F9F021}"/>
+              </a:ext>
+            </a:extLst>
+          </p:cNvPr>
+          <p:cNvSpPr>
+            <a:spLocks noGrp="1"/>
+          </p:cNvSpPr>
+          <p:nvPr>
+            <p:ph type="dt" sz="half" idx="10"/>
+          </p:nvPr>
+        </p:nvSpPr>
+        <p:spPr/>
+        <p:txBody>
+          <a:bodyPr/>
+          <a:lstStyle/>
+          <a:p>
+            <a:fld id="{82A18D05-9339-FF4A-A4DD-675B2127E4CA}" type="datetime1">
+              <a:rPr lang="en-US" smtClean="0"/>
+              <a:t>10/8/26</a:t>
+            </a:fld>
+            <a:endParaRPr lang="en-US"/>
+          </a:p>
+        </p:txBody>
+      </p:sp>
+      <p:sp>
+        <p:nvSpPr>
+          <p:cNvPr id="3" name="Footer Placeholder 2">
+            <a:extLst>
+              <a:ext uri="{FF2B5EF4-FFF2-40B4-BE49-F238E27FC236}">
+                <a16:creationId xmlns:a16="http://schemas.microsoft.com/office/drawing/2014/main" id="{BFDB4B05-A5AE-6945-B494-1E2BEB8372BB}"/>
+              </a:ext>
+            </a:extLst>
+          </p:cNvPr>
+          <p:cNvSpPr>
+            <a:spLocks noGrp="1"/>
+          </p:cNvSpPr>
+          <p:nvPr>
+            <p:ph type="ftr" sz="quarter" idx="11"/>
+          </p:nvPr>
+        </p:nvSpPr>
+        <p:spPr/>
+        <p:txBody>
+          <a:bodyPr/>
+          <a:lstStyle/>
+          <a:p>
+            <a:r>
+              <a:rPr lang="en-US"/>
+              <a:t>© Steve Beaty and others as cited</a:t>
+            </a:r>
+          </a:p>
+        </p:txBody>
+      </p:sp>
+      <p:sp>
+        <p:nvSpPr>
+          <p:cNvPr id="5" name="Slide Number Placeholder 4">
+            <a:extLst>
+              <a:ext uri="{FF2B5EF4-FFF2-40B4-BE49-F238E27FC236}">
+                <a16:creationId xmlns:a16="http://schemas.microsoft.com/office/drawing/2014/main" id="{41EC079E-9818-8236-1766-B7F04950C7C5}"/>
+              </a:ext>
+            </a:extLst>
+          </p:cNvPr>
+          <p:cNvSpPr>
+            <a:spLocks noGrp="1"/>
+          </p:cNvSpPr>
+          <p:nvPr>
+            <p:ph type="sldNum" sz="quarter" idx="12"/>
+          </p:nvPr>
+        </p:nvSpPr>
+        <p:spPr/>
+        <p:txBody>
+          <a:bodyPr/>
+          <a:lstStyle/>
+          <a:p>
+            <a:fld id="{8BADA5E7-275A-0142-8584-066D5199CC3B}" type="slidenum">
+              <a:rPr lang="en-US" smtClean="0"/>
+              <a:t>6</a:t>
+            </a:fld>
+            <a:endParaRPr lang="en-US"/>
           </a:p>
         </p:txBody>
       </p:sp>
@@ -11259,6 +14341,36 @@
       </p:grpSpPr>
       <p:sp>
         <p:nvSpPr>
+          <p:cNvPr id="3" name="Title 2">
+            <a:extLst>
+              <a:ext uri="{FF2B5EF4-FFF2-40B4-BE49-F238E27FC236}">
+                <a16:creationId xmlns:a16="http://schemas.microsoft.com/office/drawing/2014/main" id="{632EC2B9-437F-3687-7162-D7750BF7055B}"/>
+              </a:ext>
+            </a:extLst>
+          </p:cNvPr>
+          <p:cNvSpPr>
+            <a:spLocks noGrp="1"/>
+          </p:cNvSpPr>
+          <p:nvPr>
+            <p:ph type="title"/>
+          </p:nvPr>
+        </p:nvSpPr>
+        <p:spPr/>
+        <p:txBody>
+          <a:bodyPr>
+            <a:normAutofit fontScale="90000"/>
+          </a:bodyPr>
+          <a:lstStyle/>
+          <a:p>
+            <a:r>
+              <a:rPr lang="en-US" dirty="0"/>
+              <a:t>Why OOP?</a:t>
+            </a:r>
+          </a:p>
+        </p:txBody>
+      </p:sp>
+      <p:sp>
+        <p:nvSpPr>
           <p:cNvPr id="4" name="Content Placeholder 3">
             <a:extLst>
               <a:ext uri="{FF2B5EF4-FFF2-40B4-BE49-F238E27FC236}">
@@ -11276,7 +14388,7 @@
         <p:spPr/>
         <p:txBody>
           <a:bodyPr>
-            <a:normAutofit fontScale="85000" lnSpcReduction="20000"/>
+            <a:normAutofit fontScale="77500" lnSpcReduction="20000"/>
           </a:bodyPr>
           <a:lstStyle/>
           <a:p>
@@ -11346,31 +14458,87 @@
       </p:sp>
       <p:sp>
         <p:nvSpPr>
-          <p:cNvPr id="3" name="Title 2">
-            <a:extLst>
-              <a:ext uri="{FF2B5EF4-FFF2-40B4-BE49-F238E27FC236}">
-                <a16:creationId xmlns:a16="http://schemas.microsoft.com/office/drawing/2014/main" id="{632EC2B9-437F-3687-7162-D7750BF7055B}"/>
-              </a:ext>
-            </a:extLst>
-          </p:cNvPr>
-          <p:cNvSpPr>
-            <a:spLocks noGrp="1"/>
-          </p:cNvSpPr>
-          <p:nvPr>
-            <p:ph type="title"/>
-          </p:nvPr>
-        </p:nvSpPr>
-        <p:spPr/>
-        <p:txBody>
-          <a:bodyPr>
-            <a:normAutofit/>
-          </a:bodyPr>
-          <a:lstStyle/>
-          <a:p>
-            <a:r>
-              <a:rPr lang="en-US" dirty="0"/>
-              <a:t>Why OOP?</a:t>
-            </a:r>
+          <p:cNvPr id="2" name="Date Placeholder 1">
+            <a:extLst>
+              <a:ext uri="{FF2B5EF4-FFF2-40B4-BE49-F238E27FC236}">
+                <a16:creationId xmlns:a16="http://schemas.microsoft.com/office/drawing/2014/main" id="{A969BB92-7307-F571-8D55-2D52C2A430C5}"/>
+              </a:ext>
+            </a:extLst>
+          </p:cNvPr>
+          <p:cNvSpPr>
+            <a:spLocks noGrp="1"/>
+          </p:cNvSpPr>
+          <p:nvPr>
+            <p:ph type="dt" sz="half" idx="10"/>
+          </p:nvPr>
+        </p:nvSpPr>
+        <p:spPr/>
+        <p:txBody>
+          <a:bodyPr/>
+          <a:lstStyle/>
+          <a:p>
+            <a:fld id="{C3E9D983-ED5A-B848-8AB8-BE692DD0C0A2}" type="datetime1">
+              <a:rPr lang="en-US" smtClean="0"/>
+              <a:t>10/8/26</a:t>
+            </a:fld>
+            <a:endParaRPr lang="en-US"/>
+          </a:p>
+        </p:txBody>
+      </p:sp>
+      <p:sp>
+        <p:nvSpPr>
+          <p:cNvPr id="5" name="Footer Placeholder 4">
+            <a:extLst>
+              <a:ext uri="{FF2B5EF4-FFF2-40B4-BE49-F238E27FC236}">
+                <a16:creationId xmlns:a16="http://schemas.microsoft.com/office/drawing/2014/main" id="{E7EC24F8-82A6-5F04-0723-76047049E65E}"/>
+              </a:ext>
+            </a:extLst>
+          </p:cNvPr>
+          <p:cNvSpPr>
+            <a:spLocks noGrp="1"/>
+          </p:cNvSpPr>
+          <p:nvPr>
+            <p:ph type="ftr" sz="quarter" idx="11"/>
+          </p:nvPr>
+        </p:nvSpPr>
+        <p:spPr/>
+        <p:txBody>
+          <a:bodyPr/>
+          <a:lstStyle/>
+          <a:p>
+            <a:r>
+              <a:rPr lang="en-US"/>
+              <a:t>© Steve Beaty and others as cited</a:t>
+            </a:r>
+          </a:p>
+        </p:txBody>
+      </p:sp>
+      <p:sp>
+        <p:nvSpPr>
+          <p:cNvPr id="6" name="Slide Number Placeholder 5">
+            <a:extLst>
+              <a:ext uri="{FF2B5EF4-FFF2-40B4-BE49-F238E27FC236}">
+                <a16:creationId xmlns:a16="http://schemas.microsoft.com/office/drawing/2014/main" id="{74ED1368-17AA-EE96-74F3-777A61A6FEA4}"/>
+              </a:ext>
+            </a:extLst>
+          </p:cNvPr>
+          <p:cNvSpPr>
+            <a:spLocks noGrp="1"/>
+          </p:cNvSpPr>
+          <p:nvPr>
+            <p:ph type="sldNum" sz="quarter" idx="12"/>
+          </p:nvPr>
+        </p:nvSpPr>
+        <p:spPr/>
+        <p:txBody>
+          <a:bodyPr/>
+          <a:lstStyle/>
+          <a:p>
+            <a:fld id="{8BADA5E7-275A-0142-8584-066D5199CC3B}" type="slidenum">
+              <a:rPr lang="en-US" smtClean="0"/>
+              <a:t>7</a:t>
+            </a:fld>
+            <a:endParaRPr lang="en-US"/>
           </a:p>
         </p:txBody>
       </p:sp>
@@ -11386,12 +14554,12 @@
   </p:clrMapOvr>
   <mc:AlternateContent xmlns:mc="http://schemas.openxmlformats.org/markup-compatibility/2006" xmlns:p14="http://schemas.microsoft.com/office/powerpoint/2010/main">
     <mc:Choice Requires="p14">
-      <p:transition spd="slow" p14:dur="1200">
-        <p14:prism/>
+      <p:transition spd="slow" p14:dur="2000">
+        <p14:prism isContent="1"/>
       </p:transition>
     </mc:Choice>
     <mc:Fallback xmlns="">
-      <p:transition xmlns:p14="http://schemas.microsoft.com/office/powerpoint/2010/main" spd="slow">
+      <p:transition spd="slow">
         <p:fade/>
       </p:transition>
     </mc:Fallback>
@@ -11418,6 +14586,36 @@
       </p:grpSpPr>
       <p:sp>
         <p:nvSpPr>
+          <p:cNvPr id="3" name="Title 2">
+            <a:extLst>
+              <a:ext uri="{FF2B5EF4-FFF2-40B4-BE49-F238E27FC236}">
+                <a16:creationId xmlns:a16="http://schemas.microsoft.com/office/drawing/2014/main" id="{DCA49419-5FDF-7515-C1E3-A279ED0B6E37}"/>
+              </a:ext>
+            </a:extLst>
+          </p:cNvPr>
+          <p:cNvSpPr>
+            <a:spLocks noGrp="1"/>
+          </p:cNvSpPr>
+          <p:nvPr>
+            <p:ph type="title"/>
+          </p:nvPr>
+        </p:nvSpPr>
+        <p:spPr/>
+        <p:txBody>
+          <a:bodyPr>
+            <a:normAutofit fontScale="90000"/>
+          </a:bodyPr>
+          <a:lstStyle/>
+          <a:p>
+            <a:r>
+              <a:rPr lang="en-US" dirty="0"/>
+              <a:t>Origins of OOP</a:t>
+            </a:r>
+          </a:p>
+        </p:txBody>
+      </p:sp>
+      <p:sp>
+        <p:nvSpPr>
           <p:cNvPr id="2" name="Content Placeholder 1">
             <a:extLst>
               <a:ext uri="{FF2B5EF4-FFF2-40B4-BE49-F238E27FC236}">
@@ -11435,7 +14633,7 @@
         <p:spPr/>
         <p:txBody>
           <a:bodyPr>
-            <a:normAutofit fontScale="92500" lnSpcReduction="10000"/>
+            <a:normAutofit fontScale="92500" lnSpcReduction="20000"/>
           </a:bodyPr>
           <a:lstStyle/>
           <a:p>
@@ -11484,31 +14682,87 @@
       </p:sp>
       <p:sp>
         <p:nvSpPr>
-          <p:cNvPr id="3" name="Title 2">
-            <a:extLst>
-              <a:ext uri="{FF2B5EF4-FFF2-40B4-BE49-F238E27FC236}">
-                <a16:creationId xmlns:a16="http://schemas.microsoft.com/office/drawing/2014/main" id="{DCA49419-5FDF-7515-C1E3-A279ED0B6E37}"/>
-              </a:ext>
-            </a:extLst>
-          </p:cNvPr>
-          <p:cNvSpPr>
-            <a:spLocks noGrp="1"/>
-          </p:cNvSpPr>
-          <p:nvPr>
-            <p:ph type="title"/>
-          </p:nvPr>
-        </p:nvSpPr>
-        <p:spPr/>
-        <p:txBody>
-          <a:bodyPr>
-            <a:normAutofit/>
-          </a:bodyPr>
-          <a:lstStyle/>
-          <a:p>
-            <a:r>
-              <a:rPr lang="en-US" dirty="0"/>
-              <a:t>Origins of OOP</a:t>
-            </a:r>
+          <p:cNvPr id="4" name="Date Placeholder 3">
+            <a:extLst>
+              <a:ext uri="{FF2B5EF4-FFF2-40B4-BE49-F238E27FC236}">
+                <a16:creationId xmlns:a16="http://schemas.microsoft.com/office/drawing/2014/main" id="{47C4D8C9-842D-12E7-BF12-19726F1A001F}"/>
+              </a:ext>
+            </a:extLst>
+          </p:cNvPr>
+          <p:cNvSpPr>
+            <a:spLocks noGrp="1"/>
+          </p:cNvSpPr>
+          <p:nvPr>
+            <p:ph type="dt" sz="half" idx="10"/>
+          </p:nvPr>
+        </p:nvSpPr>
+        <p:spPr/>
+        <p:txBody>
+          <a:bodyPr/>
+          <a:lstStyle/>
+          <a:p>
+            <a:fld id="{283B5AEE-D016-5845-A603-55E6AA975FE7}" type="datetime1">
+              <a:rPr lang="en-US" smtClean="0"/>
+              <a:t>10/8/26</a:t>
+            </a:fld>
+            <a:endParaRPr lang="en-US"/>
+          </a:p>
+        </p:txBody>
+      </p:sp>
+      <p:sp>
+        <p:nvSpPr>
+          <p:cNvPr id="5" name="Footer Placeholder 4">
+            <a:extLst>
+              <a:ext uri="{FF2B5EF4-FFF2-40B4-BE49-F238E27FC236}">
+                <a16:creationId xmlns:a16="http://schemas.microsoft.com/office/drawing/2014/main" id="{52E111A1-4815-0C09-D836-C8E5EFA58D0B}"/>
+              </a:ext>
+            </a:extLst>
+          </p:cNvPr>
+          <p:cNvSpPr>
+            <a:spLocks noGrp="1"/>
+          </p:cNvSpPr>
+          <p:nvPr>
+            <p:ph type="ftr" sz="quarter" idx="11"/>
+          </p:nvPr>
+        </p:nvSpPr>
+        <p:spPr/>
+        <p:txBody>
+          <a:bodyPr/>
+          <a:lstStyle/>
+          <a:p>
+            <a:r>
+              <a:rPr lang="en-US"/>
+              <a:t>© Steve Beaty and others as cited</a:t>
+            </a:r>
+          </a:p>
+        </p:txBody>
+      </p:sp>
+      <p:sp>
+        <p:nvSpPr>
+          <p:cNvPr id="6" name="Slide Number Placeholder 5">
+            <a:extLst>
+              <a:ext uri="{FF2B5EF4-FFF2-40B4-BE49-F238E27FC236}">
+                <a16:creationId xmlns:a16="http://schemas.microsoft.com/office/drawing/2014/main" id="{C007B462-00BD-113C-B17E-CDDDA95F54B3}"/>
+              </a:ext>
+            </a:extLst>
+          </p:cNvPr>
+          <p:cNvSpPr>
+            <a:spLocks noGrp="1"/>
+          </p:cNvSpPr>
+          <p:nvPr>
+            <p:ph type="sldNum" sz="quarter" idx="12"/>
+          </p:nvPr>
+        </p:nvSpPr>
+        <p:spPr/>
+        <p:txBody>
+          <a:bodyPr/>
+          <a:lstStyle/>
+          <a:p>
+            <a:fld id="{8BADA5E7-275A-0142-8584-066D5199CC3B}" type="slidenum">
+              <a:rPr lang="en-US" smtClean="0"/>
+              <a:t>8</a:t>
+            </a:fld>
+            <a:endParaRPr lang="en-US"/>
           </a:p>
         </p:txBody>
       </p:sp>
@@ -11524,12 +14778,12 @@
   </p:clrMapOvr>
   <mc:AlternateContent xmlns:mc="http://schemas.openxmlformats.org/markup-compatibility/2006" xmlns:p14="http://schemas.microsoft.com/office/powerpoint/2010/main">
     <mc:Choice Requires="p14">
-      <p:transition spd="slow" p14:dur="1200">
-        <p14:prism/>
+      <p:transition spd="slow" p14:dur="2000">
+        <p14:prism isContent="1"/>
       </p:transition>
     </mc:Choice>
     <mc:Fallback xmlns="">
-      <p:transition xmlns:p14="http://schemas.microsoft.com/office/powerpoint/2010/main" spd="slow">
+      <p:transition spd="slow">
         <p:fade/>
       </p:transition>
     </mc:Fallback>
@@ -11556,6 +14810,36 @@
       </p:grpSpPr>
       <p:sp>
         <p:nvSpPr>
+          <p:cNvPr id="3" name="Title 2">
+            <a:extLst>
+              <a:ext uri="{FF2B5EF4-FFF2-40B4-BE49-F238E27FC236}">
+                <a16:creationId xmlns:a16="http://schemas.microsoft.com/office/drawing/2014/main" id="{F97BF108-C345-01AC-C215-8AEF46E15F08}"/>
+              </a:ext>
+            </a:extLst>
+          </p:cNvPr>
+          <p:cNvSpPr>
+            <a:spLocks noGrp="1"/>
+          </p:cNvSpPr>
+          <p:nvPr>
+            <p:ph type="title"/>
+          </p:nvPr>
+        </p:nvSpPr>
+        <p:spPr/>
+        <p:txBody>
+          <a:bodyPr>
+            <a:normAutofit fontScale="90000"/>
+          </a:bodyPr>
+          <a:lstStyle/>
+          <a:p>
+            <a:r>
+              <a:rPr lang="en-US" dirty="0"/>
+              <a:t>Core OOP Concepts</a:t>
+            </a:r>
+          </a:p>
+        </p:txBody>
+      </p:sp>
+      <p:sp>
+        <p:nvSpPr>
           <p:cNvPr id="2" name="Content Placeholder 1">
             <a:extLst>
               <a:ext uri="{FF2B5EF4-FFF2-40B4-BE49-F238E27FC236}">
@@ -11573,7 +14857,7 @@
         <p:spPr/>
         <p:txBody>
           <a:bodyPr>
-            <a:normAutofit/>
+            <a:normAutofit lnSpcReduction="10000"/>
           </a:bodyPr>
           <a:lstStyle/>
           <a:p>
@@ -11621,31 +14905,87 @@
       </p:sp>
       <p:sp>
         <p:nvSpPr>
-          <p:cNvPr id="3" name="Title 2">
-            <a:extLst>
-              <a:ext uri="{FF2B5EF4-FFF2-40B4-BE49-F238E27FC236}">
-                <a16:creationId xmlns:a16="http://schemas.microsoft.com/office/drawing/2014/main" id="{F97BF108-C345-01AC-C215-8AEF46E15F08}"/>
-              </a:ext>
-            </a:extLst>
-          </p:cNvPr>
-          <p:cNvSpPr>
-            <a:spLocks noGrp="1"/>
-          </p:cNvSpPr>
-          <p:nvPr>
-            <p:ph type="title"/>
-          </p:nvPr>
-        </p:nvSpPr>
-        <p:spPr/>
-        <p:txBody>
-          <a:bodyPr>
-            <a:normAutofit/>
-          </a:bodyPr>
-          <a:lstStyle/>
-          <a:p>
-            <a:r>
-              <a:rPr lang="en-US" dirty="0"/>
-              <a:t>Core OOP Concepts</a:t>
-            </a:r>
+          <p:cNvPr id="4" name="Date Placeholder 3">
+            <a:extLst>
+              <a:ext uri="{FF2B5EF4-FFF2-40B4-BE49-F238E27FC236}">
+                <a16:creationId xmlns:a16="http://schemas.microsoft.com/office/drawing/2014/main" id="{FA086418-0B6E-D91C-9411-02AB36413F65}"/>
+              </a:ext>
+            </a:extLst>
+          </p:cNvPr>
+          <p:cNvSpPr>
+            <a:spLocks noGrp="1"/>
+          </p:cNvSpPr>
+          <p:nvPr>
+            <p:ph type="dt" sz="half" idx="10"/>
+          </p:nvPr>
+        </p:nvSpPr>
+        <p:spPr/>
+        <p:txBody>
+          <a:bodyPr/>
+          <a:lstStyle/>
+          <a:p>
+            <a:fld id="{FADDA4CC-BF54-AA4A-9DFD-327C00ADAE0D}" type="datetime1">
+              <a:rPr lang="en-US" smtClean="0"/>
+              <a:t>10/8/26</a:t>
+            </a:fld>
+            <a:endParaRPr lang="en-US"/>
+          </a:p>
+        </p:txBody>
+      </p:sp>
+      <p:sp>
+        <p:nvSpPr>
+          <p:cNvPr id="5" name="Footer Placeholder 4">
+            <a:extLst>
+              <a:ext uri="{FF2B5EF4-FFF2-40B4-BE49-F238E27FC236}">
+                <a16:creationId xmlns:a16="http://schemas.microsoft.com/office/drawing/2014/main" id="{47D36499-0C39-C13E-7EAC-2291F3FC438A}"/>
+              </a:ext>
+            </a:extLst>
+          </p:cNvPr>
+          <p:cNvSpPr>
+            <a:spLocks noGrp="1"/>
+          </p:cNvSpPr>
+          <p:nvPr>
+            <p:ph type="ftr" sz="quarter" idx="11"/>
+          </p:nvPr>
+        </p:nvSpPr>
+        <p:spPr/>
+        <p:txBody>
+          <a:bodyPr/>
+          <a:lstStyle/>
+          <a:p>
+            <a:r>
+              <a:rPr lang="en-US"/>
+              <a:t>© Steve Beaty and others as cited</a:t>
+            </a:r>
+          </a:p>
+        </p:txBody>
+      </p:sp>
+      <p:sp>
+        <p:nvSpPr>
+          <p:cNvPr id="6" name="Slide Number Placeholder 5">
+            <a:extLst>
+              <a:ext uri="{FF2B5EF4-FFF2-40B4-BE49-F238E27FC236}">
+                <a16:creationId xmlns:a16="http://schemas.microsoft.com/office/drawing/2014/main" id="{598DF58D-CD68-318B-0651-182D3C5BEB3E}"/>
+              </a:ext>
+            </a:extLst>
+          </p:cNvPr>
+          <p:cNvSpPr>
+            <a:spLocks noGrp="1"/>
+          </p:cNvSpPr>
+          <p:nvPr>
+            <p:ph type="sldNum" sz="quarter" idx="12"/>
+          </p:nvPr>
+        </p:nvSpPr>
+        <p:spPr/>
+        <p:txBody>
+          <a:bodyPr/>
+          <a:lstStyle/>
+          <a:p>
+            <a:fld id="{8BADA5E7-275A-0142-8584-066D5199CC3B}" type="slidenum">
+              <a:rPr lang="en-US" smtClean="0"/>
+              <a:t>9</a:t>
+            </a:fld>
+            <a:endParaRPr lang="en-US"/>
           </a:p>
         </p:txBody>
       </p:sp>
@@ -11661,12 +15001,12 @@
   </p:clrMapOvr>
   <mc:AlternateContent xmlns:mc="http://schemas.openxmlformats.org/markup-compatibility/2006" xmlns:p14="http://schemas.microsoft.com/office/powerpoint/2010/main">
     <mc:Choice Requires="p14">
-      <p:transition spd="slow" p14:dur="1200">
-        <p14:prism/>
+      <p:transition spd="slow" p14:dur="2000">
+        <p14:prism isContent="1"/>
       </p:transition>
     </mc:Choice>
     <mc:Fallback xmlns="">
-      <p:transition xmlns:p14="http://schemas.microsoft.com/office/powerpoint/2010/main" spd="slow">
+      <p:transition spd="slow">
         <p:fade/>
       </p:transition>
     </mc:Fallback>
@@ -11993,7 +15333,7 @@
   <a:extraClrSchemeLst/>
   <a:extLst>
     <a:ext uri="{05A4C25C-085E-4340-85A3-A5531E510DB2}">
-      <thm15:themeFamily xmlns:thm15="http://schemas.microsoft.com/office/thememl/2012/main" name="Presentation6" id="{19DD2CDB-A181-F945-ADD9-05B41BED0346}" vid="{739F90C6-ACCF-9945-B1AA-B9555E82DD28}"/>
+      <thm15:themeFamily xmlns:thm15="http://schemas.microsoft.com/office/thememl/2012/main" name="Presentation1" id="{9DA9736E-330F-4D40-A0AF-1CC780C29072}" vid="{881790AE-4280-6941-9F6C-19A6C408C41E}"/>
     </a:ext>
   </a:extLst>
 </a:theme>
